--- a/SUPER ADMIN ROLE - DEAN ROLE.pptx
+++ b/SUPER ADMIN ROLE - DEAN ROLE.pptx
@@ -4013,6 +4013,50 @@
           </a:prstGeom>
         </p:spPr>
       </p:pic>
+      <p:sp>
+        <p:nvSpPr>
+          <p:cNvPr id="7" name="TextBox 6">
+            <a:extLst>
+              <a:ext uri="{FF2B5EF4-FFF2-40B4-BE49-F238E27FC236}">
+                <a16:creationId xmlns:a16="http://schemas.microsoft.com/office/drawing/2014/main" id="{26810F9D-D1E7-F720-1327-3AA66B99283A}"/>
+              </a:ext>
+            </a:extLst>
+          </p:cNvPr>
+          <p:cNvSpPr txBox="1"/>
+          <p:nvPr/>
+        </p:nvSpPr>
+        <p:spPr>
+          <a:xfrm>
+            <a:off x="1941689" y="4312356"/>
+            <a:ext cx="6163733" cy="923330"/>
+          </a:xfrm>
+          <a:prstGeom prst="rect">
+            <a:avLst/>
+          </a:prstGeom>
+          <a:noFill/>
+        </p:spPr>
+        <p:txBody>
+          <a:bodyPr wrap="square" rtlCol="0">
+            <a:spAutoFit/>
+          </a:bodyPr>
+          <a:lstStyle/>
+          <a:p>
+            <a:r>
+              <a:rPr lang="en-US" b="1" dirty="0">
+                <a:solidFill>
+                  <a:srgbClr val="FF0000"/>
+                </a:solidFill>
+              </a:rPr>
+              <a:t>This is Dean (Super Admin) Access Dashboard and Dean has complete access of all Departments, Faculty Members, Courses and Students.</a:t>
+            </a:r>
+            <a:r>
+              <a:rPr lang="en-US" dirty="0"/>
+              <a:t> </a:t>
+            </a:r>
+            <a:endParaRPr lang="en-PK" dirty="0"/>
+          </a:p>
+        </p:txBody>
+      </p:sp>
     </p:spTree>
     <p:extLst>
       <p:ext uri="{BB962C8B-B14F-4D97-AF65-F5344CB8AC3E}">
@@ -4151,6 +4195,36 @@
           </a:p>
         </p:txBody>
       </p:sp>
+      <p:pic>
+        <p:nvPicPr>
+          <p:cNvPr id="6" name="Picture 5">
+            <a:extLst>
+              <a:ext uri="{FF2B5EF4-FFF2-40B4-BE49-F238E27FC236}">
+                <a16:creationId xmlns:a16="http://schemas.microsoft.com/office/drawing/2014/main" id="{292FE8D5-3363-053D-1532-28E35E053D8F}"/>
+              </a:ext>
+            </a:extLst>
+          </p:cNvPr>
+          <p:cNvPicPr>
+            <a:picLocks noChangeAspect="1"/>
+          </p:cNvPicPr>
+          <p:nvPr/>
+        </p:nvPicPr>
+        <p:blipFill>
+          <a:blip r:embed="rId2"/>
+          <a:stretch>
+            <a:fillRect/>
+          </a:stretch>
+        </p:blipFill>
+        <p:spPr>
+          <a:xfrm>
+            <a:off x="0" y="0"/>
+            <a:ext cx="12192000" cy="6357546"/>
+          </a:xfrm>
+          <a:prstGeom prst="rect">
+            <a:avLst/>
+          </a:prstGeom>
+        </p:spPr>
+      </p:pic>
     </p:spTree>
     <p:extLst>
       <p:ext uri="{BB962C8B-B14F-4D97-AF65-F5344CB8AC3E}">

--- a/SUPER ADMIN ROLE - DEAN ROLE.pptx
+++ b/SUPER ADMIN ROLE - DEAN ROLE.pptx
@@ -4225,6 +4225,50 @@
           </a:prstGeom>
         </p:spPr>
       </p:pic>
+      <p:sp>
+        <p:nvSpPr>
+          <p:cNvPr id="7" name="TextBox 6">
+            <a:extLst>
+              <a:ext uri="{FF2B5EF4-FFF2-40B4-BE49-F238E27FC236}">
+                <a16:creationId xmlns:a16="http://schemas.microsoft.com/office/drawing/2014/main" id="{18D940F8-F89E-7673-A2D7-0815E7A9D059}"/>
+              </a:ext>
+            </a:extLst>
+          </p:cNvPr>
+          <p:cNvSpPr txBox="1"/>
+          <p:nvPr/>
+        </p:nvSpPr>
+        <p:spPr>
+          <a:xfrm>
+            <a:off x="8771466" y="4001294"/>
+            <a:ext cx="3183467" cy="646331"/>
+          </a:xfrm>
+          <a:prstGeom prst="rect">
+            <a:avLst/>
+          </a:prstGeom>
+          <a:noFill/>
+        </p:spPr>
+        <p:txBody>
+          <a:bodyPr wrap="square" rtlCol="0">
+            <a:spAutoFit/>
+          </a:bodyPr>
+          <a:lstStyle/>
+          <a:p>
+            <a:r>
+              <a:rPr lang="en-US" b="1" dirty="0">
+                <a:solidFill>
+                  <a:srgbClr val="FF0000"/>
+                </a:solidFill>
+              </a:rPr>
+              <a:t>Dean can Change HOD of Any department by click Edit Button</a:t>
+            </a:r>
+            <a:endParaRPr lang="en-PK" b="1" dirty="0">
+              <a:solidFill>
+                <a:srgbClr val="FF0000"/>
+              </a:solidFill>
+            </a:endParaRPr>
+          </a:p>
+        </p:txBody>
+      </p:sp>
     </p:spTree>
     <p:extLst>
       <p:ext uri="{BB962C8B-B14F-4D97-AF65-F5344CB8AC3E}">

--- a/SUPER ADMIN ROLE - DEAN ROLE.pptx
+++ b/SUPER ADMIN ROLE - DEAN ROLE.pptx
@@ -8,10 +8,19 @@
     <p:sldId id="256" r:id="rId2"/>
     <p:sldId id="262" r:id="rId3"/>
     <p:sldId id="261" r:id="rId4"/>
-    <p:sldId id="257" r:id="rId5"/>
-    <p:sldId id="258" r:id="rId6"/>
-    <p:sldId id="259" r:id="rId7"/>
-    <p:sldId id="260" r:id="rId8"/>
+    <p:sldId id="263" r:id="rId5"/>
+    <p:sldId id="264" r:id="rId6"/>
+    <p:sldId id="265" r:id="rId7"/>
+    <p:sldId id="266" r:id="rId8"/>
+    <p:sldId id="267" r:id="rId9"/>
+    <p:sldId id="257" r:id="rId10"/>
+    <p:sldId id="258" r:id="rId11"/>
+    <p:sldId id="259" r:id="rId12"/>
+    <p:sldId id="268" r:id="rId13"/>
+    <p:sldId id="269" r:id="rId14"/>
+    <p:sldId id="270" r:id="rId15"/>
+    <p:sldId id="271" r:id="rId16"/>
+    <p:sldId id="260" r:id="rId17"/>
   </p:sldIdLst>
   <p:sldSz cx="12192000" cy="6858000"/>
   <p:notesSz cx="6858000" cy="9144000"/>
@@ -110,6 +119,11 @@
       </a:defRPr>
     </a:lvl9pPr>
   </p:defaultTextStyle>
+  <p:extLst>
+    <p:ext uri="{EFAFB233-063F-42B5-8137-9DF3F51BA10A}">
+      <p15:sldGuideLst xmlns:p15="http://schemas.microsoft.com/office/powerpoint/2012/main"/>
+    </p:ext>
+  </p:extLst>
 </p:presentation>
 </file>
 
@@ -262,7 +276,7 @@
           <a:p>
             <a:fld id="{59730A62-9116-4267-99FC-E7DD97509EF7}" type="datetimeFigureOut">
               <a:rPr lang="en-PK" smtClean="0"/>
-              <a:t>28/03/2026</a:t>
+              <a:t>29/03/2026</a:t>
             </a:fld>
             <a:endParaRPr lang="en-PK"/>
           </a:p>
@@ -462,7 +476,7 @@
           <a:p>
             <a:fld id="{59730A62-9116-4267-99FC-E7DD97509EF7}" type="datetimeFigureOut">
               <a:rPr lang="en-PK" smtClean="0"/>
-              <a:t>28/03/2026</a:t>
+              <a:t>29/03/2026</a:t>
             </a:fld>
             <a:endParaRPr lang="en-PK"/>
           </a:p>
@@ -672,7 +686,7 @@
           <a:p>
             <a:fld id="{59730A62-9116-4267-99FC-E7DD97509EF7}" type="datetimeFigureOut">
               <a:rPr lang="en-PK" smtClean="0"/>
-              <a:t>28/03/2026</a:t>
+              <a:t>29/03/2026</a:t>
             </a:fld>
             <a:endParaRPr lang="en-PK"/>
           </a:p>
@@ -872,7 +886,7 @@
           <a:p>
             <a:fld id="{59730A62-9116-4267-99FC-E7DD97509EF7}" type="datetimeFigureOut">
               <a:rPr lang="en-PK" smtClean="0"/>
-              <a:t>28/03/2026</a:t>
+              <a:t>29/03/2026</a:t>
             </a:fld>
             <a:endParaRPr lang="en-PK"/>
           </a:p>
@@ -1148,7 +1162,7 @@
           <a:p>
             <a:fld id="{59730A62-9116-4267-99FC-E7DD97509EF7}" type="datetimeFigureOut">
               <a:rPr lang="en-PK" smtClean="0"/>
-              <a:t>28/03/2026</a:t>
+              <a:t>29/03/2026</a:t>
             </a:fld>
             <a:endParaRPr lang="en-PK"/>
           </a:p>
@@ -1416,7 +1430,7 @@
           <a:p>
             <a:fld id="{59730A62-9116-4267-99FC-E7DD97509EF7}" type="datetimeFigureOut">
               <a:rPr lang="en-PK" smtClean="0"/>
-              <a:t>28/03/2026</a:t>
+              <a:t>29/03/2026</a:t>
             </a:fld>
             <a:endParaRPr lang="en-PK"/>
           </a:p>
@@ -1831,7 +1845,7 @@
           <a:p>
             <a:fld id="{59730A62-9116-4267-99FC-E7DD97509EF7}" type="datetimeFigureOut">
               <a:rPr lang="en-PK" smtClean="0"/>
-              <a:t>28/03/2026</a:t>
+              <a:t>29/03/2026</a:t>
             </a:fld>
             <a:endParaRPr lang="en-PK"/>
           </a:p>
@@ -1973,7 +1987,7 @@
           <a:p>
             <a:fld id="{59730A62-9116-4267-99FC-E7DD97509EF7}" type="datetimeFigureOut">
               <a:rPr lang="en-PK" smtClean="0"/>
-              <a:t>28/03/2026</a:t>
+              <a:t>29/03/2026</a:t>
             </a:fld>
             <a:endParaRPr lang="en-PK"/>
           </a:p>
@@ -2086,7 +2100,7 @@
           <a:p>
             <a:fld id="{59730A62-9116-4267-99FC-E7DD97509EF7}" type="datetimeFigureOut">
               <a:rPr lang="en-PK" smtClean="0"/>
-              <a:t>28/03/2026</a:t>
+              <a:t>29/03/2026</a:t>
             </a:fld>
             <a:endParaRPr lang="en-PK"/>
           </a:p>
@@ -2399,7 +2413,7 @@
           <a:p>
             <a:fld id="{59730A62-9116-4267-99FC-E7DD97509EF7}" type="datetimeFigureOut">
               <a:rPr lang="en-PK" smtClean="0"/>
-              <a:t>28/03/2026</a:t>
+              <a:t>29/03/2026</a:t>
             </a:fld>
             <a:endParaRPr lang="en-PK"/>
           </a:p>
@@ -2688,7 +2702,7 @@
           <a:p>
             <a:fld id="{59730A62-9116-4267-99FC-E7DD97509EF7}" type="datetimeFigureOut">
               <a:rPr lang="en-PK" smtClean="0"/>
-              <a:t>28/03/2026</a:t>
+              <a:t>29/03/2026</a:t>
             </a:fld>
             <a:endParaRPr lang="en-PK"/>
           </a:p>
@@ -2931,7 +2945,7 @@
           <a:p>
             <a:fld id="{59730A62-9116-4267-99FC-E7DD97509EF7}" type="datetimeFigureOut">
               <a:rPr lang="en-PK" smtClean="0"/>
-              <a:t>28/03/2026</a:t>
+              <a:t>29/03/2026</a:t>
             </a:fld>
             <a:endParaRPr lang="en-PK"/>
           </a:p>
@@ -3553,6 +3567,1516 @@
 </p:sld>
 </file>
 
+<file path=ppt/slides/slide10.xml><?xml version="1.0" encoding="utf-8"?>
+<p:sld xmlns:a="http://schemas.openxmlformats.org/drawingml/2006/main" xmlns:r="http://schemas.openxmlformats.org/officeDocument/2006/relationships" xmlns:p="http://schemas.openxmlformats.org/presentationml/2006/main">
+  <p:cSld>
+    <p:spTree>
+      <p:nvGrpSpPr>
+        <p:cNvPr id="1" name="">
+          <a:extLst>
+            <a:ext uri="{FF2B5EF4-FFF2-40B4-BE49-F238E27FC236}">
+              <a16:creationId xmlns:a16="http://schemas.microsoft.com/office/drawing/2014/main" id="{5E3CCF33-EBDC-EFCA-3651-9B5809E8C569}"/>
+            </a:ext>
+          </a:extLst>
+        </p:cNvPr>
+        <p:cNvGrpSpPr/>
+        <p:nvPr/>
+      </p:nvGrpSpPr>
+      <p:grpSpPr>
+        <a:xfrm>
+          <a:off x="0" y="0"/>
+          <a:ext cx="0" cy="0"/>
+          <a:chOff x="0" y="0"/>
+          <a:chExt cx="0" cy="0"/>
+        </a:xfrm>
+      </p:grpSpPr>
+      <p:sp>
+        <p:nvSpPr>
+          <p:cNvPr id="2" name="Title 1">
+            <a:extLst>
+              <a:ext uri="{FF2B5EF4-FFF2-40B4-BE49-F238E27FC236}">
+                <a16:creationId xmlns:a16="http://schemas.microsoft.com/office/drawing/2014/main" id="{772ACBAA-6685-11AE-B969-CAB25E0A2A39}"/>
+              </a:ext>
+            </a:extLst>
+          </p:cNvPr>
+          <p:cNvSpPr>
+            <a:spLocks noGrp="1"/>
+          </p:cNvSpPr>
+          <p:nvPr>
+            <p:ph type="title"/>
+          </p:nvPr>
+        </p:nvSpPr>
+        <p:spPr/>
+        <p:txBody>
+          <a:bodyPr/>
+          <a:lstStyle/>
+          <a:p>
+            <a:endParaRPr lang="en-PK"/>
+          </a:p>
+        </p:txBody>
+      </p:sp>
+      <p:sp>
+        <p:nvSpPr>
+          <p:cNvPr id="3" name="Content Placeholder 2">
+            <a:extLst>
+              <a:ext uri="{FF2B5EF4-FFF2-40B4-BE49-F238E27FC236}">
+                <a16:creationId xmlns:a16="http://schemas.microsoft.com/office/drawing/2014/main" id="{CE456A63-4A11-9D1D-30C1-D496CC83C63B}"/>
+              </a:ext>
+            </a:extLst>
+          </p:cNvPr>
+          <p:cNvSpPr>
+            <a:spLocks noGrp="1"/>
+          </p:cNvSpPr>
+          <p:nvPr>
+            <p:ph idx="1"/>
+          </p:nvPr>
+        </p:nvSpPr>
+        <p:spPr/>
+        <p:txBody>
+          <a:bodyPr/>
+          <a:lstStyle/>
+          <a:p>
+            <a:endParaRPr lang="en-PK"/>
+          </a:p>
+        </p:txBody>
+      </p:sp>
+      <p:sp>
+        <p:nvSpPr>
+          <p:cNvPr id="4" name="TextBox 3">
+            <a:extLst>
+              <a:ext uri="{FF2B5EF4-FFF2-40B4-BE49-F238E27FC236}">
+                <a16:creationId xmlns:a16="http://schemas.microsoft.com/office/drawing/2014/main" id="{FCC819DA-522B-2A13-944F-626853BC3536}"/>
+              </a:ext>
+            </a:extLst>
+          </p:cNvPr>
+          <p:cNvSpPr txBox="1"/>
+          <p:nvPr/>
+        </p:nvSpPr>
+        <p:spPr>
+          <a:xfrm>
+            <a:off x="152400" y="6488668"/>
+            <a:ext cx="11887200" cy="369332"/>
+          </a:xfrm>
+          <a:prstGeom prst="rect">
+            <a:avLst/>
+          </a:prstGeom>
+          <a:noFill/>
+        </p:spPr>
+        <p:txBody>
+          <a:bodyPr wrap="square" rtlCol="0">
+            <a:spAutoFit/>
+          </a:bodyPr>
+          <a:lstStyle/>
+          <a:p>
+            <a:r>
+              <a:rPr lang="en-US" b="1" dirty="0">
+                <a:solidFill>
+                  <a:srgbClr val="0070C0"/>
+                </a:solidFill>
+              </a:rPr>
+              <a:t>FACULTY OF PHARMACY AND PHARMACEUTICAL SCIENCES                                                                               </a:t>
+            </a:r>
+            <a:r>
+              <a:rPr lang="en-US" b="1" dirty="0">
+                <a:solidFill>
+                  <a:schemeClr val="accent2"/>
+                </a:solidFill>
+              </a:rPr>
+              <a:t>SOFTSOLS PAKISTAN</a:t>
+            </a:r>
+            <a:endParaRPr lang="en-PK" b="1" dirty="0">
+              <a:solidFill>
+                <a:schemeClr val="accent2"/>
+              </a:solidFill>
+            </a:endParaRPr>
+          </a:p>
+        </p:txBody>
+      </p:sp>
+      <p:pic>
+        <p:nvPicPr>
+          <p:cNvPr id="6" name="Picture 5">
+            <a:extLst>
+              <a:ext uri="{FF2B5EF4-FFF2-40B4-BE49-F238E27FC236}">
+                <a16:creationId xmlns:a16="http://schemas.microsoft.com/office/drawing/2014/main" id="{292FE8D5-3363-053D-1532-28E35E053D8F}"/>
+              </a:ext>
+            </a:extLst>
+          </p:cNvPr>
+          <p:cNvPicPr>
+            <a:picLocks noChangeAspect="1"/>
+          </p:cNvPicPr>
+          <p:nvPr/>
+        </p:nvPicPr>
+        <p:blipFill>
+          <a:blip r:embed="rId2"/>
+          <a:stretch>
+            <a:fillRect/>
+          </a:stretch>
+        </p:blipFill>
+        <p:spPr>
+          <a:xfrm>
+            <a:off x="0" y="0"/>
+            <a:ext cx="12192000" cy="6357546"/>
+          </a:xfrm>
+          <a:prstGeom prst="rect">
+            <a:avLst/>
+          </a:prstGeom>
+        </p:spPr>
+      </p:pic>
+      <p:sp>
+        <p:nvSpPr>
+          <p:cNvPr id="7" name="TextBox 6">
+            <a:extLst>
+              <a:ext uri="{FF2B5EF4-FFF2-40B4-BE49-F238E27FC236}">
+                <a16:creationId xmlns:a16="http://schemas.microsoft.com/office/drawing/2014/main" id="{18D940F8-F89E-7673-A2D7-0815E7A9D059}"/>
+              </a:ext>
+            </a:extLst>
+          </p:cNvPr>
+          <p:cNvSpPr txBox="1"/>
+          <p:nvPr/>
+        </p:nvSpPr>
+        <p:spPr>
+          <a:xfrm>
+            <a:off x="8771466" y="4001294"/>
+            <a:ext cx="3183467" cy="646331"/>
+          </a:xfrm>
+          <a:prstGeom prst="rect">
+            <a:avLst/>
+          </a:prstGeom>
+          <a:noFill/>
+        </p:spPr>
+        <p:txBody>
+          <a:bodyPr wrap="square" rtlCol="0">
+            <a:spAutoFit/>
+          </a:bodyPr>
+          <a:lstStyle/>
+          <a:p>
+            <a:r>
+              <a:rPr lang="en-US" b="1" dirty="0">
+                <a:solidFill>
+                  <a:srgbClr val="FF0000"/>
+                </a:solidFill>
+              </a:rPr>
+              <a:t>Dean can Change HOD of Any department by click Edit Button</a:t>
+            </a:r>
+            <a:endParaRPr lang="en-PK" b="1" dirty="0">
+              <a:solidFill>
+                <a:srgbClr val="FF0000"/>
+              </a:solidFill>
+            </a:endParaRPr>
+          </a:p>
+        </p:txBody>
+      </p:sp>
+    </p:spTree>
+    <p:extLst>
+      <p:ext uri="{BB962C8B-B14F-4D97-AF65-F5344CB8AC3E}">
+        <p14:creationId xmlns:p14="http://schemas.microsoft.com/office/powerpoint/2010/main" val="1947302545"/>
+      </p:ext>
+    </p:extLst>
+  </p:cSld>
+  <p:clrMapOvr>
+    <a:masterClrMapping/>
+  </p:clrMapOvr>
+</p:sld>
+</file>
+
+<file path=ppt/slides/slide11.xml><?xml version="1.0" encoding="utf-8"?>
+<p:sld xmlns:a="http://schemas.openxmlformats.org/drawingml/2006/main" xmlns:r="http://schemas.openxmlformats.org/officeDocument/2006/relationships" xmlns:p="http://schemas.openxmlformats.org/presentationml/2006/main">
+  <p:cSld>
+    <p:spTree>
+      <p:nvGrpSpPr>
+        <p:cNvPr id="1" name="">
+          <a:extLst>
+            <a:ext uri="{FF2B5EF4-FFF2-40B4-BE49-F238E27FC236}">
+              <a16:creationId xmlns:a16="http://schemas.microsoft.com/office/drawing/2014/main" id="{BB32339E-8BAC-FC16-27CC-9125F2519066}"/>
+            </a:ext>
+          </a:extLst>
+        </p:cNvPr>
+        <p:cNvGrpSpPr/>
+        <p:nvPr/>
+      </p:nvGrpSpPr>
+      <p:grpSpPr>
+        <a:xfrm>
+          <a:off x="0" y="0"/>
+          <a:ext cx="0" cy="0"/>
+          <a:chOff x="0" y="0"/>
+          <a:chExt cx="0" cy="0"/>
+        </a:xfrm>
+      </p:grpSpPr>
+      <p:sp>
+        <p:nvSpPr>
+          <p:cNvPr id="2" name="Title 1">
+            <a:extLst>
+              <a:ext uri="{FF2B5EF4-FFF2-40B4-BE49-F238E27FC236}">
+                <a16:creationId xmlns:a16="http://schemas.microsoft.com/office/drawing/2014/main" id="{ADAE2C35-CDBA-4D1E-3CB7-FE3D07CD87B6}"/>
+              </a:ext>
+            </a:extLst>
+          </p:cNvPr>
+          <p:cNvSpPr>
+            <a:spLocks noGrp="1"/>
+          </p:cNvSpPr>
+          <p:nvPr>
+            <p:ph type="title"/>
+          </p:nvPr>
+        </p:nvSpPr>
+        <p:spPr/>
+        <p:txBody>
+          <a:bodyPr/>
+          <a:lstStyle/>
+          <a:p>
+            <a:endParaRPr lang="en-PK"/>
+          </a:p>
+        </p:txBody>
+      </p:sp>
+      <p:sp>
+        <p:nvSpPr>
+          <p:cNvPr id="3" name="Content Placeholder 2">
+            <a:extLst>
+              <a:ext uri="{FF2B5EF4-FFF2-40B4-BE49-F238E27FC236}">
+                <a16:creationId xmlns:a16="http://schemas.microsoft.com/office/drawing/2014/main" id="{CFFA6624-A255-A435-ED63-54FCC59CA284}"/>
+              </a:ext>
+            </a:extLst>
+          </p:cNvPr>
+          <p:cNvSpPr>
+            <a:spLocks noGrp="1"/>
+          </p:cNvSpPr>
+          <p:nvPr>
+            <p:ph idx="1"/>
+          </p:nvPr>
+        </p:nvSpPr>
+        <p:spPr/>
+        <p:txBody>
+          <a:bodyPr/>
+          <a:lstStyle/>
+          <a:p>
+            <a:endParaRPr lang="en-PK"/>
+          </a:p>
+        </p:txBody>
+      </p:sp>
+      <p:sp>
+        <p:nvSpPr>
+          <p:cNvPr id="4" name="TextBox 3">
+            <a:extLst>
+              <a:ext uri="{FF2B5EF4-FFF2-40B4-BE49-F238E27FC236}">
+                <a16:creationId xmlns:a16="http://schemas.microsoft.com/office/drawing/2014/main" id="{3821F8C2-020A-DF89-1D85-99BF516ECF41}"/>
+              </a:ext>
+            </a:extLst>
+          </p:cNvPr>
+          <p:cNvSpPr txBox="1"/>
+          <p:nvPr/>
+        </p:nvSpPr>
+        <p:spPr>
+          <a:xfrm>
+            <a:off x="152400" y="6488668"/>
+            <a:ext cx="11887200" cy="369332"/>
+          </a:xfrm>
+          <a:prstGeom prst="rect">
+            <a:avLst/>
+          </a:prstGeom>
+          <a:noFill/>
+        </p:spPr>
+        <p:txBody>
+          <a:bodyPr wrap="square" rtlCol="0">
+            <a:spAutoFit/>
+          </a:bodyPr>
+          <a:lstStyle/>
+          <a:p>
+            <a:r>
+              <a:rPr lang="en-US" b="1" dirty="0">
+                <a:solidFill>
+                  <a:srgbClr val="0070C0"/>
+                </a:solidFill>
+              </a:rPr>
+              <a:t>FACULTY OF PHARMACY AND PHARMACEUTICAL SCIENCES                                                                               </a:t>
+            </a:r>
+            <a:r>
+              <a:rPr lang="en-US" b="1" dirty="0">
+                <a:solidFill>
+                  <a:schemeClr val="accent2"/>
+                </a:solidFill>
+              </a:rPr>
+              <a:t>SOFTSOLS PAKISTAN</a:t>
+            </a:r>
+            <a:endParaRPr lang="en-PK" b="1" dirty="0">
+              <a:solidFill>
+                <a:schemeClr val="accent2"/>
+              </a:solidFill>
+            </a:endParaRPr>
+          </a:p>
+        </p:txBody>
+      </p:sp>
+      <p:pic>
+        <p:nvPicPr>
+          <p:cNvPr id="6" name="Picture 5">
+            <a:extLst>
+              <a:ext uri="{FF2B5EF4-FFF2-40B4-BE49-F238E27FC236}">
+                <a16:creationId xmlns:a16="http://schemas.microsoft.com/office/drawing/2014/main" id="{DC06891B-B370-44A4-F58F-13D4144C2B8A}"/>
+              </a:ext>
+            </a:extLst>
+          </p:cNvPr>
+          <p:cNvPicPr>
+            <a:picLocks noChangeAspect="1"/>
+          </p:cNvPicPr>
+          <p:nvPr/>
+        </p:nvPicPr>
+        <p:blipFill>
+          <a:blip r:embed="rId2"/>
+          <a:stretch>
+            <a:fillRect/>
+          </a:stretch>
+        </p:blipFill>
+        <p:spPr>
+          <a:xfrm>
+            <a:off x="0" y="0"/>
+            <a:ext cx="12192000" cy="6400800"/>
+          </a:xfrm>
+          <a:prstGeom prst="rect">
+            <a:avLst/>
+          </a:prstGeom>
+        </p:spPr>
+      </p:pic>
+      <p:sp>
+        <p:nvSpPr>
+          <p:cNvPr id="7" name="TextBox 6">
+            <a:extLst>
+              <a:ext uri="{FF2B5EF4-FFF2-40B4-BE49-F238E27FC236}">
+                <a16:creationId xmlns:a16="http://schemas.microsoft.com/office/drawing/2014/main" id="{7CA098C6-35DD-695A-9B18-D6B2A1D5B6B4}"/>
+              </a:ext>
+            </a:extLst>
+          </p:cNvPr>
+          <p:cNvSpPr txBox="1"/>
+          <p:nvPr/>
+        </p:nvSpPr>
+        <p:spPr>
+          <a:xfrm>
+            <a:off x="5853289" y="4001294"/>
+            <a:ext cx="6186311" cy="923330"/>
+          </a:xfrm>
+          <a:prstGeom prst="rect">
+            <a:avLst/>
+          </a:prstGeom>
+          <a:noFill/>
+        </p:spPr>
+        <p:txBody>
+          <a:bodyPr wrap="square" rtlCol="0">
+            <a:spAutoFit/>
+          </a:bodyPr>
+          <a:lstStyle/>
+          <a:p>
+            <a:r>
+              <a:rPr lang="en-US" b="1" dirty="0">
+                <a:solidFill>
+                  <a:srgbClr val="FF0000"/>
+                </a:solidFill>
+              </a:rPr>
+              <a:t>ADMIN CAN SET COURSES ACTIVE AS PER SEMESTER AND ALSO INDIVIDUAL COURSE.</a:t>
+            </a:r>
+          </a:p>
+          <a:p>
+            <a:r>
+              <a:rPr lang="en-US" b="1" dirty="0">
+                <a:solidFill>
+                  <a:srgbClr val="FF0000"/>
+                </a:solidFill>
+              </a:rPr>
+              <a:t>MANAGE ALL COURSES AND ALSO ADD NEW COURSES TOO</a:t>
+            </a:r>
+            <a:endParaRPr lang="en-PK" b="1" dirty="0">
+              <a:solidFill>
+                <a:srgbClr val="FF0000"/>
+              </a:solidFill>
+            </a:endParaRPr>
+          </a:p>
+        </p:txBody>
+      </p:sp>
+    </p:spTree>
+    <p:extLst>
+      <p:ext uri="{BB962C8B-B14F-4D97-AF65-F5344CB8AC3E}">
+        <p14:creationId xmlns:p14="http://schemas.microsoft.com/office/powerpoint/2010/main" val="3575898126"/>
+      </p:ext>
+    </p:extLst>
+  </p:cSld>
+  <p:clrMapOvr>
+    <a:masterClrMapping/>
+  </p:clrMapOvr>
+</p:sld>
+</file>
+
+<file path=ppt/slides/slide12.xml><?xml version="1.0" encoding="utf-8"?>
+<p:sld xmlns:a="http://schemas.openxmlformats.org/drawingml/2006/main" xmlns:r="http://schemas.openxmlformats.org/officeDocument/2006/relationships" xmlns:p="http://schemas.openxmlformats.org/presentationml/2006/main">
+  <p:cSld>
+    <p:spTree>
+      <p:nvGrpSpPr>
+        <p:cNvPr id="1" name="">
+          <a:extLst>
+            <a:ext uri="{FF2B5EF4-FFF2-40B4-BE49-F238E27FC236}">
+              <a16:creationId xmlns:a16="http://schemas.microsoft.com/office/drawing/2014/main" id="{F6DFC18F-3B32-D7EF-4416-67DB61DCC960}"/>
+            </a:ext>
+          </a:extLst>
+        </p:cNvPr>
+        <p:cNvGrpSpPr/>
+        <p:nvPr/>
+      </p:nvGrpSpPr>
+      <p:grpSpPr>
+        <a:xfrm>
+          <a:off x="0" y="0"/>
+          <a:ext cx="0" cy="0"/>
+          <a:chOff x="0" y="0"/>
+          <a:chExt cx="0" cy="0"/>
+        </a:xfrm>
+      </p:grpSpPr>
+      <p:sp>
+        <p:nvSpPr>
+          <p:cNvPr id="2" name="Title 1">
+            <a:extLst>
+              <a:ext uri="{FF2B5EF4-FFF2-40B4-BE49-F238E27FC236}">
+                <a16:creationId xmlns:a16="http://schemas.microsoft.com/office/drawing/2014/main" id="{3EEDDEF8-270B-0B21-E3DF-3F46323F112A}"/>
+              </a:ext>
+            </a:extLst>
+          </p:cNvPr>
+          <p:cNvSpPr>
+            <a:spLocks noGrp="1"/>
+          </p:cNvSpPr>
+          <p:nvPr>
+            <p:ph type="title"/>
+          </p:nvPr>
+        </p:nvSpPr>
+        <p:spPr>
+          <a:xfrm>
+            <a:off x="395112" y="457200"/>
+            <a:ext cx="4376914" cy="1600200"/>
+          </a:xfrm>
+        </p:spPr>
+        <p:txBody>
+          <a:bodyPr/>
+          <a:lstStyle/>
+          <a:p>
+            <a:r>
+              <a:rPr lang="en-US" b="1" dirty="0">
+                <a:solidFill>
+                  <a:srgbClr val="0070C0"/>
+                </a:solidFill>
+              </a:rPr>
+              <a:t>Manager Course Material</a:t>
+            </a:r>
+            <a:endParaRPr lang="en-PK" b="1" dirty="0">
+              <a:solidFill>
+                <a:srgbClr val="0070C0"/>
+              </a:solidFill>
+            </a:endParaRPr>
+          </a:p>
+        </p:txBody>
+      </p:sp>
+      <p:sp>
+        <p:nvSpPr>
+          <p:cNvPr id="4" name="Text Placeholder 3">
+            <a:extLst>
+              <a:ext uri="{FF2B5EF4-FFF2-40B4-BE49-F238E27FC236}">
+                <a16:creationId xmlns:a16="http://schemas.microsoft.com/office/drawing/2014/main" id="{354AA340-BF76-7D39-AC56-C585CFE37C02}"/>
+              </a:ext>
+            </a:extLst>
+          </p:cNvPr>
+          <p:cNvSpPr>
+            <a:spLocks noGrp="1"/>
+          </p:cNvSpPr>
+          <p:nvPr>
+            <p:ph type="body" sz="half" idx="2"/>
+          </p:nvPr>
+        </p:nvSpPr>
+        <p:spPr/>
+        <p:txBody>
+          <a:bodyPr/>
+          <a:lstStyle/>
+          <a:p>
+            <a:r>
+              <a:rPr lang="en-US" dirty="0"/>
+              <a:t>Admin / Faculty (Teacher) can manage Course Content:</a:t>
+            </a:r>
+          </a:p>
+          <a:p>
+            <a:pPr marL="285750" indent="-285750">
+              <a:buFontTx/>
+              <a:buChar char="-"/>
+            </a:pPr>
+            <a:r>
+              <a:rPr lang="en-US" dirty="0"/>
+              <a:t>Add Any Document </a:t>
+            </a:r>
+          </a:p>
+          <a:p>
+            <a:pPr marL="285750" indent="-285750">
+              <a:buFontTx/>
+              <a:buChar char="-"/>
+            </a:pPr>
+            <a:r>
+              <a:rPr lang="en-US" dirty="0"/>
+              <a:t>Add any Image </a:t>
+            </a:r>
+          </a:p>
+          <a:p>
+            <a:pPr marL="285750" indent="-285750">
+              <a:buFontTx/>
+              <a:buChar char="-"/>
+            </a:pPr>
+            <a:r>
+              <a:rPr lang="en-US" dirty="0"/>
+              <a:t>Add YouTube Video</a:t>
+            </a:r>
+          </a:p>
+          <a:p>
+            <a:pPr marL="285750" indent="-285750">
+              <a:buFontTx/>
+              <a:buChar char="-"/>
+            </a:pPr>
+            <a:r>
+              <a:rPr lang="en-US" dirty="0"/>
+              <a:t>Add Video after uploading on Google Drive and share Link here</a:t>
+            </a:r>
+          </a:p>
+          <a:p>
+            <a:pPr marL="285750" indent="-285750">
+              <a:buFontTx/>
+              <a:buChar char="-"/>
+            </a:pPr>
+            <a:r>
+              <a:rPr lang="en-US" dirty="0"/>
+              <a:t>Add </a:t>
+            </a:r>
+            <a:r>
+              <a:rPr lang="en-US" b="1" dirty="0">
+                <a:solidFill>
+                  <a:srgbClr val="FF0000"/>
+                </a:solidFill>
+              </a:rPr>
+              <a:t>Scheduled Lecture</a:t>
+            </a:r>
+            <a:r>
+              <a:rPr lang="en-US" dirty="0"/>
+              <a:t> by uploading Video Lecture on Google Drive and share Link here</a:t>
+            </a:r>
+            <a:endParaRPr lang="en-PK" dirty="0"/>
+          </a:p>
+        </p:txBody>
+      </p:sp>
+      <p:sp>
+        <p:nvSpPr>
+          <p:cNvPr id="5" name="Content Placeholder 4">
+            <a:extLst>
+              <a:ext uri="{FF2B5EF4-FFF2-40B4-BE49-F238E27FC236}">
+                <a16:creationId xmlns:a16="http://schemas.microsoft.com/office/drawing/2014/main" id="{0123E6C1-2D8A-F5FC-1C1D-12072E032490}"/>
+              </a:ext>
+            </a:extLst>
+          </p:cNvPr>
+          <p:cNvSpPr>
+            <a:spLocks noGrp="1"/>
+          </p:cNvSpPr>
+          <p:nvPr>
+            <p:ph idx="1"/>
+          </p:nvPr>
+        </p:nvSpPr>
+        <p:spPr/>
+        <p:txBody>
+          <a:bodyPr/>
+          <a:lstStyle/>
+          <a:p>
+            <a:endParaRPr lang="en-PK"/>
+          </a:p>
+        </p:txBody>
+      </p:sp>
+      <p:pic>
+        <p:nvPicPr>
+          <p:cNvPr id="8" name="Picture 7">
+            <a:extLst>
+              <a:ext uri="{FF2B5EF4-FFF2-40B4-BE49-F238E27FC236}">
+                <a16:creationId xmlns:a16="http://schemas.microsoft.com/office/drawing/2014/main" id="{B066FB67-EE8B-62C5-E7B2-934FECE8BF85}"/>
+              </a:ext>
+            </a:extLst>
+          </p:cNvPr>
+          <p:cNvPicPr>
+            <a:picLocks noChangeAspect="1"/>
+          </p:cNvPicPr>
+          <p:nvPr/>
+        </p:nvPicPr>
+        <p:blipFill>
+          <a:blip r:embed="rId2"/>
+          <a:stretch>
+            <a:fillRect/>
+          </a:stretch>
+        </p:blipFill>
+        <p:spPr>
+          <a:xfrm>
+            <a:off x="5183187" y="-4764"/>
+            <a:ext cx="6331480" cy="6493431"/>
+          </a:xfrm>
+          <a:prstGeom prst="rect">
+            <a:avLst/>
+          </a:prstGeom>
+        </p:spPr>
+      </p:pic>
+      <p:sp>
+        <p:nvSpPr>
+          <p:cNvPr id="9" name="TextBox 8">
+            <a:extLst>
+              <a:ext uri="{FF2B5EF4-FFF2-40B4-BE49-F238E27FC236}">
+                <a16:creationId xmlns:a16="http://schemas.microsoft.com/office/drawing/2014/main" id="{1CDF46B3-4465-6E17-B298-DCB7CB2D27E4}"/>
+              </a:ext>
+            </a:extLst>
+          </p:cNvPr>
+          <p:cNvSpPr txBox="1"/>
+          <p:nvPr/>
+        </p:nvSpPr>
+        <p:spPr>
+          <a:xfrm>
+            <a:off x="152400" y="6488668"/>
+            <a:ext cx="11887200" cy="369332"/>
+          </a:xfrm>
+          <a:prstGeom prst="rect">
+            <a:avLst/>
+          </a:prstGeom>
+          <a:noFill/>
+        </p:spPr>
+        <p:txBody>
+          <a:bodyPr wrap="square" rtlCol="0">
+            <a:spAutoFit/>
+          </a:bodyPr>
+          <a:lstStyle/>
+          <a:p>
+            <a:r>
+              <a:rPr lang="en-US" b="1" dirty="0">
+                <a:solidFill>
+                  <a:srgbClr val="0070C0"/>
+                </a:solidFill>
+              </a:rPr>
+              <a:t>FACULTY OF PHARMACY AND PHARMACEUTICAL SCIENCES                                                                               </a:t>
+            </a:r>
+            <a:r>
+              <a:rPr lang="en-US" b="1" dirty="0">
+                <a:solidFill>
+                  <a:schemeClr val="accent2"/>
+                </a:solidFill>
+              </a:rPr>
+              <a:t>SOFTSOLS PAKISTAN</a:t>
+            </a:r>
+            <a:endParaRPr lang="en-PK" b="1" dirty="0">
+              <a:solidFill>
+                <a:schemeClr val="accent2"/>
+              </a:solidFill>
+            </a:endParaRPr>
+          </a:p>
+        </p:txBody>
+      </p:sp>
+    </p:spTree>
+    <p:extLst>
+      <p:ext uri="{BB962C8B-B14F-4D97-AF65-F5344CB8AC3E}">
+        <p14:creationId xmlns:p14="http://schemas.microsoft.com/office/powerpoint/2010/main" val="3759215684"/>
+      </p:ext>
+    </p:extLst>
+  </p:cSld>
+  <p:clrMapOvr>
+    <a:masterClrMapping/>
+  </p:clrMapOvr>
+</p:sld>
+</file>
+
+<file path=ppt/slides/slide13.xml><?xml version="1.0" encoding="utf-8"?>
+<p:sld xmlns:a="http://schemas.openxmlformats.org/drawingml/2006/main" xmlns:r="http://schemas.openxmlformats.org/officeDocument/2006/relationships" xmlns:p="http://schemas.openxmlformats.org/presentationml/2006/main">
+  <p:cSld>
+    <p:spTree>
+      <p:nvGrpSpPr>
+        <p:cNvPr id="1" name="">
+          <a:extLst>
+            <a:ext uri="{FF2B5EF4-FFF2-40B4-BE49-F238E27FC236}">
+              <a16:creationId xmlns:a16="http://schemas.microsoft.com/office/drawing/2014/main" id="{B166F889-19D2-7599-F698-804676332C3C}"/>
+            </a:ext>
+          </a:extLst>
+        </p:cNvPr>
+        <p:cNvGrpSpPr/>
+        <p:nvPr/>
+      </p:nvGrpSpPr>
+      <p:grpSpPr>
+        <a:xfrm>
+          <a:off x="0" y="0"/>
+          <a:ext cx="0" cy="0"/>
+          <a:chOff x="0" y="0"/>
+          <a:chExt cx="0" cy="0"/>
+        </a:xfrm>
+      </p:grpSpPr>
+      <p:sp>
+        <p:nvSpPr>
+          <p:cNvPr id="2" name="Title 1">
+            <a:extLst>
+              <a:ext uri="{FF2B5EF4-FFF2-40B4-BE49-F238E27FC236}">
+                <a16:creationId xmlns:a16="http://schemas.microsoft.com/office/drawing/2014/main" id="{035E5550-B204-1408-B380-CF2F2C525BB8}"/>
+              </a:ext>
+            </a:extLst>
+          </p:cNvPr>
+          <p:cNvSpPr>
+            <a:spLocks noGrp="1"/>
+          </p:cNvSpPr>
+          <p:nvPr>
+            <p:ph type="title"/>
+          </p:nvPr>
+        </p:nvSpPr>
+        <p:spPr>
+          <a:xfrm>
+            <a:off x="395112" y="457200"/>
+            <a:ext cx="4376914" cy="1600200"/>
+          </a:xfrm>
+        </p:spPr>
+        <p:txBody>
+          <a:bodyPr/>
+          <a:lstStyle/>
+          <a:p>
+            <a:r>
+              <a:rPr lang="en-US" b="1" dirty="0">
+                <a:solidFill>
+                  <a:srgbClr val="0070C0"/>
+                </a:solidFill>
+              </a:rPr>
+              <a:t>Assignment</a:t>
+            </a:r>
+            <a:endParaRPr lang="en-PK" b="1" dirty="0">
+              <a:solidFill>
+                <a:srgbClr val="0070C0"/>
+              </a:solidFill>
+            </a:endParaRPr>
+          </a:p>
+        </p:txBody>
+      </p:sp>
+      <p:sp>
+        <p:nvSpPr>
+          <p:cNvPr id="4" name="Text Placeholder 3">
+            <a:extLst>
+              <a:ext uri="{FF2B5EF4-FFF2-40B4-BE49-F238E27FC236}">
+                <a16:creationId xmlns:a16="http://schemas.microsoft.com/office/drawing/2014/main" id="{1A2E2F24-CC6C-0EF2-40D2-06A745C72D32}"/>
+              </a:ext>
+            </a:extLst>
+          </p:cNvPr>
+          <p:cNvSpPr>
+            <a:spLocks noGrp="1"/>
+          </p:cNvSpPr>
+          <p:nvPr>
+            <p:ph type="body" sz="half" idx="2"/>
+          </p:nvPr>
+        </p:nvSpPr>
+        <p:spPr>
+          <a:xfrm>
+            <a:off x="855488" y="2057400"/>
+            <a:ext cx="3932237" cy="3811588"/>
+          </a:xfrm>
+        </p:spPr>
+        <p:txBody>
+          <a:bodyPr/>
+          <a:lstStyle/>
+          <a:p>
+            <a:r>
+              <a:rPr lang="en-US" dirty="0"/>
+              <a:t>Dean / Faculty (Teacher) can add any assignment of their course.</a:t>
+            </a:r>
+          </a:p>
+          <a:p>
+            <a:endParaRPr lang="en-US" dirty="0"/>
+          </a:p>
+          <a:p>
+            <a:r>
+              <a:rPr lang="en-US" dirty="0"/>
+              <a:t>Option is available within Manage Material</a:t>
+            </a:r>
+          </a:p>
+          <a:p>
+            <a:endParaRPr lang="en-US" dirty="0"/>
+          </a:p>
+          <a:p>
+            <a:r>
+              <a:rPr lang="en-US" dirty="0"/>
+              <a:t>Submission also showing </a:t>
+            </a:r>
+            <a:r>
+              <a:rPr lang="en-US" dirty="0" err="1"/>
+              <a:t>alongwith</a:t>
+            </a:r>
+            <a:r>
+              <a:rPr lang="en-US" dirty="0"/>
+              <a:t> assignment posted </a:t>
+            </a:r>
+            <a:endParaRPr lang="en-PK" dirty="0"/>
+          </a:p>
+        </p:txBody>
+      </p:sp>
+      <p:pic>
+        <p:nvPicPr>
+          <p:cNvPr id="7" name="Content Placeholder 6">
+            <a:extLst>
+              <a:ext uri="{FF2B5EF4-FFF2-40B4-BE49-F238E27FC236}">
+                <a16:creationId xmlns:a16="http://schemas.microsoft.com/office/drawing/2014/main" id="{704DCB55-EEE0-27C5-318F-5BA58AFBAF3D}"/>
+              </a:ext>
+            </a:extLst>
+          </p:cNvPr>
+          <p:cNvPicPr>
+            <a:picLocks noGrp="1" noChangeAspect="1"/>
+          </p:cNvPicPr>
+          <p:nvPr>
+            <p:ph idx="1"/>
+          </p:nvPr>
+        </p:nvPicPr>
+        <p:blipFill>
+          <a:blip r:embed="rId2"/>
+          <a:stretch>
+            <a:fillRect/>
+          </a:stretch>
+        </p:blipFill>
+        <p:spPr>
+          <a:xfrm>
+            <a:off x="6298206" y="140758"/>
+            <a:ext cx="5306772" cy="6226175"/>
+          </a:xfrm>
+          <a:prstGeom prst="rect">
+            <a:avLst/>
+          </a:prstGeom>
+        </p:spPr>
+      </p:pic>
+      <p:sp>
+        <p:nvSpPr>
+          <p:cNvPr id="3" name="TextBox 2">
+            <a:extLst>
+              <a:ext uri="{FF2B5EF4-FFF2-40B4-BE49-F238E27FC236}">
+                <a16:creationId xmlns:a16="http://schemas.microsoft.com/office/drawing/2014/main" id="{9D56C92C-6B61-9005-5663-F20FEC631D82}"/>
+              </a:ext>
+            </a:extLst>
+          </p:cNvPr>
+          <p:cNvSpPr txBox="1"/>
+          <p:nvPr/>
+        </p:nvSpPr>
+        <p:spPr>
+          <a:xfrm>
+            <a:off x="152400" y="6488668"/>
+            <a:ext cx="11887200" cy="369332"/>
+          </a:xfrm>
+          <a:prstGeom prst="rect">
+            <a:avLst/>
+          </a:prstGeom>
+          <a:noFill/>
+        </p:spPr>
+        <p:txBody>
+          <a:bodyPr wrap="square" rtlCol="0">
+            <a:spAutoFit/>
+          </a:bodyPr>
+          <a:lstStyle/>
+          <a:p>
+            <a:r>
+              <a:rPr lang="en-US" b="1" dirty="0">
+                <a:solidFill>
+                  <a:srgbClr val="0070C0"/>
+                </a:solidFill>
+              </a:rPr>
+              <a:t>FACULTY OF PHARMACY AND PHARMACEUTICAL SCIENCES                                                                               </a:t>
+            </a:r>
+            <a:r>
+              <a:rPr lang="en-US" b="1" dirty="0">
+                <a:solidFill>
+                  <a:schemeClr val="accent2"/>
+                </a:solidFill>
+              </a:rPr>
+              <a:t>SOFTSOLS PAKISTAN</a:t>
+            </a:r>
+            <a:endParaRPr lang="en-PK" b="1" dirty="0">
+              <a:solidFill>
+                <a:schemeClr val="accent2"/>
+              </a:solidFill>
+            </a:endParaRPr>
+          </a:p>
+        </p:txBody>
+      </p:sp>
+    </p:spTree>
+    <p:extLst>
+      <p:ext uri="{BB962C8B-B14F-4D97-AF65-F5344CB8AC3E}">
+        <p14:creationId xmlns:p14="http://schemas.microsoft.com/office/powerpoint/2010/main" val="4291621399"/>
+      </p:ext>
+    </p:extLst>
+  </p:cSld>
+  <p:clrMapOvr>
+    <a:masterClrMapping/>
+  </p:clrMapOvr>
+</p:sld>
+</file>
+
+<file path=ppt/slides/slide14.xml><?xml version="1.0" encoding="utf-8"?>
+<p:sld xmlns:a="http://schemas.openxmlformats.org/drawingml/2006/main" xmlns:r="http://schemas.openxmlformats.org/officeDocument/2006/relationships" xmlns:p="http://schemas.openxmlformats.org/presentationml/2006/main">
+  <p:cSld>
+    <p:spTree>
+      <p:nvGrpSpPr>
+        <p:cNvPr id="1" name="">
+          <a:extLst>
+            <a:ext uri="{FF2B5EF4-FFF2-40B4-BE49-F238E27FC236}">
+              <a16:creationId xmlns:a16="http://schemas.microsoft.com/office/drawing/2014/main" id="{7625D15A-CA06-A474-77E1-28F186F1DBF8}"/>
+            </a:ext>
+          </a:extLst>
+        </p:cNvPr>
+        <p:cNvGrpSpPr/>
+        <p:nvPr/>
+      </p:nvGrpSpPr>
+      <p:grpSpPr>
+        <a:xfrm>
+          <a:off x="0" y="0"/>
+          <a:ext cx="0" cy="0"/>
+          <a:chOff x="0" y="0"/>
+          <a:chExt cx="0" cy="0"/>
+        </a:xfrm>
+      </p:grpSpPr>
+      <p:sp>
+        <p:nvSpPr>
+          <p:cNvPr id="2" name="Title 1">
+            <a:extLst>
+              <a:ext uri="{FF2B5EF4-FFF2-40B4-BE49-F238E27FC236}">
+                <a16:creationId xmlns:a16="http://schemas.microsoft.com/office/drawing/2014/main" id="{FADD5686-C278-7EB7-9311-FBDDC4A395E5}"/>
+              </a:ext>
+            </a:extLst>
+          </p:cNvPr>
+          <p:cNvSpPr>
+            <a:spLocks noGrp="1"/>
+          </p:cNvSpPr>
+          <p:nvPr>
+            <p:ph type="title"/>
+          </p:nvPr>
+        </p:nvSpPr>
+        <p:spPr>
+          <a:xfrm>
+            <a:off x="395112" y="457200"/>
+            <a:ext cx="4376914" cy="1600200"/>
+          </a:xfrm>
+        </p:spPr>
+        <p:txBody>
+          <a:bodyPr/>
+          <a:lstStyle/>
+          <a:p>
+            <a:r>
+              <a:rPr lang="en-US" b="1" dirty="0">
+                <a:solidFill>
+                  <a:srgbClr val="0070C0"/>
+                </a:solidFill>
+              </a:rPr>
+              <a:t>Manager Course Material</a:t>
+            </a:r>
+            <a:endParaRPr lang="en-PK" b="1" dirty="0">
+              <a:solidFill>
+                <a:srgbClr val="0070C0"/>
+              </a:solidFill>
+            </a:endParaRPr>
+          </a:p>
+        </p:txBody>
+      </p:sp>
+      <p:sp>
+        <p:nvSpPr>
+          <p:cNvPr id="4" name="Text Placeholder 3">
+            <a:extLst>
+              <a:ext uri="{FF2B5EF4-FFF2-40B4-BE49-F238E27FC236}">
+                <a16:creationId xmlns:a16="http://schemas.microsoft.com/office/drawing/2014/main" id="{2E8DAA50-7C25-E903-18F6-FB8684BAF070}"/>
+              </a:ext>
+            </a:extLst>
+          </p:cNvPr>
+          <p:cNvSpPr>
+            <a:spLocks noGrp="1"/>
+          </p:cNvSpPr>
+          <p:nvPr>
+            <p:ph type="body" sz="half" idx="2"/>
+          </p:nvPr>
+        </p:nvSpPr>
+        <p:spPr/>
+        <p:txBody>
+          <a:bodyPr/>
+          <a:lstStyle/>
+          <a:p>
+            <a:r>
+              <a:rPr lang="en-US" dirty="0"/>
+              <a:t>The Login page of Portal is Sign-In Access</a:t>
+            </a:r>
+          </a:p>
+          <a:p>
+            <a:endParaRPr lang="en-US" dirty="0"/>
+          </a:p>
+          <a:p>
+            <a:r>
+              <a:rPr lang="en-US" dirty="0"/>
+              <a:t>Login to Portal to access by inserting:</a:t>
+            </a:r>
+          </a:p>
+          <a:p>
+            <a:r>
+              <a:rPr lang="en-US" b="1" dirty="0"/>
+              <a:t>Email Address</a:t>
+            </a:r>
+          </a:p>
+          <a:p>
+            <a:r>
+              <a:rPr lang="en-US" b="1" dirty="0"/>
+              <a:t>Password</a:t>
+            </a:r>
+          </a:p>
+          <a:p>
+            <a:endParaRPr lang="en-US" dirty="0"/>
+          </a:p>
+          <a:p>
+            <a:r>
+              <a:rPr lang="en-US" dirty="0">
+                <a:solidFill>
+                  <a:srgbClr val="FF0000"/>
+                </a:solidFill>
+              </a:rPr>
+              <a:t>Click Sign In with new password to get access</a:t>
+            </a:r>
+          </a:p>
+          <a:p>
+            <a:endParaRPr lang="en-PK" dirty="0"/>
+          </a:p>
+        </p:txBody>
+      </p:sp>
+      <p:sp>
+        <p:nvSpPr>
+          <p:cNvPr id="5" name="Content Placeholder 4">
+            <a:extLst>
+              <a:ext uri="{FF2B5EF4-FFF2-40B4-BE49-F238E27FC236}">
+                <a16:creationId xmlns:a16="http://schemas.microsoft.com/office/drawing/2014/main" id="{F27E1831-EE8A-E117-09C8-45D9361BA232}"/>
+              </a:ext>
+            </a:extLst>
+          </p:cNvPr>
+          <p:cNvSpPr>
+            <a:spLocks noGrp="1"/>
+          </p:cNvSpPr>
+          <p:nvPr>
+            <p:ph idx="1"/>
+          </p:nvPr>
+        </p:nvSpPr>
+        <p:spPr/>
+        <p:txBody>
+          <a:bodyPr/>
+          <a:lstStyle/>
+          <a:p>
+            <a:endParaRPr lang="en-PK"/>
+          </a:p>
+        </p:txBody>
+      </p:sp>
+      <p:sp>
+        <p:nvSpPr>
+          <p:cNvPr id="3" name="TextBox 2">
+            <a:extLst>
+              <a:ext uri="{FF2B5EF4-FFF2-40B4-BE49-F238E27FC236}">
+                <a16:creationId xmlns:a16="http://schemas.microsoft.com/office/drawing/2014/main" id="{0EF27E48-08F4-C448-4F4F-26B28AB8E9EF}"/>
+              </a:ext>
+            </a:extLst>
+          </p:cNvPr>
+          <p:cNvSpPr txBox="1"/>
+          <p:nvPr/>
+        </p:nvSpPr>
+        <p:spPr>
+          <a:xfrm>
+            <a:off x="152400" y="6488668"/>
+            <a:ext cx="11887200" cy="369332"/>
+          </a:xfrm>
+          <a:prstGeom prst="rect">
+            <a:avLst/>
+          </a:prstGeom>
+          <a:noFill/>
+        </p:spPr>
+        <p:txBody>
+          <a:bodyPr wrap="square" rtlCol="0">
+            <a:spAutoFit/>
+          </a:bodyPr>
+          <a:lstStyle/>
+          <a:p>
+            <a:r>
+              <a:rPr lang="en-US" b="1" dirty="0">
+                <a:solidFill>
+                  <a:srgbClr val="0070C0"/>
+                </a:solidFill>
+              </a:rPr>
+              <a:t>FACULTY OF PHARMACY AND PHARMACEUTICAL SCIENCES                                                                               </a:t>
+            </a:r>
+            <a:r>
+              <a:rPr lang="en-US" b="1" dirty="0">
+                <a:solidFill>
+                  <a:schemeClr val="accent2"/>
+                </a:solidFill>
+              </a:rPr>
+              <a:t>SOFTSOLS PAKISTAN</a:t>
+            </a:r>
+            <a:endParaRPr lang="en-PK" b="1" dirty="0">
+              <a:solidFill>
+                <a:schemeClr val="accent2"/>
+              </a:solidFill>
+            </a:endParaRPr>
+          </a:p>
+        </p:txBody>
+      </p:sp>
+    </p:spTree>
+    <p:extLst>
+      <p:ext uri="{BB962C8B-B14F-4D97-AF65-F5344CB8AC3E}">
+        <p14:creationId xmlns:p14="http://schemas.microsoft.com/office/powerpoint/2010/main" val="2449895741"/>
+      </p:ext>
+    </p:extLst>
+  </p:cSld>
+  <p:clrMapOvr>
+    <a:masterClrMapping/>
+  </p:clrMapOvr>
+</p:sld>
+</file>
+
+<file path=ppt/slides/slide15.xml><?xml version="1.0" encoding="utf-8"?>
+<p:sld xmlns:a="http://schemas.openxmlformats.org/drawingml/2006/main" xmlns:r="http://schemas.openxmlformats.org/officeDocument/2006/relationships" xmlns:p="http://schemas.openxmlformats.org/presentationml/2006/main">
+  <p:cSld>
+    <p:spTree>
+      <p:nvGrpSpPr>
+        <p:cNvPr id="1" name="">
+          <a:extLst>
+            <a:ext uri="{FF2B5EF4-FFF2-40B4-BE49-F238E27FC236}">
+              <a16:creationId xmlns:a16="http://schemas.microsoft.com/office/drawing/2014/main" id="{BF31DE1C-03B3-90EE-4D90-EC5C56525BF3}"/>
+            </a:ext>
+          </a:extLst>
+        </p:cNvPr>
+        <p:cNvGrpSpPr/>
+        <p:nvPr/>
+      </p:nvGrpSpPr>
+      <p:grpSpPr>
+        <a:xfrm>
+          <a:off x="0" y="0"/>
+          <a:ext cx="0" cy="0"/>
+          <a:chOff x="0" y="0"/>
+          <a:chExt cx="0" cy="0"/>
+        </a:xfrm>
+      </p:grpSpPr>
+      <p:sp>
+        <p:nvSpPr>
+          <p:cNvPr id="2" name="Title 1">
+            <a:extLst>
+              <a:ext uri="{FF2B5EF4-FFF2-40B4-BE49-F238E27FC236}">
+                <a16:creationId xmlns:a16="http://schemas.microsoft.com/office/drawing/2014/main" id="{45D4D1DA-D842-8088-629C-5FF10E874E1B}"/>
+              </a:ext>
+            </a:extLst>
+          </p:cNvPr>
+          <p:cNvSpPr>
+            <a:spLocks noGrp="1"/>
+          </p:cNvSpPr>
+          <p:nvPr>
+            <p:ph type="title"/>
+          </p:nvPr>
+        </p:nvSpPr>
+        <p:spPr>
+          <a:xfrm>
+            <a:off x="395112" y="457200"/>
+            <a:ext cx="4376914" cy="1600200"/>
+          </a:xfrm>
+        </p:spPr>
+        <p:txBody>
+          <a:bodyPr/>
+          <a:lstStyle/>
+          <a:p>
+            <a:r>
+              <a:rPr lang="en-US" b="1" dirty="0">
+                <a:solidFill>
+                  <a:srgbClr val="0070C0"/>
+                </a:solidFill>
+              </a:rPr>
+              <a:t>Manager Course Material</a:t>
+            </a:r>
+            <a:endParaRPr lang="en-PK" b="1" dirty="0">
+              <a:solidFill>
+                <a:srgbClr val="0070C0"/>
+              </a:solidFill>
+            </a:endParaRPr>
+          </a:p>
+        </p:txBody>
+      </p:sp>
+      <p:sp>
+        <p:nvSpPr>
+          <p:cNvPr id="4" name="Text Placeholder 3">
+            <a:extLst>
+              <a:ext uri="{FF2B5EF4-FFF2-40B4-BE49-F238E27FC236}">
+                <a16:creationId xmlns:a16="http://schemas.microsoft.com/office/drawing/2014/main" id="{00C436DF-4F89-23C8-E9D8-EAC0464B9F0C}"/>
+              </a:ext>
+            </a:extLst>
+          </p:cNvPr>
+          <p:cNvSpPr>
+            <a:spLocks noGrp="1"/>
+          </p:cNvSpPr>
+          <p:nvPr>
+            <p:ph type="body" sz="half" idx="2"/>
+          </p:nvPr>
+        </p:nvSpPr>
+        <p:spPr/>
+        <p:txBody>
+          <a:bodyPr/>
+          <a:lstStyle/>
+          <a:p>
+            <a:r>
+              <a:rPr lang="en-US" dirty="0"/>
+              <a:t>The Login page of Portal is Sign-In Access</a:t>
+            </a:r>
+          </a:p>
+          <a:p>
+            <a:endParaRPr lang="en-US" dirty="0"/>
+          </a:p>
+          <a:p>
+            <a:r>
+              <a:rPr lang="en-US" dirty="0"/>
+              <a:t>Login to Portal to access by inserting:</a:t>
+            </a:r>
+          </a:p>
+          <a:p>
+            <a:r>
+              <a:rPr lang="en-US" b="1" dirty="0"/>
+              <a:t>Email Address</a:t>
+            </a:r>
+          </a:p>
+          <a:p>
+            <a:r>
+              <a:rPr lang="en-US" b="1" dirty="0"/>
+              <a:t>Password</a:t>
+            </a:r>
+          </a:p>
+          <a:p>
+            <a:endParaRPr lang="en-US" dirty="0"/>
+          </a:p>
+          <a:p>
+            <a:r>
+              <a:rPr lang="en-US" dirty="0">
+                <a:solidFill>
+                  <a:srgbClr val="FF0000"/>
+                </a:solidFill>
+              </a:rPr>
+              <a:t>Click Sign In with new password to get access</a:t>
+            </a:r>
+          </a:p>
+          <a:p>
+            <a:endParaRPr lang="en-PK" dirty="0"/>
+          </a:p>
+        </p:txBody>
+      </p:sp>
+      <p:sp>
+        <p:nvSpPr>
+          <p:cNvPr id="5" name="Content Placeholder 4">
+            <a:extLst>
+              <a:ext uri="{FF2B5EF4-FFF2-40B4-BE49-F238E27FC236}">
+                <a16:creationId xmlns:a16="http://schemas.microsoft.com/office/drawing/2014/main" id="{6D9EA833-0F89-FF68-B36D-3B8D94EAE140}"/>
+              </a:ext>
+            </a:extLst>
+          </p:cNvPr>
+          <p:cNvSpPr>
+            <a:spLocks noGrp="1"/>
+          </p:cNvSpPr>
+          <p:nvPr>
+            <p:ph idx="1"/>
+          </p:nvPr>
+        </p:nvSpPr>
+        <p:spPr/>
+        <p:txBody>
+          <a:bodyPr/>
+          <a:lstStyle/>
+          <a:p>
+            <a:endParaRPr lang="en-PK"/>
+          </a:p>
+        </p:txBody>
+      </p:sp>
+      <p:sp>
+        <p:nvSpPr>
+          <p:cNvPr id="3" name="TextBox 2">
+            <a:extLst>
+              <a:ext uri="{FF2B5EF4-FFF2-40B4-BE49-F238E27FC236}">
+                <a16:creationId xmlns:a16="http://schemas.microsoft.com/office/drawing/2014/main" id="{B1473922-33A9-0A3D-E74B-E4871C19B035}"/>
+              </a:ext>
+            </a:extLst>
+          </p:cNvPr>
+          <p:cNvSpPr txBox="1"/>
+          <p:nvPr/>
+        </p:nvSpPr>
+        <p:spPr>
+          <a:xfrm>
+            <a:off x="152400" y="6488668"/>
+            <a:ext cx="11887200" cy="369332"/>
+          </a:xfrm>
+          <a:prstGeom prst="rect">
+            <a:avLst/>
+          </a:prstGeom>
+          <a:noFill/>
+        </p:spPr>
+        <p:txBody>
+          <a:bodyPr wrap="square" rtlCol="0">
+            <a:spAutoFit/>
+          </a:bodyPr>
+          <a:lstStyle/>
+          <a:p>
+            <a:r>
+              <a:rPr lang="en-US" b="1" dirty="0">
+                <a:solidFill>
+                  <a:srgbClr val="0070C0"/>
+                </a:solidFill>
+              </a:rPr>
+              <a:t>FACULTY OF PHARMACY AND PHARMACEUTICAL SCIENCES                                                                               </a:t>
+            </a:r>
+            <a:r>
+              <a:rPr lang="en-US" b="1" dirty="0">
+                <a:solidFill>
+                  <a:schemeClr val="accent2"/>
+                </a:solidFill>
+              </a:rPr>
+              <a:t>SOFTSOLS PAKISTAN</a:t>
+            </a:r>
+            <a:endParaRPr lang="en-PK" b="1" dirty="0">
+              <a:solidFill>
+                <a:schemeClr val="accent2"/>
+              </a:solidFill>
+            </a:endParaRPr>
+          </a:p>
+        </p:txBody>
+      </p:sp>
+    </p:spTree>
+    <p:extLst>
+      <p:ext uri="{BB962C8B-B14F-4D97-AF65-F5344CB8AC3E}">
+        <p14:creationId xmlns:p14="http://schemas.microsoft.com/office/powerpoint/2010/main" val="4213975496"/>
+      </p:ext>
+    </p:extLst>
+  </p:cSld>
+  <p:clrMapOvr>
+    <a:masterClrMapping/>
+  </p:clrMapOvr>
+</p:sld>
+</file>
+
+<file path=ppt/slides/slide16.xml><?xml version="1.0" encoding="utf-8"?>
+<p:sld xmlns:a="http://schemas.openxmlformats.org/drawingml/2006/main" xmlns:r="http://schemas.openxmlformats.org/officeDocument/2006/relationships" xmlns:p="http://schemas.openxmlformats.org/presentationml/2006/main">
+  <p:cSld>
+    <p:spTree>
+      <p:nvGrpSpPr>
+        <p:cNvPr id="1" name="">
+          <a:extLst>
+            <a:ext uri="{FF2B5EF4-FFF2-40B4-BE49-F238E27FC236}">
+              <a16:creationId xmlns:a16="http://schemas.microsoft.com/office/drawing/2014/main" id="{29E78392-D9D5-CDE8-7220-EAC66C296214}"/>
+            </a:ext>
+          </a:extLst>
+        </p:cNvPr>
+        <p:cNvGrpSpPr/>
+        <p:nvPr/>
+      </p:nvGrpSpPr>
+      <p:grpSpPr>
+        <a:xfrm>
+          <a:off x="0" y="0"/>
+          <a:ext cx="0" cy="0"/>
+          <a:chOff x="0" y="0"/>
+          <a:chExt cx="0" cy="0"/>
+        </a:xfrm>
+      </p:grpSpPr>
+      <p:sp>
+        <p:nvSpPr>
+          <p:cNvPr id="2" name="Title 1">
+            <a:extLst>
+              <a:ext uri="{FF2B5EF4-FFF2-40B4-BE49-F238E27FC236}">
+                <a16:creationId xmlns:a16="http://schemas.microsoft.com/office/drawing/2014/main" id="{25096DB1-0122-FD08-EE81-700B4290ACE1}"/>
+              </a:ext>
+            </a:extLst>
+          </p:cNvPr>
+          <p:cNvSpPr>
+            <a:spLocks noGrp="1"/>
+          </p:cNvSpPr>
+          <p:nvPr>
+            <p:ph type="title"/>
+          </p:nvPr>
+        </p:nvSpPr>
+        <p:spPr/>
+        <p:txBody>
+          <a:bodyPr/>
+          <a:lstStyle/>
+          <a:p>
+            <a:endParaRPr lang="en-PK"/>
+          </a:p>
+        </p:txBody>
+      </p:sp>
+      <p:sp>
+        <p:nvSpPr>
+          <p:cNvPr id="3" name="Content Placeholder 2">
+            <a:extLst>
+              <a:ext uri="{FF2B5EF4-FFF2-40B4-BE49-F238E27FC236}">
+                <a16:creationId xmlns:a16="http://schemas.microsoft.com/office/drawing/2014/main" id="{D4109D7B-0C57-1242-7E0F-0968CA64C5DE}"/>
+              </a:ext>
+            </a:extLst>
+          </p:cNvPr>
+          <p:cNvSpPr>
+            <a:spLocks noGrp="1"/>
+          </p:cNvSpPr>
+          <p:nvPr>
+            <p:ph idx="1"/>
+          </p:nvPr>
+        </p:nvSpPr>
+        <p:spPr/>
+        <p:txBody>
+          <a:bodyPr/>
+          <a:lstStyle/>
+          <a:p>
+            <a:endParaRPr lang="en-PK"/>
+          </a:p>
+        </p:txBody>
+      </p:sp>
+      <p:sp>
+        <p:nvSpPr>
+          <p:cNvPr id="4" name="TextBox 3">
+            <a:extLst>
+              <a:ext uri="{FF2B5EF4-FFF2-40B4-BE49-F238E27FC236}">
+                <a16:creationId xmlns:a16="http://schemas.microsoft.com/office/drawing/2014/main" id="{2CC7DFE4-2427-51E7-316F-DAA32FF1A710}"/>
+              </a:ext>
+            </a:extLst>
+          </p:cNvPr>
+          <p:cNvSpPr txBox="1"/>
+          <p:nvPr/>
+        </p:nvSpPr>
+        <p:spPr>
+          <a:xfrm>
+            <a:off x="152400" y="6488668"/>
+            <a:ext cx="11887200" cy="369332"/>
+          </a:xfrm>
+          <a:prstGeom prst="rect">
+            <a:avLst/>
+          </a:prstGeom>
+          <a:noFill/>
+        </p:spPr>
+        <p:txBody>
+          <a:bodyPr wrap="square" rtlCol="0">
+            <a:spAutoFit/>
+          </a:bodyPr>
+          <a:lstStyle/>
+          <a:p>
+            <a:r>
+              <a:rPr lang="en-US" b="1" dirty="0">
+                <a:solidFill>
+                  <a:srgbClr val="0070C0"/>
+                </a:solidFill>
+              </a:rPr>
+              <a:t>FACULTY OF PHARMACY AND PHARMACEUTICAL SCIENCES                                                                               </a:t>
+            </a:r>
+            <a:r>
+              <a:rPr lang="en-US" b="1" dirty="0">
+                <a:solidFill>
+                  <a:schemeClr val="accent2"/>
+                </a:solidFill>
+              </a:rPr>
+              <a:t>SOFTSOLS PAKISTAN</a:t>
+            </a:r>
+            <a:endParaRPr lang="en-PK" b="1" dirty="0">
+              <a:solidFill>
+                <a:schemeClr val="accent2"/>
+              </a:solidFill>
+            </a:endParaRPr>
+          </a:p>
+        </p:txBody>
+      </p:sp>
+    </p:spTree>
+    <p:extLst>
+      <p:ext uri="{BB962C8B-B14F-4D97-AF65-F5344CB8AC3E}">
+        <p14:creationId xmlns:p14="http://schemas.microsoft.com/office/powerpoint/2010/main" val="793866217"/>
+      </p:ext>
+    </p:extLst>
+  </p:cSld>
+  <p:clrMapOvr>
+    <a:masterClrMapping/>
+  </p:clrMapOvr>
+</p:sld>
+</file>
+
 <file path=ppt/slides/slide2.xml><?xml version="1.0" encoding="utf-8"?>
 <p:sld xmlns:a="http://schemas.openxmlformats.org/drawingml/2006/main" xmlns:r="http://schemas.openxmlformats.org/officeDocument/2006/relationships" xmlns:p="http://schemas.openxmlformats.org/presentationml/2006/main">
   <p:cSld>
@@ -3869,6 +5393,947 @@
   <p:cSld>
     <p:spTree>
       <p:nvGrpSpPr>
+        <p:cNvPr id="1" name="">
+          <a:extLst>
+            <a:ext uri="{FF2B5EF4-FFF2-40B4-BE49-F238E27FC236}">
+              <a16:creationId xmlns:a16="http://schemas.microsoft.com/office/drawing/2014/main" id="{466627F3-47A4-3FD2-419D-B9D29DAD56AC}"/>
+            </a:ext>
+          </a:extLst>
+        </p:cNvPr>
+        <p:cNvGrpSpPr/>
+        <p:nvPr/>
+      </p:nvGrpSpPr>
+      <p:grpSpPr>
+        <a:xfrm>
+          <a:off x="0" y="0"/>
+          <a:ext cx="0" cy="0"/>
+          <a:chOff x="0" y="0"/>
+          <a:chExt cx="0" cy="0"/>
+        </a:xfrm>
+      </p:grpSpPr>
+      <p:sp>
+        <p:nvSpPr>
+          <p:cNvPr id="2" name="Title 1">
+            <a:extLst>
+              <a:ext uri="{FF2B5EF4-FFF2-40B4-BE49-F238E27FC236}">
+                <a16:creationId xmlns:a16="http://schemas.microsoft.com/office/drawing/2014/main" id="{451FA9E7-73B0-4568-061E-731E7D349BFA}"/>
+              </a:ext>
+            </a:extLst>
+          </p:cNvPr>
+          <p:cNvSpPr>
+            <a:spLocks noGrp="1"/>
+          </p:cNvSpPr>
+          <p:nvPr>
+            <p:ph type="title"/>
+          </p:nvPr>
+        </p:nvSpPr>
+        <p:spPr/>
+        <p:txBody>
+          <a:bodyPr/>
+          <a:lstStyle/>
+          <a:p>
+            <a:r>
+              <a:rPr lang="en-US" b="1" dirty="0">
+                <a:solidFill>
+                  <a:srgbClr val="0070C0"/>
+                </a:solidFill>
+              </a:rPr>
+              <a:t>Reset Password</a:t>
+            </a:r>
+            <a:endParaRPr lang="en-PK" b="1" dirty="0">
+              <a:solidFill>
+                <a:srgbClr val="0070C0"/>
+              </a:solidFill>
+            </a:endParaRPr>
+          </a:p>
+        </p:txBody>
+      </p:sp>
+      <p:sp>
+        <p:nvSpPr>
+          <p:cNvPr id="4" name="Text Placeholder 3">
+            <a:extLst>
+              <a:ext uri="{FF2B5EF4-FFF2-40B4-BE49-F238E27FC236}">
+                <a16:creationId xmlns:a16="http://schemas.microsoft.com/office/drawing/2014/main" id="{835A7565-A8AE-37FF-783B-8B8D9262A2C0}"/>
+              </a:ext>
+            </a:extLst>
+          </p:cNvPr>
+          <p:cNvSpPr>
+            <a:spLocks noGrp="1"/>
+          </p:cNvSpPr>
+          <p:nvPr>
+            <p:ph type="body" sz="half" idx="2"/>
+          </p:nvPr>
+        </p:nvSpPr>
+        <p:spPr/>
+        <p:txBody>
+          <a:bodyPr/>
+          <a:lstStyle/>
+          <a:p>
+            <a:r>
+              <a:rPr lang="en-US" dirty="0"/>
+              <a:t>The confirmation message shown  on screen for Password Link Sent to the respective Email Address</a:t>
+            </a:r>
+          </a:p>
+          <a:p>
+            <a:endParaRPr lang="en-PK" dirty="0"/>
+          </a:p>
+        </p:txBody>
+      </p:sp>
+      <p:sp>
+        <p:nvSpPr>
+          <p:cNvPr id="5" name="Content Placeholder 4">
+            <a:extLst>
+              <a:ext uri="{FF2B5EF4-FFF2-40B4-BE49-F238E27FC236}">
+                <a16:creationId xmlns:a16="http://schemas.microsoft.com/office/drawing/2014/main" id="{AB36F299-0C13-AB5D-F11D-35F614842473}"/>
+              </a:ext>
+            </a:extLst>
+          </p:cNvPr>
+          <p:cNvSpPr>
+            <a:spLocks noGrp="1"/>
+          </p:cNvSpPr>
+          <p:nvPr>
+            <p:ph idx="1"/>
+          </p:nvPr>
+        </p:nvSpPr>
+        <p:spPr/>
+        <p:txBody>
+          <a:bodyPr/>
+          <a:lstStyle/>
+          <a:p>
+            <a:endParaRPr lang="en-PK"/>
+          </a:p>
+        </p:txBody>
+      </p:sp>
+      <p:pic>
+        <p:nvPicPr>
+          <p:cNvPr id="7" name="Picture 6">
+            <a:extLst>
+              <a:ext uri="{FF2B5EF4-FFF2-40B4-BE49-F238E27FC236}">
+                <a16:creationId xmlns:a16="http://schemas.microsoft.com/office/drawing/2014/main" id="{F561D4C5-B918-DF84-BDA7-FBD9A0F947B6}"/>
+              </a:ext>
+            </a:extLst>
+          </p:cNvPr>
+          <p:cNvPicPr>
+            <a:picLocks noChangeAspect="1"/>
+          </p:cNvPicPr>
+          <p:nvPr/>
+        </p:nvPicPr>
+        <p:blipFill>
+          <a:blip r:embed="rId2"/>
+          <a:stretch>
+            <a:fillRect/>
+          </a:stretch>
+        </p:blipFill>
+        <p:spPr>
+          <a:xfrm>
+            <a:off x="5046133" y="0"/>
+            <a:ext cx="7055556" cy="6378222"/>
+          </a:xfrm>
+          <a:prstGeom prst="rect">
+            <a:avLst/>
+          </a:prstGeom>
+        </p:spPr>
+      </p:pic>
+      <p:sp>
+        <p:nvSpPr>
+          <p:cNvPr id="8" name="TextBox 7">
+            <a:extLst>
+              <a:ext uri="{FF2B5EF4-FFF2-40B4-BE49-F238E27FC236}">
+                <a16:creationId xmlns:a16="http://schemas.microsoft.com/office/drawing/2014/main" id="{C345D980-CD75-838B-D401-8DB7D98C814C}"/>
+              </a:ext>
+            </a:extLst>
+          </p:cNvPr>
+          <p:cNvSpPr txBox="1"/>
+          <p:nvPr/>
+        </p:nvSpPr>
+        <p:spPr>
+          <a:xfrm>
+            <a:off x="152400" y="6488668"/>
+            <a:ext cx="11887200" cy="369332"/>
+          </a:xfrm>
+          <a:prstGeom prst="rect">
+            <a:avLst/>
+          </a:prstGeom>
+          <a:noFill/>
+        </p:spPr>
+        <p:txBody>
+          <a:bodyPr wrap="square" rtlCol="0">
+            <a:spAutoFit/>
+          </a:bodyPr>
+          <a:lstStyle/>
+          <a:p>
+            <a:r>
+              <a:rPr lang="en-US" b="1" dirty="0">
+                <a:solidFill>
+                  <a:srgbClr val="0070C0"/>
+                </a:solidFill>
+              </a:rPr>
+              <a:t>FACULTY OF PHARMACY AND PHARMACEUTICAL SCIENCES                                                                               </a:t>
+            </a:r>
+            <a:r>
+              <a:rPr lang="en-US" b="1" dirty="0">
+                <a:solidFill>
+                  <a:schemeClr val="accent2"/>
+                </a:solidFill>
+              </a:rPr>
+              <a:t>SOFTSOLS PAKISTAN</a:t>
+            </a:r>
+            <a:endParaRPr lang="en-PK" b="1" dirty="0">
+              <a:solidFill>
+                <a:schemeClr val="accent2"/>
+              </a:solidFill>
+            </a:endParaRPr>
+          </a:p>
+        </p:txBody>
+      </p:sp>
+    </p:spTree>
+    <p:extLst>
+      <p:ext uri="{BB962C8B-B14F-4D97-AF65-F5344CB8AC3E}">
+        <p14:creationId xmlns:p14="http://schemas.microsoft.com/office/powerpoint/2010/main" val="3633734758"/>
+      </p:ext>
+    </p:extLst>
+  </p:cSld>
+  <p:clrMapOvr>
+    <a:masterClrMapping/>
+  </p:clrMapOvr>
+</p:sld>
+</file>
+
+<file path=ppt/slides/slide5.xml><?xml version="1.0" encoding="utf-8"?>
+<p:sld xmlns:a="http://schemas.openxmlformats.org/drawingml/2006/main" xmlns:r="http://schemas.openxmlformats.org/officeDocument/2006/relationships" xmlns:p="http://schemas.openxmlformats.org/presentationml/2006/main">
+  <p:cSld>
+    <p:spTree>
+      <p:nvGrpSpPr>
+        <p:cNvPr id="1" name="">
+          <a:extLst>
+            <a:ext uri="{FF2B5EF4-FFF2-40B4-BE49-F238E27FC236}">
+              <a16:creationId xmlns:a16="http://schemas.microsoft.com/office/drawing/2014/main" id="{8E821301-B623-B8F8-C40B-8C24E9D972B4}"/>
+            </a:ext>
+          </a:extLst>
+        </p:cNvPr>
+        <p:cNvGrpSpPr/>
+        <p:nvPr/>
+      </p:nvGrpSpPr>
+      <p:grpSpPr>
+        <a:xfrm>
+          <a:off x="0" y="0"/>
+          <a:ext cx="0" cy="0"/>
+          <a:chOff x="0" y="0"/>
+          <a:chExt cx="0" cy="0"/>
+        </a:xfrm>
+      </p:grpSpPr>
+      <p:sp>
+        <p:nvSpPr>
+          <p:cNvPr id="2" name="Title 1">
+            <a:extLst>
+              <a:ext uri="{FF2B5EF4-FFF2-40B4-BE49-F238E27FC236}">
+                <a16:creationId xmlns:a16="http://schemas.microsoft.com/office/drawing/2014/main" id="{09F0CAE0-7B01-10E1-2162-0A5605C9CEF7}"/>
+              </a:ext>
+            </a:extLst>
+          </p:cNvPr>
+          <p:cNvSpPr>
+            <a:spLocks noGrp="1"/>
+          </p:cNvSpPr>
+          <p:nvPr>
+            <p:ph type="title"/>
+          </p:nvPr>
+        </p:nvSpPr>
+        <p:spPr/>
+        <p:txBody>
+          <a:bodyPr/>
+          <a:lstStyle/>
+          <a:p>
+            <a:r>
+              <a:rPr lang="en-US" dirty="0">
+                <a:solidFill>
+                  <a:srgbClr val="0070C0"/>
+                </a:solidFill>
+              </a:rPr>
+              <a:t>Email Received for Reset Link</a:t>
+            </a:r>
+            <a:endParaRPr lang="en-PK" dirty="0">
+              <a:solidFill>
+                <a:srgbClr val="0070C0"/>
+              </a:solidFill>
+            </a:endParaRPr>
+          </a:p>
+        </p:txBody>
+      </p:sp>
+      <p:sp>
+        <p:nvSpPr>
+          <p:cNvPr id="4" name="TextBox 3">
+            <a:extLst>
+              <a:ext uri="{FF2B5EF4-FFF2-40B4-BE49-F238E27FC236}">
+                <a16:creationId xmlns:a16="http://schemas.microsoft.com/office/drawing/2014/main" id="{250549EC-D42B-05E1-0319-9A3D831704BC}"/>
+              </a:ext>
+            </a:extLst>
+          </p:cNvPr>
+          <p:cNvSpPr txBox="1"/>
+          <p:nvPr/>
+        </p:nvSpPr>
+        <p:spPr>
+          <a:xfrm>
+            <a:off x="152400" y="6488668"/>
+            <a:ext cx="11887200" cy="369332"/>
+          </a:xfrm>
+          <a:prstGeom prst="rect">
+            <a:avLst/>
+          </a:prstGeom>
+          <a:noFill/>
+        </p:spPr>
+        <p:txBody>
+          <a:bodyPr wrap="square" rtlCol="0">
+            <a:spAutoFit/>
+          </a:bodyPr>
+          <a:lstStyle/>
+          <a:p>
+            <a:r>
+              <a:rPr lang="en-US" b="1" dirty="0">
+                <a:solidFill>
+                  <a:srgbClr val="0070C0"/>
+                </a:solidFill>
+              </a:rPr>
+              <a:t>FACULTY OF PHARMACY AND PHARMACEUTICAL SCIENCES                                                                               </a:t>
+            </a:r>
+            <a:r>
+              <a:rPr lang="en-US" b="1" dirty="0">
+                <a:solidFill>
+                  <a:schemeClr val="accent2"/>
+                </a:solidFill>
+              </a:rPr>
+              <a:t>SOFTSOLS PAKISTAN</a:t>
+            </a:r>
+            <a:endParaRPr lang="en-PK" b="1" dirty="0">
+              <a:solidFill>
+                <a:schemeClr val="accent2"/>
+              </a:solidFill>
+            </a:endParaRPr>
+          </a:p>
+        </p:txBody>
+      </p:sp>
+      <p:pic>
+        <p:nvPicPr>
+          <p:cNvPr id="12" name="Picture 11">
+            <a:extLst>
+              <a:ext uri="{FF2B5EF4-FFF2-40B4-BE49-F238E27FC236}">
+                <a16:creationId xmlns:a16="http://schemas.microsoft.com/office/drawing/2014/main" id="{0D48F520-9E03-C310-D022-34550E53A6E2}"/>
+              </a:ext>
+            </a:extLst>
+          </p:cNvPr>
+          <p:cNvPicPr>
+            <a:picLocks noChangeAspect="1"/>
+          </p:cNvPicPr>
+          <p:nvPr/>
+        </p:nvPicPr>
+        <p:blipFill>
+          <a:blip r:embed="rId2"/>
+          <a:stretch>
+            <a:fillRect/>
+          </a:stretch>
+        </p:blipFill>
+        <p:spPr>
+          <a:xfrm>
+            <a:off x="838200" y="1775371"/>
+            <a:ext cx="8725101" cy="3307258"/>
+          </a:xfrm>
+          <a:prstGeom prst="rect">
+            <a:avLst/>
+          </a:prstGeom>
+        </p:spPr>
+      </p:pic>
+    </p:spTree>
+    <p:extLst>
+      <p:ext uri="{BB962C8B-B14F-4D97-AF65-F5344CB8AC3E}">
+        <p14:creationId xmlns:p14="http://schemas.microsoft.com/office/powerpoint/2010/main" val="2620660311"/>
+      </p:ext>
+    </p:extLst>
+  </p:cSld>
+  <p:clrMapOvr>
+    <a:masterClrMapping/>
+  </p:clrMapOvr>
+</p:sld>
+</file>
+
+<file path=ppt/slides/slide6.xml><?xml version="1.0" encoding="utf-8"?>
+<p:sld xmlns:a="http://schemas.openxmlformats.org/drawingml/2006/main" xmlns:r="http://schemas.openxmlformats.org/officeDocument/2006/relationships" xmlns:p="http://schemas.openxmlformats.org/presentationml/2006/main">
+  <p:cSld>
+    <p:spTree>
+      <p:nvGrpSpPr>
+        <p:cNvPr id="1" name="">
+          <a:extLst>
+            <a:ext uri="{FF2B5EF4-FFF2-40B4-BE49-F238E27FC236}">
+              <a16:creationId xmlns:a16="http://schemas.microsoft.com/office/drawing/2014/main" id="{0C0E9811-B767-D58E-7C0F-5951ACC4CBD3}"/>
+            </a:ext>
+          </a:extLst>
+        </p:cNvPr>
+        <p:cNvGrpSpPr/>
+        <p:nvPr/>
+      </p:nvGrpSpPr>
+      <p:grpSpPr>
+        <a:xfrm>
+          <a:off x="0" y="0"/>
+          <a:ext cx="0" cy="0"/>
+          <a:chOff x="0" y="0"/>
+          <a:chExt cx="0" cy="0"/>
+        </a:xfrm>
+      </p:grpSpPr>
+      <p:sp>
+        <p:nvSpPr>
+          <p:cNvPr id="2" name="Title 1">
+            <a:extLst>
+              <a:ext uri="{FF2B5EF4-FFF2-40B4-BE49-F238E27FC236}">
+                <a16:creationId xmlns:a16="http://schemas.microsoft.com/office/drawing/2014/main" id="{3424ED0D-7A7C-0D98-B7C6-1DBB93031F3F}"/>
+              </a:ext>
+            </a:extLst>
+          </p:cNvPr>
+          <p:cNvSpPr>
+            <a:spLocks noGrp="1"/>
+          </p:cNvSpPr>
+          <p:nvPr>
+            <p:ph type="title"/>
+          </p:nvPr>
+        </p:nvSpPr>
+        <p:spPr/>
+        <p:txBody>
+          <a:bodyPr/>
+          <a:lstStyle/>
+          <a:p>
+            <a:r>
+              <a:rPr lang="en-US" b="1" dirty="0">
+                <a:solidFill>
+                  <a:srgbClr val="0070C0"/>
+                </a:solidFill>
+              </a:rPr>
+              <a:t>Reset Password</a:t>
+            </a:r>
+            <a:endParaRPr lang="en-PK" b="1" dirty="0">
+              <a:solidFill>
+                <a:srgbClr val="0070C0"/>
+              </a:solidFill>
+            </a:endParaRPr>
+          </a:p>
+        </p:txBody>
+      </p:sp>
+      <p:sp>
+        <p:nvSpPr>
+          <p:cNvPr id="4" name="Text Placeholder 3">
+            <a:extLst>
+              <a:ext uri="{FF2B5EF4-FFF2-40B4-BE49-F238E27FC236}">
+                <a16:creationId xmlns:a16="http://schemas.microsoft.com/office/drawing/2014/main" id="{0E345E06-DEED-D8B6-6179-FF6EF2F0119D}"/>
+              </a:ext>
+            </a:extLst>
+          </p:cNvPr>
+          <p:cNvSpPr>
+            <a:spLocks noGrp="1"/>
+          </p:cNvSpPr>
+          <p:nvPr>
+            <p:ph type="body" sz="half" idx="2"/>
+          </p:nvPr>
+        </p:nvSpPr>
+        <p:spPr/>
+        <p:txBody>
+          <a:bodyPr/>
+          <a:lstStyle/>
+          <a:p>
+            <a:r>
+              <a:rPr lang="en-US" dirty="0"/>
+              <a:t>You will choose new password.</a:t>
+            </a:r>
+          </a:p>
+          <a:p>
+            <a:endParaRPr lang="en-PK" dirty="0"/>
+          </a:p>
+        </p:txBody>
+      </p:sp>
+      <p:sp>
+        <p:nvSpPr>
+          <p:cNvPr id="5" name="Content Placeholder 4">
+            <a:extLst>
+              <a:ext uri="{FF2B5EF4-FFF2-40B4-BE49-F238E27FC236}">
+                <a16:creationId xmlns:a16="http://schemas.microsoft.com/office/drawing/2014/main" id="{51C36F93-F27F-8E69-8E1C-6F4A903F7B86}"/>
+              </a:ext>
+            </a:extLst>
+          </p:cNvPr>
+          <p:cNvSpPr>
+            <a:spLocks noGrp="1"/>
+          </p:cNvSpPr>
+          <p:nvPr>
+            <p:ph idx="1"/>
+          </p:nvPr>
+        </p:nvSpPr>
+        <p:spPr/>
+        <p:txBody>
+          <a:bodyPr/>
+          <a:lstStyle/>
+          <a:p>
+            <a:endParaRPr lang="en-PK"/>
+          </a:p>
+        </p:txBody>
+      </p:sp>
+      <p:sp>
+        <p:nvSpPr>
+          <p:cNvPr id="8" name="TextBox 7">
+            <a:extLst>
+              <a:ext uri="{FF2B5EF4-FFF2-40B4-BE49-F238E27FC236}">
+                <a16:creationId xmlns:a16="http://schemas.microsoft.com/office/drawing/2014/main" id="{7C805266-21D8-C692-4D37-F9D08D86ED22}"/>
+              </a:ext>
+            </a:extLst>
+          </p:cNvPr>
+          <p:cNvSpPr txBox="1"/>
+          <p:nvPr/>
+        </p:nvSpPr>
+        <p:spPr>
+          <a:xfrm>
+            <a:off x="152400" y="6488668"/>
+            <a:ext cx="11887200" cy="369332"/>
+          </a:xfrm>
+          <a:prstGeom prst="rect">
+            <a:avLst/>
+          </a:prstGeom>
+          <a:noFill/>
+        </p:spPr>
+        <p:txBody>
+          <a:bodyPr wrap="square" rtlCol="0">
+            <a:spAutoFit/>
+          </a:bodyPr>
+          <a:lstStyle/>
+          <a:p>
+            <a:r>
+              <a:rPr lang="en-US" b="1" dirty="0">
+                <a:solidFill>
+                  <a:srgbClr val="0070C0"/>
+                </a:solidFill>
+              </a:rPr>
+              <a:t>FACULTY OF PHARMACY AND PHARMACEUTICAL SCIENCES                                                                               </a:t>
+            </a:r>
+            <a:r>
+              <a:rPr lang="en-US" b="1" dirty="0">
+                <a:solidFill>
+                  <a:schemeClr val="accent2"/>
+                </a:solidFill>
+              </a:rPr>
+              <a:t>SOFTSOLS PAKISTAN</a:t>
+            </a:r>
+            <a:endParaRPr lang="en-PK" b="1" dirty="0">
+              <a:solidFill>
+                <a:schemeClr val="accent2"/>
+              </a:solidFill>
+            </a:endParaRPr>
+          </a:p>
+        </p:txBody>
+      </p:sp>
+      <p:pic>
+        <p:nvPicPr>
+          <p:cNvPr id="6" name="Picture 5">
+            <a:extLst>
+              <a:ext uri="{FF2B5EF4-FFF2-40B4-BE49-F238E27FC236}">
+                <a16:creationId xmlns:a16="http://schemas.microsoft.com/office/drawing/2014/main" id="{E790707B-CBE8-A0CB-96E6-D1701C35D33A}"/>
+              </a:ext>
+            </a:extLst>
+          </p:cNvPr>
+          <p:cNvPicPr>
+            <a:picLocks noChangeAspect="1"/>
+          </p:cNvPicPr>
+          <p:nvPr/>
+        </p:nvPicPr>
+        <p:blipFill>
+          <a:blip r:embed="rId2"/>
+          <a:stretch>
+            <a:fillRect/>
+          </a:stretch>
+        </p:blipFill>
+        <p:spPr>
+          <a:xfrm>
+            <a:off x="5034985" y="0"/>
+            <a:ext cx="6637726" cy="6261742"/>
+          </a:xfrm>
+          <a:prstGeom prst="rect">
+            <a:avLst/>
+          </a:prstGeom>
+        </p:spPr>
+      </p:pic>
+    </p:spTree>
+    <p:extLst>
+      <p:ext uri="{BB962C8B-B14F-4D97-AF65-F5344CB8AC3E}">
+        <p14:creationId xmlns:p14="http://schemas.microsoft.com/office/powerpoint/2010/main" val="367568422"/>
+      </p:ext>
+    </p:extLst>
+  </p:cSld>
+  <p:clrMapOvr>
+    <a:masterClrMapping/>
+  </p:clrMapOvr>
+</p:sld>
+</file>
+
+<file path=ppt/slides/slide7.xml><?xml version="1.0" encoding="utf-8"?>
+<p:sld xmlns:a="http://schemas.openxmlformats.org/drawingml/2006/main" xmlns:r="http://schemas.openxmlformats.org/officeDocument/2006/relationships" xmlns:p="http://schemas.openxmlformats.org/presentationml/2006/main">
+  <p:cSld>
+    <p:spTree>
+      <p:nvGrpSpPr>
+        <p:cNvPr id="1" name="">
+          <a:extLst>
+            <a:ext uri="{FF2B5EF4-FFF2-40B4-BE49-F238E27FC236}">
+              <a16:creationId xmlns:a16="http://schemas.microsoft.com/office/drawing/2014/main" id="{7CC6B399-AC1C-5E1D-5927-0A7A63E8E9ED}"/>
+            </a:ext>
+          </a:extLst>
+        </p:cNvPr>
+        <p:cNvGrpSpPr/>
+        <p:nvPr/>
+      </p:nvGrpSpPr>
+      <p:grpSpPr>
+        <a:xfrm>
+          <a:off x="0" y="0"/>
+          <a:ext cx="0" cy="0"/>
+          <a:chOff x="0" y="0"/>
+          <a:chExt cx="0" cy="0"/>
+        </a:xfrm>
+      </p:grpSpPr>
+      <p:sp>
+        <p:nvSpPr>
+          <p:cNvPr id="2" name="Title 1">
+            <a:extLst>
+              <a:ext uri="{FF2B5EF4-FFF2-40B4-BE49-F238E27FC236}">
+                <a16:creationId xmlns:a16="http://schemas.microsoft.com/office/drawing/2014/main" id="{2870E369-BFA4-3DAA-406F-AF0C219CA3AF}"/>
+              </a:ext>
+            </a:extLst>
+          </p:cNvPr>
+          <p:cNvSpPr>
+            <a:spLocks noGrp="1"/>
+          </p:cNvSpPr>
+          <p:nvPr>
+            <p:ph type="title"/>
+          </p:nvPr>
+        </p:nvSpPr>
+        <p:spPr/>
+        <p:txBody>
+          <a:bodyPr/>
+          <a:lstStyle/>
+          <a:p>
+            <a:r>
+              <a:rPr lang="en-US" b="1" dirty="0">
+                <a:solidFill>
+                  <a:srgbClr val="0070C0"/>
+                </a:solidFill>
+              </a:rPr>
+              <a:t>Reset Password</a:t>
+            </a:r>
+            <a:endParaRPr lang="en-PK" b="1" dirty="0">
+              <a:solidFill>
+                <a:srgbClr val="0070C0"/>
+              </a:solidFill>
+            </a:endParaRPr>
+          </a:p>
+        </p:txBody>
+      </p:sp>
+      <p:sp>
+        <p:nvSpPr>
+          <p:cNvPr id="4" name="Text Placeholder 3">
+            <a:extLst>
+              <a:ext uri="{FF2B5EF4-FFF2-40B4-BE49-F238E27FC236}">
+                <a16:creationId xmlns:a16="http://schemas.microsoft.com/office/drawing/2014/main" id="{7A7C57E4-B7DB-9435-8DDF-E9C7EEF67FCA}"/>
+              </a:ext>
+            </a:extLst>
+          </p:cNvPr>
+          <p:cNvSpPr>
+            <a:spLocks noGrp="1"/>
+          </p:cNvSpPr>
+          <p:nvPr>
+            <p:ph type="body" sz="half" idx="2"/>
+          </p:nvPr>
+        </p:nvSpPr>
+        <p:spPr/>
+        <p:txBody>
+          <a:bodyPr/>
+          <a:lstStyle/>
+          <a:p>
+            <a:r>
+              <a:rPr lang="en-US" dirty="0"/>
+              <a:t>Confirmation on Screen about Password changed.</a:t>
+            </a:r>
+          </a:p>
+          <a:p>
+            <a:r>
+              <a:rPr lang="en-US" dirty="0"/>
+              <a:t>You will login with New Password.</a:t>
+            </a:r>
+          </a:p>
+          <a:p>
+            <a:endParaRPr lang="en-PK" dirty="0"/>
+          </a:p>
+        </p:txBody>
+      </p:sp>
+      <p:pic>
+        <p:nvPicPr>
+          <p:cNvPr id="6" name="Content Placeholder 5">
+            <a:extLst>
+              <a:ext uri="{FF2B5EF4-FFF2-40B4-BE49-F238E27FC236}">
+                <a16:creationId xmlns:a16="http://schemas.microsoft.com/office/drawing/2014/main" id="{36D23433-85D2-3302-9C2C-56FF1843BC78}"/>
+              </a:ext>
+            </a:extLst>
+          </p:cNvPr>
+          <p:cNvPicPr>
+            <a:picLocks noGrp="1" noChangeAspect="1"/>
+          </p:cNvPicPr>
+          <p:nvPr>
+            <p:ph idx="1"/>
+          </p:nvPr>
+        </p:nvPicPr>
+        <p:blipFill>
+          <a:blip r:embed="rId2"/>
+          <a:stretch>
+            <a:fillRect/>
+          </a:stretch>
+        </p:blipFill>
+        <p:spPr>
+          <a:xfrm>
+            <a:off x="6197600" y="626181"/>
+            <a:ext cx="4865511" cy="5695597"/>
+          </a:xfrm>
+          <a:prstGeom prst="rect">
+            <a:avLst/>
+          </a:prstGeom>
+        </p:spPr>
+      </p:pic>
+      <p:sp>
+        <p:nvSpPr>
+          <p:cNvPr id="8" name="TextBox 7">
+            <a:extLst>
+              <a:ext uri="{FF2B5EF4-FFF2-40B4-BE49-F238E27FC236}">
+                <a16:creationId xmlns:a16="http://schemas.microsoft.com/office/drawing/2014/main" id="{48CE0525-2852-079A-A795-5141E481C4BB}"/>
+              </a:ext>
+            </a:extLst>
+          </p:cNvPr>
+          <p:cNvSpPr txBox="1"/>
+          <p:nvPr/>
+        </p:nvSpPr>
+        <p:spPr>
+          <a:xfrm>
+            <a:off x="152400" y="6488668"/>
+            <a:ext cx="11887200" cy="369332"/>
+          </a:xfrm>
+          <a:prstGeom prst="rect">
+            <a:avLst/>
+          </a:prstGeom>
+          <a:noFill/>
+        </p:spPr>
+        <p:txBody>
+          <a:bodyPr wrap="square" rtlCol="0">
+            <a:spAutoFit/>
+          </a:bodyPr>
+          <a:lstStyle/>
+          <a:p>
+            <a:r>
+              <a:rPr lang="en-US" b="1" dirty="0">
+                <a:solidFill>
+                  <a:srgbClr val="0070C0"/>
+                </a:solidFill>
+              </a:rPr>
+              <a:t>FACULTY OF PHARMACY AND PHARMACEUTICAL SCIENCES                                                                               </a:t>
+            </a:r>
+            <a:r>
+              <a:rPr lang="en-US" b="1" dirty="0">
+                <a:solidFill>
+                  <a:schemeClr val="accent2"/>
+                </a:solidFill>
+              </a:rPr>
+              <a:t>SOFTSOLS PAKISTAN</a:t>
+            </a:r>
+            <a:endParaRPr lang="en-PK" b="1" dirty="0">
+              <a:solidFill>
+                <a:schemeClr val="accent2"/>
+              </a:solidFill>
+            </a:endParaRPr>
+          </a:p>
+        </p:txBody>
+      </p:sp>
+    </p:spTree>
+    <p:extLst>
+      <p:ext uri="{BB962C8B-B14F-4D97-AF65-F5344CB8AC3E}">
+        <p14:creationId xmlns:p14="http://schemas.microsoft.com/office/powerpoint/2010/main" val="663351100"/>
+      </p:ext>
+    </p:extLst>
+  </p:cSld>
+  <p:clrMapOvr>
+    <a:masterClrMapping/>
+  </p:clrMapOvr>
+</p:sld>
+</file>
+
+<file path=ppt/slides/slide8.xml><?xml version="1.0" encoding="utf-8"?>
+<p:sld xmlns:a="http://schemas.openxmlformats.org/drawingml/2006/main" xmlns:r="http://schemas.openxmlformats.org/officeDocument/2006/relationships" xmlns:p="http://schemas.openxmlformats.org/presentationml/2006/main">
+  <p:cSld>
+    <p:spTree>
+      <p:nvGrpSpPr>
+        <p:cNvPr id="1" name="">
+          <a:extLst>
+            <a:ext uri="{FF2B5EF4-FFF2-40B4-BE49-F238E27FC236}">
+              <a16:creationId xmlns:a16="http://schemas.microsoft.com/office/drawing/2014/main" id="{A70693D1-D021-A8FE-1242-0BEB81A2481D}"/>
+            </a:ext>
+          </a:extLst>
+        </p:cNvPr>
+        <p:cNvGrpSpPr/>
+        <p:nvPr/>
+      </p:nvGrpSpPr>
+      <p:grpSpPr>
+        <a:xfrm>
+          <a:off x="0" y="0"/>
+          <a:ext cx="0" cy="0"/>
+          <a:chOff x="0" y="0"/>
+          <a:chExt cx="0" cy="0"/>
+        </a:xfrm>
+      </p:grpSpPr>
+      <p:sp>
+        <p:nvSpPr>
+          <p:cNvPr id="2" name="Title 1">
+            <a:extLst>
+              <a:ext uri="{FF2B5EF4-FFF2-40B4-BE49-F238E27FC236}">
+                <a16:creationId xmlns:a16="http://schemas.microsoft.com/office/drawing/2014/main" id="{9BCDC89C-7D86-72DB-394F-52C352F81299}"/>
+              </a:ext>
+            </a:extLst>
+          </p:cNvPr>
+          <p:cNvSpPr>
+            <a:spLocks noGrp="1"/>
+          </p:cNvSpPr>
+          <p:nvPr>
+            <p:ph type="title"/>
+          </p:nvPr>
+        </p:nvSpPr>
+        <p:spPr/>
+        <p:txBody>
+          <a:bodyPr/>
+          <a:lstStyle/>
+          <a:p>
+            <a:r>
+              <a:rPr lang="en-US" b="1" dirty="0">
+                <a:solidFill>
+                  <a:srgbClr val="0070C0"/>
+                </a:solidFill>
+              </a:rPr>
+              <a:t>LOGIN PAGE</a:t>
+            </a:r>
+            <a:endParaRPr lang="en-PK" b="1" dirty="0">
+              <a:solidFill>
+                <a:srgbClr val="0070C0"/>
+              </a:solidFill>
+            </a:endParaRPr>
+          </a:p>
+        </p:txBody>
+      </p:sp>
+      <p:pic>
+        <p:nvPicPr>
+          <p:cNvPr id="6" name="Content Placeholder 5">
+            <a:extLst>
+              <a:ext uri="{FF2B5EF4-FFF2-40B4-BE49-F238E27FC236}">
+                <a16:creationId xmlns:a16="http://schemas.microsoft.com/office/drawing/2014/main" id="{3ADD5F89-AB4C-6670-75D3-DE32207E799A}"/>
+              </a:ext>
+            </a:extLst>
+          </p:cNvPr>
+          <p:cNvPicPr>
+            <a:picLocks noGrp="1" noChangeAspect="1"/>
+          </p:cNvPicPr>
+          <p:nvPr>
+            <p:ph idx="1"/>
+          </p:nvPr>
+        </p:nvPicPr>
+        <p:blipFill>
+          <a:blip r:embed="rId2"/>
+          <a:stretch>
+            <a:fillRect/>
+          </a:stretch>
+        </p:blipFill>
+        <p:spPr>
+          <a:xfrm>
+            <a:off x="5407378" y="270933"/>
+            <a:ext cx="5944833" cy="6333067"/>
+          </a:xfrm>
+          <a:prstGeom prst="rect">
+            <a:avLst/>
+          </a:prstGeom>
+        </p:spPr>
+      </p:pic>
+      <p:sp>
+        <p:nvSpPr>
+          <p:cNvPr id="4" name="Text Placeholder 3">
+            <a:extLst>
+              <a:ext uri="{FF2B5EF4-FFF2-40B4-BE49-F238E27FC236}">
+                <a16:creationId xmlns:a16="http://schemas.microsoft.com/office/drawing/2014/main" id="{E1707A09-7CB4-4B34-4643-919D09C3AA41}"/>
+              </a:ext>
+            </a:extLst>
+          </p:cNvPr>
+          <p:cNvSpPr>
+            <a:spLocks noGrp="1"/>
+          </p:cNvSpPr>
+          <p:nvPr>
+            <p:ph type="body" sz="half" idx="2"/>
+          </p:nvPr>
+        </p:nvSpPr>
+        <p:spPr/>
+        <p:txBody>
+          <a:bodyPr/>
+          <a:lstStyle/>
+          <a:p>
+            <a:r>
+              <a:rPr lang="en-US" dirty="0"/>
+              <a:t>The Login page of Portal is Sign-In Access</a:t>
+            </a:r>
+          </a:p>
+          <a:p>
+            <a:endParaRPr lang="en-US" dirty="0"/>
+          </a:p>
+          <a:p>
+            <a:r>
+              <a:rPr lang="en-US" dirty="0"/>
+              <a:t>Login to Portal to access by inserting:</a:t>
+            </a:r>
+          </a:p>
+          <a:p>
+            <a:r>
+              <a:rPr lang="en-US" b="1" dirty="0"/>
+              <a:t>Email Address</a:t>
+            </a:r>
+          </a:p>
+          <a:p>
+            <a:r>
+              <a:rPr lang="en-US" b="1" dirty="0"/>
+              <a:t>Password</a:t>
+            </a:r>
+          </a:p>
+          <a:p>
+            <a:endParaRPr lang="en-US" dirty="0"/>
+          </a:p>
+          <a:p>
+            <a:r>
+              <a:rPr lang="en-US" dirty="0">
+                <a:solidFill>
+                  <a:srgbClr val="FF0000"/>
+                </a:solidFill>
+              </a:rPr>
+              <a:t>Click Sign In with new password to get access</a:t>
+            </a:r>
+          </a:p>
+          <a:p>
+            <a:endParaRPr lang="en-PK" dirty="0"/>
+          </a:p>
+        </p:txBody>
+      </p:sp>
+    </p:spTree>
+    <p:extLst>
+      <p:ext uri="{BB962C8B-B14F-4D97-AF65-F5344CB8AC3E}">
+        <p14:creationId xmlns:p14="http://schemas.microsoft.com/office/powerpoint/2010/main" val="851996534"/>
+      </p:ext>
+    </p:extLst>
+  </p:cSld>
+  <p:clrMapOvr>
+    <a:masterClrMapping/>
+  </p:clrMapOvr>
+</p:sld>
+</file>
+
+<file path=ppt/slides/slide9.xml><?xml version="1.0" encoding="utf-8"?>
+<p:sld xmlns:a="http://schemas.openxmlformats.org/drawingml/2006/main" xmlns:r="http://schemas.openxmlformats.org/officeDocument/2006/relationships" xmlns:p="http://schemas.openxmlformats.org/presentationml/2006/main">
+  <p:cSld>
+    <p:spTree>
+      <p:nvGrpSpPr>
         <p:cNvPr id="1" name=""/>
         <p:cNvGrpSpPr/>
         <p:nvPr/>
@@ -4061,494 +6526,6 @@
     <p:extLst>
       <p:ext uri="{BB962C8B-B14F-4D97-AF65-F5344CB8AC3E}">
         <p14:creationId xmlns:p14="http://schemas.microsoft.com/office/powerpoint/2010/main" val="3950229031"/>
-      </p:ext>
-    </p:extLst>
-  </p:cSld>
-  <p:clrMapOvr>
-    <a:masterClrMapping/>
-  </p:clrMapOvr>
-</p:sld>
-</file>
-
-<file path=ppt/slides/slide5.xml><?xml version="1.0" encoding="utf-8"?>
-<p:sld xmlns:a="http://schemas.openxmlformats.org/drawingml/2006/main" xmlns:r="http://schemas.openxmlformats.org/officeDocument/2006/relationships" xmlns:p="http://schemas.openxmlformats.org/presentationml/2006/main">
-  <p:cSld>
-    <p:spTree>
-      <p:nvGrpSpPr>
-        <p:cNvPr id="1" name="">
-          <a:extLst>
-            <a:ext uri="{FF2B5EF4-FFF2-40B4-BE49-F238E27FC236}">
-              <a16:creationId xmlns:a16="http://schemas.microsoft.com/office/drawing/2014/main" id="{5E3CCF33-EBDC-EFCA-3651-9B5809E8C569}"/>
-            </a:ext>
-          </a:extLst>
-        </p:cNvPr>
-        <p:cNvGrpSpPr/>
-        <p:nvPr/>
-      </p:nvGrpSpPr>
-      <p:grpSpPr>
-        <a:xfrm>
-          <a:off x="0" y="0"/>
-          <a:ext cx="0" cy="0"/>
-          <a:chOff x="0" y="0"/>
-          <a:chExt cx="0" cy="0"/>
-        </a:xfrm>
-      </p:grpSpPr>
-      <p:sp>
-        <p:nvSpPr>
-          <p:cNvPr id="2" name="Title 1">
-            <a:extLst>
-              <a:ext uri="{FF2B5EF4-FFF2-40B4-BE49-F238E27FC236}">
-                <a16:creationId xmlns:a16="http://schemas.microsoft.com/office/drawing/2014/main" id="{772ACBAA-6685-11AE-B969-CAB25E0A2A39}"/>
-              </a:ext>
-            </a:extLst>
-          </p:cNvPr>
-          <p:cNvSpPr>
-            <a:spLocks noGrp="1"/>
-          </p:cNvSpPr>
-          <p:nvPr>
-            <p:ph type="title"/>
-          </p:nvPr>
-        </p:nvSpPr>
-        <p:spPr/>
-        <p:txBody>
-          <a:bodyPr/>
-          <a:lstStyle/>
-          <a:p>
-            <a:endParaRPr lang="en-PK"/>
-          </a:p>
-        </p:txBody>
-      </p:sp>
-      <p:sp>
-        <p:nvSpPr>
-          <p:cNvPr id="3" name="Content Placeholder 2">
-            <a:extLst>
-              <a:ext uri="{FF2B5EF4-FFF2-40B4-BE49-F238E27FC236}">
-                <a16:creationId xmlns:a16="http://schemas.microsoft.com/office/drawing/2014/main" id="{CE456A63-4A11-9D1D-30C1-D496CC83C63B}"/>
-              </a:ext>
-            </a:extLst>
-          </p:cNvPr>
-          <p:cNvSpPr>
-            <a:spLocks noGrp="1"/>
-          </p:cNvSpPr>
-          <p:nvPr>
-            <p:ph idx="1"/>
-          </p:nvPr>
-        </p:nvSpPr>
-        <p:spPr/>
-        <p:txBody>
-          <a:bodyPr/>
-          <a:lstStyle/>
-          <a:p>
-            <a:endParaRPr lang="en-PK"/>
-          </a:p>
-        </p:txBody>
-      </p:sp>
-      <p:sp>
-        <p:nvSpPr>
-          <p:cNvPr id="4" name="TextBox 3">
-            <a:extLst>
-              <a:ext uri="{FF2B5EF4-FFF2-40B4-BE49-F238E27FC236}">
-                <a16:creationId xmlns:a16="http://schemas.microsoft.com/office/drawing/2014/main" id="{FCC819DA-522B-2A13-944F-626853BC3536}"/>
-              </a:ext>
-            </a:extLst>
-          </p:cNvPr>
-          <p:cNvSpPr txBox="1"/>
-          <p:nvPr/>
-        </p:nvSpPr>
-        <p:spPr>
-          <a:xfrm>
-            <a:off x="152400" y="6488668"/>
-            <a:ext cx="11887200" cy="369332"/>
-          </a:xfrm>
-          <a:prstGeom prst="rect">
-            <a:avLst/>
-          </a:prstGeom>
-          <a:noFill/>
-        </p:spPr>
-        <p:txBody>
-          <a:bodyPr wrap="square" rtlCol="0">
-            <a:spAutoFit/>
-          </a:bodyPr>
-          <a:lstStyle/>
-          <a:p>
-            <a:r>
-              <a:rPr lang="en-US" b="1" dirty="0">
-                <a:solidFill>
-                  <a:srgbClr val="0070C0"/>
-                </a:solidFill>
-              </a:rPr>
-              <a:t>FACULTY OF PHARMACY AND PHARMACEUTICAL SCIENCES                                                                               </a:t>
-            </a:r>
-            <a:r>
-              <a:rPr lang="en-US" b="1" dirty="0">
-                <a:solidFill>
-                  <a:schemeClr val="accent2"/>
-                </a:solidFill>
-              </a:rPr>
-              <a:t>SOFTSOLS PAKISTAN</a:t>
-            </a:r>
-            <a:endParaRPr lang="en-PK" b="1" dirty="0">
-              <a:solidFill>
-                <a:schemeClr val="accent2"/>
-              </a:solidFill>
-            </a:endParaRPr>
-          </a:p>
-        </p:txBody>
-      </p:sp>
-      <p:pic>
-        <p:nvPicPr>
-          <p:cNvPr id="6" name="Picture 5">
-            <a:extLst>
-              <a:ext uri="{FF2B5EF4-FFF2-40B4-BE49-F238E27FC236}">
-                <a16:creationId xmlns:a16="http://schemas.microsoft.com/office/drawing/2014/main" id="{292FE8D5-3363-053D-1532-28E35E053D8F}"/>
-              </a:ext>
-            </a:extLst>
-          </p:cNvPr>
-          <p:cNvPicPr>
-            <a:picLocks noChangeAspect="1"/>
-          </p:cNvPicPr>
-          <p:nvPr/>
-        </p:nvPicPr>
-        <p:blipFill>
-          <a:blip r:embed="rId2"/>
-          <a:stretch>
-            <a:fillRect/>
-          </a:stretch>
-        </p:blipFill>
-        <p:spPr>
-          <a:xfrm>
-            <a:off x="0" y="0"/>
-            <a:ext cx="12192000" cy="6357546"/>
-          </a:xfrm>
-          <a:prstGeom prst="rect">
-            <a:avLst/>
-          </a:prstGeom>
-        </p:spPr>
-      </p:pic>
-      <p:sp>
-        <p:nvSpPr>
-          <p:cNvPr id="7" name="TextBox 6">
-            <a:extLst>
-              <a:ext uri="{FF2B5EF4-FFF2-40B4-BE49-F238E27FC236}">
-                <a16:creationId xmlns:a16="http://schemas.microsoft.com/office/drawing/2014/main" id="{18D940F8-F89E-7673-A2D7-0815E7A9D059}"/>
-              </a:ext>
-            </a:extLst>
-          </p:cNvPr>
-          <p:cNvSpPr txBox="1"/>
-          <p:nvPr/>
-        </p:nvSpPr>
-        <p:spPr>
-          <a:xfrm>
-            <a:off x="8771466" y="4001294"/>
-            <a:ext cx="3183467" cy="646331"/>
-          </a:xfrm>
-          <a:prstGeom prst="rect">
-            <a:avLst/>
-          </a:prstGeom>
-          <a:noFill/>
-        </p:spPr>
-        <p:txBody>
-          <a:bodyPr wrap="square" rtlCol="0">
-            <a:spAutoFit/>
-          </a:bodyPr>
-          <a:lstStyle/>
-          <a:p>
-            <a:r>
-              <a:rPr lang="en-US" b="1" dirty="0">
-                <a:solidFill>
-                  <a:srgbClr val="FF0000"/>
-                </a:solidFill>
-              </a:rPr>
-              <a:t>Dean can Change HOD of Any department by click Edit Button</a:t>
-            </a:r>
-            <a:endParaRPr lang="en-PK" b="1" dirty="0">
-              <a:solidFill>
-                <a:srgbClr val="FF0000"/>
-              </a:solidFill>
-            </a:endParaRPr>
-          </a:p>
-        </p:txBody>
-      </p:sp>
-    </p:spTree>
-    <p:extLst>
-      <p:ext uri="{BB962C8B-B14F-4D97-AF65-F5344CB8AC3E}">
-        <p14:creationId xmlns:p14="http://schemas.microsoft.com/office/powerpoint/2010/main" val="1947302545"/>
-      </p:ext>
-    </p:extLst>
-  </p:cSld>
-  <p:clrMapOvr>
-    <a:masterClrMapping/>
-  </p:clrMapOvr>
-</p:sld>
-</file>
-
-<file path=ppt/slides/slide6.xml><?xml version="1.0" encoding="utf-8"?>
-<p:sld xmlns:a="http://schemas.openxmlformats.org/drawingml/2006/main" xmlns:r="http://schemas.openxmlformats.org/officeDocument/2006/relationships" xmlns:p="http://schemas.openxmlformats.org/presentationml/2006/main">
-  <p:cSld>
-    <p:spTree>
-      <p:nvGrpSpPr>
-        <p:cNvPr id="1" name="">
-          <a:extLst>
-            <a:ext uri="{FF2B5EF4-FFF2-40B4-BE49-F238E27FC236}">
-              <a16:creationId xmlns:a16="http://schemas.microsoft.com/office/drawing/2014/main" id="{BB32339E-8BAC-FC16-27CC-9125F2519066}"/>
-            </a:ext>
-          </a:extLst>
-        </p:cNvPr>
-        <p:cNvGrpSpPr/>
-        <p:nvPr/>
-      </p:nvGrpSpPr>
-      <p:grpSpPr>
-        <a:xfrm>
-          <a:off x="0" y="0"/>
-          <a:ext cx="0" cy="0"/>
-          <a:chOff x="0" y="0"/>
-          <a:chExt cx="0" cy="0"/>
-        </a:xfrm>
-      </p:grpSpPr>
-      <p:sp>
-        <p:nvSpPr>
-          <p:cNvPr id="2" name="Title 1">
-            <a:extLst>
-              <a:ext uri="{FF2B5EF4-FFF2-40B4-BE49-F238E27FC236}">
-                <a16:creationId xmlns:a16="http://schemas.microsoft.com/office/drawing/2014/main" id="{ADAE2C35-CDBA-4D1E-3CB7-FE3D07CD87B6}"/>
-              </a:ext>
-            </a:extLst>
-          </p:cNvPr>
-          <p:cNvSpPr>
-            <a:spLocks noGrp="1"/>
-          </p:cNvSpPr>
-          <p:nvPr>
-            <p:ph type="title"/>
-          </p:nvPr>
-        </p:nvSpPr>
-        <p:spPr/>
-        <p:txBody>
-          <a:bodyPr/>
-          <a:lstStyle/>
-          <a:p>
-            <a:endParaRPr lang="en-PK"/>
-          </a:p>
-        </p:txBody>
-      </p:sp>
-      <p:sp>
-        <p:nvSpPr>
-          <p:cNvPr id="3" name="Content Placeholder 2">
-            <a:extLst>
-              <a:ext uri="{FF2B5EF4-FFF2-40B4-BE49-F238E27FC236}">
-                <a16:creationId xmlns:a16="http://schemas.microsoft.com/office/drawing/2014/main" id="{CFFA6624-A255-A435-ED63-54FCC59CA284}"/>
-              </a:ext>
-            </a:extLst>
-          </p:cNvPr>
-          <p:cNvSpPr>
-            <a:spLocks noGrp="1"/>
-          </p:cNvSpPr>
-          <p:nvPr>
-            <p:ph idx="1"/>
-          </p:nvPr>
-        </p:nvSpPr>
-        <p:spPr/>
-        <p:txBody>
-          <a:bodyPr/>
-          <a:lstStyle/>
-          <a:p>
-            <a:endParaRPr lang="en-PK"/>
-          </a:p>
-        </p:txBody>
-      </p:sp>
-      <p:sp>
-        <p:nvSpPr>
-          <p:cNvPr id="4" name="TextBox 3">
-            <a:extLst>
-              <a:ext uri="{FF2B5EF4-FFF2-40B4-BE49-F238E27FC236}">
-                <a16:creationId xmlns:a16="http://schemas.microsoft.com/office/drawing/2014/main" id="{3821F8C2-020A-DF89-1D85-99BF516ECF41}"/>
-              </a:ext>
-            </a:extLst>
-          </p:cNvPr>
-          <p:cNvSpPr txBox="1"/>
-          <p:nvPr/>
-        </p:nvSpPr>
-        <p:spPr>
-          <a:xfrm>
-            <a:off x="152400" y="6488668"/>
-            <a:ext cx="11887200" cy="369332"/>
-          </a:xfrm>
-          <a:prstGeom prst="rect">
-            <a:avLst/>
-          </a:prstGeom>
-          <a:noFill/>
-        </p:spPr>
-        <p:txBody>
-          <a:bodyPr wrap="square" rtlCol="0">
-            <a:spAutoFit/>
-          </a:bodyPr>
-          <a:lstStyle/>
-          <a:p>
-            <a:r>
-              <a:rPr lang="en-US" b="1" dirty="0">
-                <a:solidFill>
-                  <a:srgbClr val="0070C0"/>
-                </a:solidFill>
-              </a:rPr>
-              <a:t>FACULTY OF PHARMACY AND PHARMACEUTICAL SCIENCES                                                                               </a:t>
-            </a:r>
-            <a:r>
-              <a:rPr lang="en-US" b="1" dirty="0">
-                <a:solidFill>
-                  <a:schemeClr val="accent2"/>
-                </a:solidFill>
-              </a:rPr>
-              <a:t>SOFTSOLS PAKISTAN</a:t>
-            </a:r>
-            <a:endParaRPr lang="en-PK" b="1" dirty="0">
-              <a:solidFill>
-                <a:schemeClr val="accent2"/>
-              </a:solidFill>
-            </a:endParaRPr>
-          </a:p>
-        </p:txBody>
-      </p:sp>
-    </p:spTree>
-    <p:extLst>
-      <p:ext uri="{BB962C8B-B14F-4D97-AF65-F5344CB8AC3E}">
-        <p14:creationId xmlns:p14="http://schemas.microsoft.com/office/powerpoint/2010/main" val="3575898126"/>
-      </p:ext>
-    </p:extLst>
-  </p:cSld>
-  <p:clrMapOvr>
-    <a:masterClrMapping/>
-  </p:clrMapOvr>
-</p:sld>
-</file>
-
-<file path=ppt/slides/slide7.xml><?xml version="1.0" encoding="utf-8"?>
-<p:sld xmlns:a="http://schemas.openxmlformats.org/drawingml/2006/main" xmlns:r="http://schemas.openxmlformats.org/officeDocument/2006/relationships" xmlns:p="http://schemas.openxmlformats.org/presentationml/2006/main">
-  <p:cSld>
-    <p:spTree>
-      <p:nvGrpSpPr>
-        <p:cNvPr id="1" name="">
-          <a:extLst>
-            <a:ext uri="{FF2B5EF4-FFF2-40B4-BE49-F238E27FC236}">
-              <a16:creationId xmlns:a16="http://schemas.microsoft.com/office/drawing/2014/main" id="{29E78392-D9D5-CDE8-7220-EAC66C296214}"/>
-            </a:ext>
-          </a:extLst>
-        </p:cNvPr>
-        <p:cNvGrpSpPr/>
-        <p:nvPr/>
-      </p:nvGrpSpPr>
-      <p:grpSpPr>
-        <a:xfrm>
-          <a:off x="0" y="0"/>
-          <a:ext cx="0" cy="0"/>
-          <a:chOff x="0" y="0"/>
-          <a:chExt cx="0" cy="0"/>
-        </a:xfrm>
-      </p:grpSpPr>
-      <p:sp>
-        <p:nvSpPr>
-          <p:cNvPr id="2" name="Title 1">
-            <a:extLst>
-              <a:ext uri="{FF2B5EF4-FFF2-40B4-BE49-F238E27FC236}">
-                <a16:creationId xmlns:a16="http://schemas.microsoft.com/office/drawing/2014/main" id="{25096DB1-0122-FD08-EE81-700B4290ACE1}"/>
-              </a:ext>
-            </a:extLst>
-          </p:cNvPr>
-          <p:cNvSpPr>
-            <a:spLocks noGrp="1"/>
-          </p:cNvSpPr>
-          <p:nvPr>
-            <p:ph type="title"/>
-          </p:nvPr>
-        </p:nvSpPr>
-        <p:spPr/>
-        <p:txBody>
-          <a:bodyPr/>
-          <a:lstStyle/>
-          <a:p>
-            <a:endParaRPr lang="en-PK"/>
-          </a:p>
-        </p:txBody>
-      </p:sp>
-      <p:sp>
-        <p:nvSpPr>
-          <p:cNvPr id="3" name="Content Placeholder 2">
-            <a:extLst>
-              <a:ext uri="{FF2B5EF4-FFF2-40B4-BE49-F238E27FC236}">
-                <a16:creationId xmlns:a16="http://schemas.microsoft.com/office/drawing/2014/main" id="{D4109D7B-0C57-1242-7E0F-0968CA64C5DE}"/>
-              </a:ext>
-            </a:extLst>
-          </p:cNvPr>
-          <p:cNvSpPr>
-            <a:spLocks noGrp="1"/>
-          </p:cNvSpPr>
-          <p:nvPr>
-            <p:ph idx="1"/>
-          </p:nvPr>
-        </p:nvSpPr>
-        <p:spPr/>
-        <p:txBody>
-          <a:bodyPr/>
-          <a:lstStyle/>
-          <a:p>
-            <a:endParaRPr lang="en-PK"/>
-          </a:p>
-        </p:txBody>
-      </p:sp>
-      <p:sp>
-        <p:nvSpPr>
-          <p:cNvPr id="4" name="TextBox 3">
-            <a:extLst>
-              <a:ext uri="{FF2B5EF4-FFF2-40B4-BE49-F238E27FC236}">
-                <a16:creationId xmlns:a16="http://schemas.microsoft.com/office/drawing/2014/main" id="{2CC7DFE4-2427-51E7-316F-DAA32FF1A710}"/>
-              </a:ext>
-            </a:extLst>
-          </p:cNvPr>
-          <p:cNvSpPr txBox="1"/>
-          <p:nvPr/>
-        </p:nvSpPr>
-        <p:spPr>
-          <a:xfrm>
-            <a:off x="152400" y="6488668"/>
-            <a:ext cx="11887200" cy="369332"/>
-          </a:xfrm>
-          <a:prstGeom prst="rect">
-            <a:avLst/>
-          </a:prstGeom>
-          <a:noFill/>
-        </p:spPr>
-        <p:txBody>
-          <a:bodyPr wrap="square" rtlCol="0">
-            <a:spAutoFit/>
-          </a:bodyPr>
-          <a:lstStyle/>
-          <a:p>
-            <a:r>
-              <a:rPr lang="en-US" b="1" dirty="0">
-                <a:solidFill>
-                  <a:srgbClr val="0070C0"/>
-                </a:solidFill>
-              </a:rPr>
-              <a:t>FACULTY OF PHARMACY AND PHARMACEUTICAL SCIENCES                                                                               </a:t>
-            </a:r>
-            <a:r>
-              <a:rPr lang="en-US" b="1" dirty="0">
-                <a:solidFill>
-                  <a:schemeClr val="accent2"/>
-                </a:solidFill>
-              </a:rPr>
-              <a:t>SOFTSOLS PAKISTAN</a:t>
-            </a:r>
-            <a:endParaRPr lang="en-PK" b="1" dirty="0">
-              <a:solidFill>
-                <a:schemeClr val="accent2"/>
-              </a:solidFill>
-            </a:endParaRPr>
-          </a:p>
-        </p:txBody>
-      </p:sp>
-    </p:spTree>
-    <p:extLst>
-      <p:ext uri="{BB962C8B-B14F-4D97-AF65-F5344CB8AC3E}">
-        <p14:creationId xmlns:p14="http://schemas.microsoft.com/office/powerpoint/2010/main" val="793866217"/>
       </p:ext>
     </p:extLst>
   </p:cSld>

--- a/SUPER ADMIN ROLE - DEAN ROLE.pptx
+++ b/SUPER ADMIN ROLE - DEAN ROLE.pptx
@@ -4,6 +4,9 @@
   <p:sldMasterIdLst>
     <p:sldMasterId id="2147483648" r:id="rId1"/>
   </p:sldMasterIdLst>
+  <p:notesMasterIdLst>
+    <p:notesMasterId r:id="rId18"/>
+  </p:notesMasterIdLst>
   <p:sldIdLst>
     <p:sldId id="256" r:id="rId2"/>
     <p:sldId id="262" r:id="rId3"/>
@@ -125,6 +128,440 @@
     </p:ext>
   </p:extLst>
 </p:presentation>
+</file>
+
+<file path=ppt/notesMasters/notesMaster1.xml><?xml version="1.0" encoding="utf-8"?>
+<p:notesMaster xmlns:a="http://schemas.openxmlformats.org/drawingml/2006/main" xmlns:r="http://schemas.openxmlformats.org/officeDocument/2006/relationships" xmlns:p="http://schemas.openxmlformats.org/presentationml/2006/main">
+  <p:cSld>
+    <p:bg>
+      <p:bgRef idx="1001">
+        <a:schemeClr val="bg1"/>
+      </p:bgRef>
+    </p:bg>
+    <p:spTree>
+      <p:nvGrpSpPr>
+        <p:cNvPr id="1" name=""/>
+        <p:cNvGrpSpPr/>
+        <p:nvPr/>
+      </p:nvGrpSpPr>
+      <p:grpSpPr>
+        <a:xfrm>
+          <a:off x="0" y="0"/>
+          <a:ext cx="0" cy="0"/>
+          <a:chOff x="0" y="0"/>
+          <a:chExt cx="0" cy="0"/>
+        </a:xfrm>
+      </p:grpSpPr>
+      <p:sp>
+        <p:nvSpPr>
+          <p:cNvPr id="2" name="Header Placeholder 1"/>
+          <p:cNvSpPr>
+            <a:spLocks noGrp="1"/>
+          </p:cNvSpPr>
+          <p:nvPr>
+            <p:ph type="hdr" sz="quarter"/>
+          </p:nvPr>
+        </p:nvSpPr>
+        <p:spPr>
+          <a:xfrm>
+            <a:off x="0" y="0"/>
+            <a:ext cx="2971800" cy="458788"/>
+          </a:xfrm>
+          <a:prstGeom prst="rect">
+            <a:avLst/>
+          </a:prstGeom>
+        </p:spPr>
+        <p:txBody>
+          <a:bodyPr vert="horz" lIns="91440" tIns="45720" rIns="91440" bIns="45720" rtlCol="0"/>
+          <a:lstStyle>
+            <a:lvl1pPr algn="l">
+              <a:defRPr sz="1200"/>
+            </a:lvl1pPr>
+          </a:lstStyle>
+          <a:p>
+            <a:endParaRPr lang="en-PK"/>
+          </a:p>
+        </p:txBody>
+      </p:sp>
+      <p:sp>
+        <p:nvSpPr>
+          <p:cNvPr id="3" name="Date Placeholder 2"/>
+          <p:cNvSpPr>
+            <a:spLocks noGrp="1"/>
+          </p:cNvSpPr>
+          <p:nvPr>
+            <p:ph type="dt" idx="1"/>
+          </p:nvPr>
+        </p:nvSpPr>
+        <p:spPr>
+          <a:xfrm>
+            <a:off x="3884613" y="0"/>
+            <a:ext cx="2971800" cy="458788"/>
+          </a:xfrm>
+          <a:prstGeom prst="rect">
+            <a:avLst/>
+          </a:prstGeom>
+        </p:spPr>
+        <p:txBody>
+          <a:bodyPr vert="horz" lIns="91440" tIns="45720" rIns="91440" bIns="45720" rtlCol="0"/>
+          <a:lstStyle>
+            <a:lvl1pPr algn="r">
+              <a:defRPr sz="1200"/>
+            </a:lvl1pPr>
+          </a:lstStyle>
+          <a:p>
+            <a:fld id="{7AD0592F-6EDD-48D7-93D1-75ED60E966B1}" type="datetimeFigureOut">
+              <a:rPr lang="en-PK" smtClean="0"/>
+              <a:t>29/03/2026</a:t>
+            </a:fld>
+            <a:endParaRPr lang="en-PK"/>
+          </a:p>
+        </p:txBody>
+      </p:sp>
+      <p:sp>
+        <p:nvSpPr>
+          <p:cNvPr id="4" name="Slide Image Placeholder 3"/>
+          <p:cNvSpPr>
+            <a:spLocks noGrp="1" noRot="1" noChangeAspect="1"/>
+          </p:cNvSpPr>
+          <p:nvPr>
+            <p:ph type="sldImg" idx="2"/>
+          </p:nvPr>
+        </p:nvSpPr>
+        <p:spPr>
+          <a:xfrm>
+            <a:off x="685800" y="1143000"/>
+            <a:ext cx="5486400" cy="3086100"/>
+          </a:xfrm>
+          <a:prstGeom prst="rect">
+            <a:avLst/>
+          </a:prstGeom>
+          <a:noFill/>
+          <a:ln w="12700">
+            <a:solidFill>
+              <a:prstClr val="black"/>
+            </a:solidFill>
+          </a:ln>
+        </p:spPr>
+        <p:txBody>
+          <a:bodyPr vert="horz" lIns="91440" tIns="45720" rIns="91440" bIns="45720" rtlCol="0" anchor="ctr"/>
+          <a:lstStyle/>
+          <a:p>
+            <a:endParaRPr lang="en-PK"/>
+          </a:p>
+        </p:txBody>
+      </p:sp>
+      <p:sp>
+        <p:nvSpPr>
+          <p:cNvPr id="5" name="Notes Placeholder 4"/>
+          <p:cNvSpPr>
+            <a:spLocks noGrp="1"/>
+          </p:cNvSpPr>
+          <p:nvPr>
+            <p:ph type="body" sz="quarter" idx="3"/>
+          </p:nvPr>
+        </p:nvSpPr>
+        <p:spPr>
+          <a:xfrm>
+            <a:off x="685800" y="4400550"/>
+            <a:ext cx="5486400" cy="3600450"/>
+          </a:xfrm>
+          <a:prstGeom prst="rect">
+            <a:avLst/>
+          </a:prstGeom>
+        </p:spPr>
+        <p:txBody>
+          <a:bodyPr vert="horz" lIns="91440" tIns="45720" rIns="91440" bIns="45720" rtlCol="0"/>
+          <a:lstStyle/>
+          <a:p>
+            <a:pPr lvl="0"/>
+            <a:r>
+              <a:rPr lang="en-US"/>
+              <a:t>Click to edit Master text styles</a:t>
+            </a:r>
+          </a:p>
+          <a:p>
+            <a:pPr lvl="1"/>
+            <a:r>
+              <a:rPr lang="en-US"/>
+              <a:t>Second level</a:t>
+            </a:r>
+          </a:p>
+          <a:p>
+            <a:pPr lvl="2"/>
+            <a:r>
+              <a:rPr lang="en-US"/>
+              <a:t>Third level</a:t>
+            </a:r>
+          </a:p>
+          <a:p>
+            <a:pPr lvl="3"/>
+            <a:r>
+              <a:rPr lang="en-US"/>
+              <a:t>Fourth level</a:t>
+            </a:r>
+          </a:p>
+          <a:p>
+            <a:pPr lvl="4"/>
+            <a:r>
+              <a:rPr lang="en-US"/>
+              <a:t>Fifth level</a:t>
+            </a:r>
+            <a:endParaRPr lang="en-PK"/>
+          </a:p>
+        </p:txBody>
+      </p:sp>
+      <p:sp>
+        <p:nvSpPr>
+          <p:cNvPr id="6" name="Footer Placeholder 5"/>
+          <p:cNvSpPr>
+            <a:spLocks noGrp="1"/>
+          </p:cNvSpPr>
+          <p:nvPr>
+            <p:ph type="ftr" sz="quarter" idx="4"/>
+          </p:nvPr>
+        </p:nvSpPr>
+        <p:spPr>
+          <a:xfrm>
+            <a:off x="0" y="8685213"/>
+            <a:ext cx="2971800" cy="458787"/>
+          </a:xfrm>
+          <a:prstGeom prst="rect">
+            <a:avLst/>
+          </a:prstGeom>
+        </p:spPr>
+        <p:txBody>
+          <a:bodyPr vert="horz" lIns="91440" tIns="45720" rIns="91440" bIns="45720" rtlCol="0" anchor="b"/>
+          <a:lstStyle>
+            <a:lvl1pPr algn="l">
+              <a:defRPr sz="1200"/>
+            </a:lvl1pPr>
+          </a:lstStyle>
+          <a:p>
+            <a:endParaRPr lang="en-PK"/>
+          </a:p>
+        </p:txBody>
+      </p:sp>
+      <p:sp>
+        <p:nvSpPr>
+          <p:cNvPr id="7" name="Slide Number Placeholder 6"/>
+          <p:cNvSpPr>
+            <a:spLocks noGrp="1"/>
+          </p:cNvSpPr>
+          <p:nvPr>
+            <p:ph type="sldNum" sz="quarter" idx="5"/>
+          </p:nvPr>
+        </p:nvSpPr>
+        <p:spPr>
+          <a:xfrm>
+            <a:off x="3884613" y="8685213"/>
+            <a:ext cx="2971800" cy="458787"/>
+          </a:xfrm>
+          <a:prstGeom prst="rect">
+            <a:avLst/>
+          </a:prstGeom>
+        </p:spPr>
+        <p:txBody>
+          <a:bodyPr vert="horz" lIns="91440" tIns="45720" rIns="91440" bIns="45720" rtlCol="0" anchor="b"/>
+          <a:lstStyle>
+            <a:lvl1pPr algn="r">
+              <a:defRPr sz="1200"/>
+            </a:lvl1pPr>
+          </a:lstStyle>
+          <a:p>
+            <a:fld id="{3AA0AC69-8D9F-4B74-AF6C-0D95D0277DA2}" type="slidenum">
+              <a:rPr lang="en-PK" smtClean="0"/>
+              <a:t>‹#›</a:t>
+            </a:fld>
+            <a:endParaRPr lang="en-PK"/>
+          </a:p>
+        </p:txBody>
+      </p:sp>
+    </p:spTree>
+    <p:extLst>
+      <p:ext uri="{BB962C8B-B14F-4D97-AF65-F5344CB8AC3E}">
+        <p14:creationId xmlns:p14="http://schemas.microsoft.com/office/powerpoint/2010/main" val="3862686683"/>
+      </p:ext>
+    </p:extLst>
+  </p:cSld>
+  <p:clrMap bg1="lt1" tx1="dk1" bg2="lt2" tx2="dk2" accent1="accent1" accent2="accent2" accent3="accent3" accent4="accent4" accent5="accent5" accent6="accent6" hlink="hlink" folHlink="folHlink"/>
+  <p:notesStyle>
+    <a:lvl1pPr marL="0" algn="l" defTabSz="914400" rtl="0" eaLnBrk="1" latinLnBrk="0" hangingPunct="1">
+      <a:defRPr sz="1200" kern="1200">
+        <a:solidFill>
+          <a:schemeClr val="tx1"/>
+        </a:solidFill>
+        <a:latin typeface="+mn-lt"/>
+        <a:ea typeface="+mn-ea"/>
+        <a:cs typeface="+mn-cs"/>
+      </a:defRPr>
+    </a:lvl1pPr>
+    <a:lvl2pPr marL="457200" algn="l" defTabSz="914400" rtl="0" eaLnBrk="1" latinLnBrk="0" hangingPunct="1">
+      <a:defRPr sz="1200" kern="1200">
+        <a:solidFill>
+          <a:schemeClr val="tx1"/>
+        </a:solidFill>
+        <a:latin typeface="+mn-lt"/>
+        <a:ea typeface="+mn-ea"/>
+        <a:cs typeface="+mn-cs"/>
+      </a:defRPr>
+    </a:lvl2pPr>
+    <a:lvl3pPr marL="914400" algn="l" defTabSz="914400" rtl="0" eaLnBrk="1" latinLnBrk="0" hangingPunct="1">
+      <a:defRPr sz="1200" kern="1200">
+        <a:solidFill>
+          <a:schemeClr val="tx1"/>
+        </a:solidFill>
+        <a:latin typeface="+mn-lt"/>
+        <a:ea typeface="+mn-ea"/>
+        <a:cs typeface="+mn-cs"/>
+      </a:defRPr>
+    </a:lvl3pPr>
+    <a:lvl4pPr marL="1371600" algn="l" defTabSz="914400" rtl="0" eaLnBrk="1" latinLnBrk="0" hangingPunct="1">
+      <a:defRPr sz="1200" kern="1200">
+        <a:solidFill>
+          <a:schemeClr val="tx1"/>
+        </a:solidFill>
+        <a:latin typeface="+mn-lt"/>
+        <a:ea typeface="+mn-ea"/>
+        <a:cs typeface="+mn-cs"/>
+      </a:defRPr>
+    </a:lvl4pPr>
+    <a:lvl5pPr marL="1828800" algn="l" defTabSz="914400" rtl="0" eaLnBrk="1" latinLnBrk="0" hangingPunct="1">
+      <a:defRPr sz="1200" kern="1200">
+        <a:solidFill>
+          <a:schemeClr val="tx1"/>
+        </a:solidFill>
+        <a:latin typeface="+mn-lt"/>
+        <a:ea typeface="+mn-ea"/>
+        <a:cs typeface="+mn-cs"/>
+      </a:defRPr>
+    </a:lvl5pPr>
+    <a:lvl6pPr marL="2286000" algn="l" defTabSz="914400" rtl="0" eaLnBrk="1" latinLnBrk="0" hangingPunct="1">
+      <a:defRPr sz="1200" kern="1200">
+        <a:solidFill>
+          <a:schemeClr val="tx1"/>
+        </a:solidFill>
+        <a:latin typeface="+mn-lt"/>
+        <a:ea typeface="+mn-ea"/>
+        <a:cs typeface="+mn-cs"/>
+      </a:defRPr>
+    </a:lvl6pPr>
+    <a:lvl7pPr marL="2743200" algn="l" defTabSz="914400" rtl="0" eaLnBrk="1" latinLnBrk="0" hangingPunct="1">
+      <a:defRPr sz="1200" kern="1200">
+        <a:solidFill>
+          <a:schemeClr val="tx1"/>
+        </a:solidFill>
+        <a:latin typeface="+mn-lt"/>
+        <a:ea typeface="+mn-ea"/>
+        <a:cs typeface="+mn-cs"/>
+      </a:defRPr>
+    </a:lvl7pPr>
+    <a:lvl8pPr marL="3200400" algn="l" defTabSz="914400" rtl="0" eaLnBrk="1" latinLnBrk="0" hangingPunct="1">
+      <a:defRPr sz="1200" kern="1200">
+        <a:solidFill>
+          <a:schemeClr val="tx1"/>
+        </a:solidFill>
+        <a:latin typeface="+mn-lt"/>
+        <a:ea typeface="+mn-ea"/>
+        <a:cs typeface="+mn-cs"/>
+      </a:defRPr>
+    </a:lvl8pPr>
+    <a:lvl9pPr marL="3657600" algn="l" defTabSz="914400" rtl="0" eaLnBrk="1" latinLnBrk="0" hangingPunct="1">
+      <a:defRPr sz="1200" kern="1200">
+        <a:solidFill>
+          <a:schemeClr val="tx1"/>
+        </a:solidFill>
+        <a:latin typeface="+mn-lt"/>
+        <a:ea typeface="+mn-ea"/>
+        <a:cs typeface="+mn-cs"/>
+      </a:defRPr>
+    </a:lvl9pPr>
+  </p:notesStyle>
+</p:notesMaster>
+</file>
+
+<file path=ppt/notesSlides/notesSlide1.xml><?xml version="1.0" encoding="utf-8"?>
+<p:notes xmlns:a="http://schemas.openxmlformats.org/drawingml/2006/main" xmlns:r="http://schemas.openxmlformats.org/officeDocument/2006/relationships" xmlns:p="http://schemas.openxmlformats.org/presentationml/2006/main">
+  <p:cSld>
+    <p:spTree>
+      <p:nvGrpSpPr>
+        <p:cNvPr id="1" name=""/>
+        <p:cNvGrpSpPr/>
+        <p:nvPr/>
+      </p:nvGrpSpPr>
+      <p:grpSpPr>
+        <a:xfrm>
+          <a:off x="0" y="0"/>
+          <a:ext cx="0" cy="0"/>
+          <a:chOff x="0" y="0"/>
+          <a:chExt cx="0" cy="0"/>
+        </a:xfrm>
+      </p:grpSpPr>
+      <p:sp>
+        <p:nvSpPr>
+          <p:cNvPr id="2" name="Slide Image Placeholder 1"/>
+          <p:cNvSpPr>
+            <a:spLocks noGrp="1" noRot="1" noChangeAspect="1"/>
+          </p:cNvSpPr>
+          <p:nvPr>
+            <p:ph type="sldImg"/>
+          </p:nvPr>
+        </p:nvSpPr>
+        <p:spPr/>
+      </p:sp>
+      <p:sp>
+        <p:nvSpPr>
+          <p:cNvPr id="3" name="Notes Placeholder 2"/>
+          <p:cNvSpPr>
+            <a:spLocks noGrp="1"/>
+          </p:cNvSpPr>
+          <p:nvPr>
+            <p:ph type="body" idx="1"/>
+          </p:nvPr>
+        </p:nvSpPr>
+        <p:spPr/>
+        <p:txBody>
+          <a:bodyPr/>
+          <a:lstStyle/>
+          <a:p>
+            <a:endParaRPr lang="en-PK" i="1" dirty="0"/>
+          </a:p>
+        </p:txBody>
+      </p:sp>
+      <p:sp>
+        <p:nvSpPr>
+          <p:cNvPr id="4" name="Slide Number Placeholder 3"/>
+          <p:cNvSpPr>
+            <a:spLocks noGrp="1"/>
+          </p:cNvSpPr>
+          <p:nvPr>
+            <p:ph type="sldNum" sz="quarter" idx="5"/>
+          </p:nvPr>
+        </p:nvSpPr>
+        <p:spPr/>
+        <p:txBody>
+          <a:bodyPr/>
+          <a:lstStyle/>
+          <a:p>
+            <a:fld id="{3AA0AC69-8D9F-4B74-AF6C-0D95D0277DA2}" type="slidenum">
+              <a:rPr lang="en-PK" smtClean="0"/>
+              <a:t>14</a:t>
+            </a:fld>
+            <a:endParaRPr lang="en-PK"/>
+          </a:p>
+        </p:txBody>
+      </p:sp>
+    </p:spTree>
+    <p:extLst>
+      <p:ext uri="{BB962C8B-B14F-4D97-AF65-F5344CB8AC3E}">
+        <p14:creationId xmlns:p14="http://schemas.microsoft.com/office/powerpoint/2010/main" val="4218757003"/>
+      </p:ext>
+    </p:extLst>
+  </p:cSld>
+  <p:clrMapOvr>
+    <a:masterClrMapping/>
+  </p:clrMapOvr>
+</p:notes>
 </file>
 
 <file path=ppt/slideLayouts/slideLayout1.xml><?xml version="1.0" encoding="utf-8"?>
@@ -3968,7 +4405,7 @@
                   <a:srgbClr val="FF0000"/>
                 </a:solidFill>
               </a:rPr>
-              <a:t>ADMIN CAN SET COURSES ACTIVE AS PER SEMESTER AND ALSO INDIVIDUAL COURSE.</a:t>
+              <a:t>DEAN (ADMIN) CAN SET COURSES ACTIVE AS PER SEMESTER AND ALSO INDIVIDUAL COURSE.</a:t>
             </a:r>
           </a:p>
           <a:p>
@@ -4554,7 +4991,7 @@
                   <a:srgbClr val="0070C0"/>
                 </a:solidFill>
               </a:rPr>
-              <a:t>Manager Course Material</a:t>
+              <a:t>Quiz</a:t>
             </a:r>
             <a:endParaRPr lang="en-PK" b="1" dirty="0">
               <a:solidFill>
@@ -4587,7 +5024,13 @@
           <a:p>
             <a:r>
               <a:rPr lang="en-US" dirty="0"/>
-              <a:t>The Login page of Portal is Sign-In Access</a:t>
+              <a:t>Dean / Faculty (Teacher) can add Quiz for their Course.</a:t>
+            </a:r>
+          </a:p>
+          <a:p>
+            <a:r>
+              <a:rPr lang="en-US" dirty="0"/>
+              <a:t>The Course result will be autogenerated and will be available in Quiz and Report Section.</a:t>
             </a:r>
           </a:p>
           <a:p>
@@ -4596,19 +5039,7 @@
           <a:p>
             <a:r>
               <a:rPr lang="en-US" dirty="0"/>
-              <a:t>Login to Portal to access by inserting:</a:t>
-            </a:r>
-          </a:p>
-          <a:p>
-            <a:r>
-              <a:rPr lang="en-US" b="1" dirty="0"/>
-              <a:t>Email Address</a:t>
-            </a:r>
-          </a:p>
-          <a:p>
-            <a:r>
-              <a:rPr lang="en-US" b="1" dirty="0"/>
-              <a:t>Password</a:t>
+              <a:t>The Quiz is time based and is from start date/time to end date/time</a:t>
             </a:r>
           </a:p>
           <a:p>
@@ -4616,44 +5047,45 @@
           </a:p>
           <a:p>
             <a:r>
-              <a:rPr lang="en-US" dirty="0">
-                <a:solidFill>
-                  <a:srgbClr val="FF0000"/>
-                </a:solidFill>
-              </a:rPr>
-              <a:t>Click Sign In with new password to get access</a:t>
-            </a:r>
-          </a:p>
-          <a:p>
+              <a:rPr lang="en-US" dirty="0"/>
+              <a:t>The Quiz is of certain marks and Admin/Faculty (Teacher) also set passing percentage</a:t>
+            </a:r>
             <a:endParaRPr lang="en-PK" dirty="0"/>
           </a:p>
         </p:txBody>
       </p:sp>
-      <p:sp>
-        <p:nvSpPr>
-          <p:cNvPr id="5" name="Content Placeholder 4">
-            <a:extLst>
-              <a:ext uri="{FF2B5EF4-FFF2-40B4-BE49-F238E27FC236}">
-                <a16:creationId xmlns:a16="http://schemas.microsoft.com/office/drawing/2014/main" id="{F27E1831-EE8A-E117-09C8-45D9361BA232}"/>
-              </a:ext>
-            </a:extLst>
-          </p:cNvPr>
-          <p:cNvSpPr>
-            <a:spLocks noGrp="1"/>
-          </p:cNvSpPr>
+      <p:pic>
+        <p:nvPicPr>
+          <p:cNvPr id="7" name="Content Placeholder 6">
+            <a:extLst>
+              <a:ext uri="{FF2B5EF4-FFF2-40B4-BE49-F238E27FC236}">
+                <a16:creationId xmlns:a16="http://schemas.microsoft.com/office/drawing/2014/main" id="{E6DB1A4D-63E8-1380-74BD-94AD69579B0F}"/>
+              </a:ext>
+            </a:extLst>
+          </p:cNvPr>
+          <p:cNvPicPr>
+            <a:picLocks noGrp="1" noChangeAspect="1"/>
+          </p:cNvPicPr>
           <p:nvPr>
             <p:ph idx="1"/>
           </p:nvPr>
-        </p:nvSpPr>
-        <p:spPr/>
-        <p:txBody>
-          <a:bodyPr/>
-          <a:lstStyle/>
-          <a:p>
-            <a:endParaRPr lang="en-PK"/>
-          </a:p>
-        </p:txBody>
-      </p:sp>
+        </p:nvPicPr>
+        <p:blipFill>
+          <a:blip r:embed="rId3"/>
+          <a:stretch>
+            <a:fillRect/>
+          </a:stretch>
+        </p:blipFill>
+        <p:spPr>
+          <a:xfrm>
+            <a:off x="6246095" y="457200"/>
+            <a:ext cx="5020216" cy="6031468"/>
+          </a:xfrm>
+          <a:prstGeom prst="rect">
+            <a:avLst/>
+          </a:prstGeom>
+        </p:spPr>
+      </p:pic>
       <p:sp>
         <p:nvSpPr>
           <p:cNvPr id="3" name="TextBox 2">
@@ -4668,7 +5100,7 @@
         </p:nvSpPr>
         <p:spPr>
           <a:xfrm>
-            <a:off x="152400" y="6488668"/>
+            <a:off x="304800" y="6866846"/>
             <a:ext cx="11887200" cy="369332"/>
           </a:xfrm>
           <a:prstGeom prst="rect">
@@ -5059,6 +5491,80 @@
             <a:endParaRPr lang="en-PK" b="1" dirty="0">
               <a:solidFill>
                 <a:schemeClr val="accent2"/>
+              </a:solidFill>
+            </a:endParaRPr>
+          </a:p>
+        </p:txBody>
+      </p:sp>
+      <p:pic>
+        <p:nvPicPr>
+          <p:cNvPr id="6" name="Picture 5">
+            <a:extLst>
+              <a:ext uri="{FF2B5EF4-FFF2-40B4-BE49-F238E27FC236}">
+                <a16:creationId xmlns:a16="http://schemas.microsoft.com/office/drawing/2014/main" id="{F1634772-FF00-F901-61C7-74218AA44161}"/>
+              </a:ext>
+            </a:extLst>
+          </p:cNvPr>
+          <p:cNvPicPr>
+            <a:picLocks noChangeAspect="1"/>
+          </p:cNvPicPr>
+          <p:nvPr/>
+        </p:nvPicPr>
+        <p:blipFill>
+          <a:blip r:embed="rId2"/>
+          <a:stretch>
+            <a:fillRect/>
+          </a:stretch>
+        </p:blipFill>
+        <p:spPr>
+          <a:xfrm>
+            <a:off x="0" y="0"/>
+            <a:ext cx="12192000" cy="6400800"/>
+          </a:xfrm>
+          <a:prstGeom prst="rect">
+            <a:avLst/>
+          </a:prstGeom>
+        </p:spPr>
+      </p:pic>
+      <p:sp>
+        <p:nvSpPr>
+          <p:cNvPr id="7" name="TextBox 6">
+            <a:extLst>
+              <a:ext uri="{FF2B5EF4-FFF2-40B4-BE49-F238E27FC236}">
+                <a16:creationId xmlns:a16="http://schemas.microsoft.com/office/drawing/2014/main" id="{042835E5-13B6-4D44-ECEF-6ECAA5FDB8E5}"/>
+              </a:ext>
+            </a:extLst>
+          </p:cNvPr>
+          <p:cNvSpPr txBox="1"/>
+          <p:nvPr/>
+        </p:nvSpPr>
+        <p:spPr>
+          <a:xfrm>
+            <a:off x="2506133" y="3883378"/>
+            <a:ext cx="8150578" cy="1200329"/>
+          </a:xfrm>
+          <a:prstGeom prst="rect">
+            <a:avLst/>
+          </a:prstGeom>
+          <a:noFill/>
+        </p:spPr>
+        <p:txBody>
+          <a:bodyPr wrap="square" rtlCol="0">
+            <a:spAutoFit/>
+          </a:bodyPr>
+          <a:lstStyle/>
+          <a:p>
+            <a:r>
+              <a:rPr lang="en-US" sz="2400" b="1" dirty="0">
+                <a:solidFill>
+                  <a:srgbClr val="FF0000"/>
+                </a:solidFill>
+              </a:rPr>
+              <a:t>Admin and Dean Office (Sub-Admin) be able to Access Enrollment Section and can Allow Student to Access Portal after Approve the Account.</a:t>
+            </a:r>
+            <a:endParaRPr lang="en-PK" sz="2400" b="1" dirty="0">
+              <a:solidFill>
+                <a:srgbClr val="FF0000"/>
               </a:solidFill>
             </a:endParaRPr>
           </a:p>
@@ -6828,4 +7334,299 @@
     </a:ext>
   </a:extLst>
 </a:theme>
+</file>
+
+<file path=ppt/theme/theme2.xml><?xml version="1.0" encoding="utf-8"?>
+<a:theme xmlns:a="http://schemas.openxmlformats.org/drawingml/2006/main" name="Office Theme">
+  <a:themeElements>
+    <a:clrScheme name="Office">
+      <a:dk1>
+        <a:sysClr val="windowText" lastClr="000000"/>
+      </a:dk1>
+      <a:lt1>
+        <a:sysClr val="window" lastClr="FFFFFF"/>
+      </a:lt1>
+      <a:dk2>
+        <a:srgbClr val="44546A"/>
+      </a:dk2>
+      <a:lt2>
+        <a:srgbClr val="E7E6E6"/>
+      </a:lt2>
+      <a:accent1>
+        <a:srgbClr val="4472C4"/>
+      </a:accent1>
+      <a:accent2>
+        <a:srgbClr val="ED7D31"/>
+      </a:accent2>
+      <a:accent3>
+        <a:srgbClr val="A5A5A5"/>
+      </a:accent3>
+      <a:accent4>
+        <a:srgbClr val="FFC000"/>
+      </a:accent4>
+      <a:accent5>
+        <a:srgbClr val="5B9BD5"/>
+      </a:accent5>
+      <a:accent6>
+        <a:srgbClr val="70AD47"/>
+      </a:accent6>
+      <a:hlink>
+        <a:srgbClr val="0563C1"/>
+      </a:hlink>
+      <a:folHlink>
+        <a:srgbClr val="954F72"/>
+      </a:folHlink>
+    </a:clrScheme>
+    <a:fontScheme name="Office">
+      <a:majorFont>
+        <a:latin typeface="Calibri Light" panose="020F0302020204030204"/>
+        <a:ea typeface=""/>
+        <a:cs typeface=""/>
+        <a:font script="Jpan" typeface="游ゴシック Light"/>
+        <a:font script="Hang" typeface="맑은 고딕"/>
+        <a:font script="Hans" typeface="等线 Light"/>
+        <a:font script="Hant" typeface="新細明體"/>
+        <a:font script="Arab" typeface="Times New Roman"/>
+        <a:font script="Hebr" typeface="Times New Roman"/>
+        <a:font script="Thai" typeface="Angsana New"/>
+        <a:font script="Ethi" typeface="Nyala"/>
+        <a:font script="Beng" typeface="Vrinda"/>
+        <a:font script="Gujr" typeface="Shruti"/>
+        <a:font script="Khmr" typeface="MoolBoran"/>
+        <a:font script="Knda" typeface="Tunga"/>
+        <a:font script="Guru" typeface="Raavi"/>
+        <a:font script="Cans" typeface="Euphemia"/>
+        <a:font script="Cher" typeface="Plantagenet Cherokee"/>
+        <a:font script="Yiii" typeface="Microsoft Yi Baiti"/>
+        <a:font script="Tibt" typeface="Microsoft Himalaya"/>
+        <a:font script="Thaa" typeface="MV Boli"/>
+        <a:font script="Deva" typeface="Mangal"/>
+        <a:font script="Telu" typeface="Gautami"/>
+        <a:font script="Taml" typeface="Latha"/>
+        <a:font script="Syrc" typeface="Estrangelo Edessa"/>
+        <a:font script="Orya" typeface="Kalinga"/>
+        <a:font script="Mlym" typeface="Kartika"/>
+        <a:font script="Laoo" typeface="DokChampa"/>
+        <a:font script="Sinh" typeface="Iskoola Pota"/>
+        <a:font script="Mong" typeface="Mongolian Baiti"/>
+        <a:font script="Viet" typeface="Times New Roman"/>
+        <a:font script="Uigh" typeface="Microsoft Uighur"/>
+        <a:font script="Geor" typeface="Sylfaen"/>
+        <a:font script="Armn" typeface="Arial"/>
+        <a:font script="Bugi" typeface="Leelawadee UI"/>
+        <a:font script="Bopo" typeface="Microsoft JhengHei"/>
+        <a:font script="Java" typeface="Javanese Text"/>
+        <a:font script="Lisu" typeface="Segoe UI"/>
+        <a:font script="Mymr" typeface="Myanmar Text"/>
+        <a:font script="Nkoo" typeface="Ebrima"/>
+        <a:font script="Olck" typeface="Nirmala UI"/>
+        <a:font script="Osma" typeface="Ebrima"/>
+        <a:font script="Phag" typeface="Phagspa"/>
+        <a:font script="Syrn" typeface="Estrangelo Edessa"/>
+        <a:font script="Syrj" typeface="Estrangelo Edessa"/>
+        <a:font script="Syre" typeface="Estrangelo Edessa"/>
+        <a:font script="Sora" typeface="Nirmala UI"/>
+        <a:font script="Tale" typeface="Microsoft Tai Le"/>
+        <a:font script="Talu" typeface="Microsoft New Tai Lue"/>
+        <a:font script="Tfng" typeface="Ebrima"/>
+      </a:majorFont>
+      <a:minorFont>
+        <a:latin typeface="Calibri" panose="020F0502020204030204"/>
+        <a:ea typeface=""/>
+        <a:cs typeface=""/>
+        <a:font script="Jpan" typeface="游ゴシック"/>
+        <a:font script="Hang" typeface="맑은 고딕"/>
+        <a:font script="Hans" typeface="等线"/>
+        <a:font script="Hant" typeface="新細明體"/>
+        <a:font script="Arab" typeface="Arial"/>
+        <a:font script="Hebr" typeface="Arial"/>
+        <a:font script="Thai" typeface="Cordia New"/>
+        <a:font script="Ethi" typeface="Nyala"/>
+        <a:font script="Beng" typeface="Vrinda"/>
+        <a:font script="Gujr" typeface="Shruti"/>
+        <a:font script="Khmr" typeface="DaunPenh"/>
+        <a:font script="Knda" typeface="Tunga"/>
+        <a:font script="Guru" typeface="Raavi"/>
+        <a:font script="Cans" typeface="Euphemia"/>
+        <a:font script="Cher" typeface="Plantagenet Cherokee"/>
+        <a:font script="Yiii" typeface="Microsoft Yi Baiti"/>
+        <a:font script="Tibt" typeface="Microsoft Himalaya"/>
+        <a:font script="Thaa" typeface="MV Boli"/>
+        <a:font script="Deva" typeface="Mangal"/>
+        <a:font script="Telu" typeface="Gautami"/>
+        <a:font script="Taml" typeface="Latha"/>
+        <a:font script="Syrc" typeface="Estrangelo Edessa"/>
+        <a:font script="Orya" typeface="Kalinga"/>
+        <a:font script="Mlym" typeface="Kartika"/>
+        <a:font script="Laoo" typeface="DokChampa"/>
+        <a:font script="Sinh" typeface="Iskoola Pota"/>
+        <a:font script="Mong" typeface="Mongolian Baiti"/>
+        <a:font script="Viet" typeface="Arial"/>
+        <a:font script="Uigh" typeface="Microsoft Uighur"/>
+        <a:font script="Geor" typeface="Sylfaen"/>
+        <a:font script="Armn" typeface="Arial"/>
+        <a:font script="Bugi" typeface="Leelawadee UI"/>
+        <a:font script="Bopo" typeface="Microsoft JhengHei"/>
+        <a:font script="Java" typeface="Javanese Text"/>
+        <a:font script="Lisu" typeface="Segoe UI"/>
+        <a:font script="Mymr" typeface="Myanmar Text"/>
+        <a:font script="Nkoo" typeface="Ebrima"/>
+        <a:font script="Olck" typeface="Nirmala UI"/>
+        <a:font script="Osma" typeface="Ebrima"/>
+        <a:font script="Phag" typeface="Phagspa"/>
+        <a:font script="Syrn" typeface="Estrangelo Edessa"/>
+        <a:font script="Syrj" typeface="Estrangelo Edessa"/>
+        <a:font script="Syre" typeface="Estrangelo Edessa"/>
+        <a:font script="Sora" typeface="Nirmala UI"/>
+        <a:font script="Tale" typeface="Microsoft Tai Le"/>
+        <a:font script="Talu" typeface="Microsoft New Tai Lue"/>
+        <a:font script="Tfng" typeface="Ebrima"/>
+      </a:minorFont>
+    </a:fontScheme>
+    <a:fmtScheme name="Office">
+      <a:fillStyleLst>
+        <a:solidFill>
+          <a:schemeClr val="phClr"/>
+        </a:solidFill>
+        <a:gradFill rotWithShape="1">
+          <a:gsLst>
+            <a:gs pos="0">
+              <a:schemeClr val="phClr">
+                <a:lumMod val="110000"/>
+                <a:satMod val="105000"/>
+                <a:tint val="67000"/>
+              </a:schemeClr>
+            </a:gs>
+            <a:gs pos="50000">
+              <a:schemeClr val="phClr">
+                <a:lumMod val="105000"/>
+                <a:satMod val="103000"/>
+                <a:tint val="73000"/>
+              </a:schemeClr>
+            </a:gs>
+            <a:gs pos="100000">
+              <a:schemeClr val="phClr">
+                <a:lumMod val="105000"/>
+                <a:satMod val="109000"/>
+                <a:tint val="81000"/>
+              </a:schemeClr>
+            </a:gs>
+          </a:gsLst>
+          <a:lin ang="5400000" scaled="0"/>
+        </a:gradFill>
+        <a:gradFill rotWithShape="1">
+          <a:gsLst>
+            <a:gs pos="0">
+              <a:schemeClr val="phClr">
+                <a:satMod val="103000"/>
+                <a:lumMod val="102000"/>
+                <a:tint val="94000"/>
+              </a:schemeClr>
+            </a:gs>
+            <a:gs pos="50000">
+              <a:schemeClr val="phClr">
+                <a:satMod val="110000"/>
+                <a:lumMod val="100000"/>
+                <a:shade val="100000"/>
+              </a:schemeClr>
+            </a:gs>
+            <a:gs pos="100000">
+              <a:schemeClr val="phClr">
+                <a:lumMod val="99000"/>
+                <a:satMod val="120000"/>
+                <a:shade val="78000"/>
+              </a:schemeClr>
+            </a:gs>
+          </a:gsLst>
+          <a:lin ang="5400000" scaled="0"/>
+        </a:gradFill>
+      </a:fillStyleLst>
+      <a:lnStyleLst>
+        <a:ln w="6350" cap="flat" cmpd="sng" algn="ctr">
+          <a:solidFill>
+            <a:schemeClr val="phClr"/>
+          </a:solidFill>
+          <a:prstDash val="solid"/>
+          <a:miter lim="800000"/>
+        </a:ln>
+        <a:ln w="12700" cap="flat" cmpd="sng" algn="ctr">
+          <a:solidFill>
+            <a:schemeClr val="phClr"/>
+          </a:solidFill>
+          <a:prstDash val="solid"/>
+          <a:miter lim="800000"/>
+        </a:ln>
+        <a:ln w="19050" cap="flat" cmpd="sng" algn="ctr">
+          <a:solidFill>
+            <a:schemeClr val="phClr"/>
+          </a:solidFill>
+          <a:prstDash val="solid"/>
+          <a:miter lim="800000"/>
+        </a:ln>
+      </a:lnStyleLst>
+      <a:effectStyleLst>
+        <a:effectStyle>
+          <a:effectLst/>
+        </a:effectStyle>
+        <a:effectStyle>
+          <a:effectLst/>
+        </a:effectStyle>
+        <a:effectStyle>
+          <a:effectLst>
+            <a:outerShdw blurRad="57150" dist="19050" dir="5400000" algn="ctr" rotWithShape="0">
+              <a:srgbClr val="000000">
+                <a:alpha val="63000"/>
+              </a:srgbClr>
+            </a:outerShdw>
+          </a:effectLst>
+        </a:effectStyle>
+      </a:effectStyleLst>
+      <a:bgFillStyleLst>
+        <a:solidFill>
+          <a:schemeClr val="phClr"/>
+        </a:solidFill>
+        <a:solidFill>
+          <a:schemeClr val="phClr">
+            <a:tint val="95000"/>
+            <a:satMod val="170000"/>
+          </a:schemeClr>
+        </a:solidFill>
+        <a:gradFill rotWithShape="1">
+          <a:gsLst>
+            <a:gs pos="0">
+              <a:schemeClr val="phClr">
+                <a:tint val="93000"/>
+                <a:satMod val="150000"/>
+                <a:shade val="98000"/>
+                <a:lumMod val="102000"/>
+              </a:schemeClr>
+            </a:gs>
+            <a:gs pos="50000">
+              <a:schemeClr val="phClr">
+                <a:tint val="98000"/>
+                <a:satMod val="130000"/>
+                <a:shade val="90000"/>
+                <a:lumMod val="103000"/>
+              </a:schemeClr>
+            </a:gs>
+            <a:gs pos="100000">
+              <a:schemeClr val="phClr">
+                <a:shade val="63000"/>
+                <a:satMod val="120000"/>
+              </a:schemeClr>
+            </a:gs>
+          </a:gsLst>
+          <a:lin ang="5400000" scaled="0"/>
+        </a:gradFill>
+      </a:bgFillStyleLst>
+    </a:fmtScheme>
+  </a:themeElements>
+  <a:objectDefaults/>
+  <a:extraClrSchemeLst/>
+  <a:extLst>
+    <a:ext uri="{05A4C25C-085E-4340-85A3-A5531E510DB2}">
+      <thm15:themeFamily xmlns:thm15="http://schemas.microsoft.com/office/thememl/2012/main" name="Office Theme" id="{62F939B6-93AF-4DB8-9C6B-D6C7DFDC589F}" vid="{4A3C46E8-61CC-4603-A589-7422A47A8E4A}"/>
+    </a:ext>
+  </a:extLst>
+</a:theme>
 </file>
--- a/SUPER ADMIN ROLE - DEAN ROLE.pptx
+++ b/SUPER ADMIN ROLE - DEAN ROLE.pptx
@@ -5,7 +5,7 @@
     <p:sldMasterId id="2147483648" r:id="rId1"/>
   </p:sldMasterIdLst>
   <p:notesMasterIdLst>
-    <p:notesMasterId r:id="rId18"/>
+    <p:notesMasterId r:id="rId31"/>
   </p:notesMasterIdLst>
   <p:sldIdLst>
     <p:sldId id="256" r:id="rId2"/>
@@ -22,8 +22,21 @@
     <p:sldId id="268" r:id="rId13"/>
     <p:sldId id="269" r:id="rId14"/>
     <p:sldId id="270" r:id="rId15"/>
-    <p:sldId id="271" r:id="rId16"/>
-    <p:sldId id="260" r:id="rId17"/>
+    <p:sldId id="260" r:id="rId16"/>
+    <p:sldId id="272" r:id="rId17"/>
+    <p:sldId id="273" r:id="rId18"/>
+    <p:sldId id="274" r:id="rId19"/>
+    <p:sldId id="275" r:id="rId20"/>
+    <p:sldId id="285" r:id="rId21"/>
+    <p:sldId id="271" r:id="rId22"/>
+    <p:sldId id="286" r:id="rId23"/>
+    <p:sldId id="277" r:id="rId24"/>
+    <p:sldId id="278" r:id="rId25"/>
+    <p:sldId id="279" r:id="rId26"/>
+    <p:sldId id="280" r:id="rId27"/>
+    <p:sldId id="281" r:id="rId28"/>
+    <p:sldId id="282" r:id="rId29"/>
+    <p:sldId id="283" r:id="rId30"/>
   </p:sldIdLst>
   <p:sldSz cx="12192000" cy="6858000"/>
   <p:notesSz cx="6858000" cy="9144000"/>
@@ -555,6 +568,90 @@
     <p:extLst>
       <p:ext uri="{BB962C8B-B14F-4D97-AF65-F5344CB8AC3E}">
         <p14:creationId xmlns:p14="http://schemas.microsoft.com/office/powerpoint/2010/main" val="4218757003"/>
+      </p:ext>
+    </p:extLst>
+  </p:cSld>
+  <p:clrMapOvr>
+    <a:masterClrMapping/>
+  </p:clrMapOvr>
+</p:notes>
+</file>
+
+<file path=ppt/notesSlides/notesSlide2.xml><?xml version="1.0" encoding="utf-8"?>
+<p:notes xmlns:a="http://schemas.openxmlformats.org/drawingml/2006/main" xmlns:r="http://schemas.openxmlformats.org/officeDocument/2006/relationships" xmlns:p="http://schemas.openxmlformats.org/presentationml/2006/main">
+  <p:cSld>
+    <p:spTree>
+      <p:nvGrpSpPr>
+        <p:cNvPr id="1" name=""/>
+        <p:cNvGrpSpPr/>
+        <p:nvPr/>
+      </p:nvGrpSpPr>
+      <p:grpSpPr>
+        <a:xfrm>
+          <a:off x="0" y="0"/>
+          <a:ext cx="0" cy="0"/>
+          <a:chOff x="0" y="0"/>
+          <a:chExt cx="0" cy="0"/>
+        </a:xfrm>
+      </p:grpSpPr>
+      <p:sp>
+        <p:nvSpPr>
+          <p:cNvPr id="2" name="Slide Image Placeholder 1"/>
+          <p:cNvSpPr>
+            <a:spLocks noGrp="1" noRot="1" noChangeAspect="1"/>
+          </p:cNvSpPr>
+          <p:nvPr>
+            <p:ph type="sldImg"/>
+          </p:nvPr>
+        </p:nvSpPr>
+        <p:spPr/>
+      </p:sp>
+      <p:sp>
+        <p:nvSpPr>
+          <p:cNvPr id="3" name="Notes Placeholder 2"/>
+          <p:cNvSpPr>
+            <a:spLocks noGrp="1"/>
+          </p:cNvSpPr>
+          <p:nvPr>
+            <p:ph type="body" idx="1"/>
+          </p:nvPr>
+        </p:nvSpPr>
+        <p:spPr/>
+        <p:txBody>
+          <a:bodyPr/>
+          <a:lstStyle/>
+          <a:p>
+            <a:endParaRPr lang="en-PK" dirty="0"/>
+          </a:p>
+        </p:txBody>
+      </p:sp>
+      <p:sp>
+        <p:nvSpPr>
+          <p:cNvPr id="4" name="Slide Number Placeholder 3"/>
+          <p:cNvSpPr>
+            <a:spLocks noGrp="1"/>
+          </p:cNvSpPr>
+          <p:nvPr>
+            <p:ph type="sldNum" sz="quarter" idx="5"/>
+          </p:nvPr>
+        </p:nvSpPr>
+        <p:spPr/>
+        <p:txBody>
+          <a:bodyPr/>
+          <a:lstStyle/>
+          <a:p>
+            <a:fld id="{3AA0AC69-8D9F-4B74-AF6C-0D95D0277DA2}" type="slidenum">
+              <a:rPr lang="en-PK" smtClean="0"/>
+              <a:t>18</a:t>
+            </a:fld>
+            <a:endParaRPr lang="en-PK"/>
+          </a:p>
+        </p:txBody>
+      </p:sp>
+    </p:spTree>
+    <p:extLst>
+      <p:ext uri="{BB962C8B-B14F-4D97-AF65-F5344CB8AC3E}">
+        <p14:creationId xmlns:p14="http://schemas.microsoft.com/office/powerpoint/2010/main" val="1108429833"/>
       </p:ext>
     </p:extLst>
   </p:cSld>
@@ -5159,226 +5256,6 @@
         <p:cNvPr id="1" name="">
           <a:extLst>
             <a:ext uri="{FF2B5EF4-FFF2-40B4-BE49-F238E27FC236}">
-              <a16:creationId xmlns:a16="http://schemas.microsoft.com/office/drawing/2014/main" id="{BF31DE1C-03B3-90EE-4D90-EC5C56525BF3}"/>
-            </a:ext>
-          </a:extLst>
-        </p:cNvPr>
-        <p:cNvGrpSpPr/>
-        <p:nvPr/>
-      </p:nvGrpSpPr>
-      <p:grpSpPr>
-        <a:xfrm>
-          <a:off x="0" y="0"/>
-          <a:ext cx="0" cy="0"/>
-          <a:chOff x="0" y="0"/>
-          <a:chExt cx="0" cy="0"/>
-        </a:xfrm>
-      </p:grpSpPr>
-      <p:sp>
-        <p:nvSpPr>
-          <p:cNvPr id="2" name="Title 1">
-            <a:extLst>
-              <a:ext uri="{FF2B5EF4-FFF2-40B4-BE49-F238E27FC236}">
-                <a16:creationId xmlns:a16="http://schemas.microsoft.com/office/drawing/2014/main" id="{45D4D1DA-D842-8088-629C-5FF10E874E1B}"/>
-              </a:ext>
-            </a:extLst>
-          </p:cNvPr>
-          <p:cNvSpPr>
-            <a:spLocks noGrp="1"/>
-          </p:cNvSpPr>
-          <p:nvPr>
-            <p:ph type="title"/>
-          </p:nvPr>
-        </p:nvSpPr>
-        <p:spPr>
-          <a:xfrm>
-            <a:off x="395112" y="457200"/>
-            <a:ext cx="4376914" cy="1600200"/>
-          </a:xfrm>
-        </p:spPr>
-        <p:txBody>
-          <a:bodyPr/>
-          <a:lstStyle/>
-          <a:p>
-            <a:r>
-              <a:rPr lang="en-US" b="1" dirty="0">
-                <a:solidFill>
-                  <a:srgbClr val="0070C0"/>
-                </a:solidFill>
-              </a:rPr>
-              <a:t>Manager Course Material</a:t>
-            </a:r>
-            <a:endParaRPr lang="en-PK" b="1" dirty="0">
-              <a:solidFill>
-                <a:srgbClr val="0070C0"/>
-              </a:solidFill>
-            </a:endParaRPr>
-          </a:p>
-        </p:txBody>
-      </p:sp>
-      <p:sp>
-        <p:nvSpPr>
-          <p:cNvPr id="4" name="Text Placeholder 3">
-            <a:extLst>
-              <a:ext uri="{FF2B5EF4-FFF2-40B4-BE49-F238E27FC236}">
-                <a16:creationId xmlns:a16="http://schemas.microsoft.com/office/drawing/2014/main" id="{00C436DF-4F89-23C8-E9D8-EAC0464B9F0C}"/>
-              </a:ext>
-            </a:extLst>
-          </p:cNvPr>
-          <p:cNvSpPr>
-            <a:spLocks noGrp="1"/>
-          </p:cNvSpPr>
-          <p:nvPr>
-            <p:ph type="body" sz="half" idx="2"/>
-          </p:nvPr>
-        </p:nvSpPr>
-        <p:spPr/>
-        <p:txBody>
-          <a:bodyPr/>
-          <a:lstStyle/>
-          <a:p>
-            <a:r>
-              <a:rPr lang="en-US" dirty="0"/>
-              <a:t>The Login page of Portal is Sign-In Access</a:t>
-            </a:r>
-          </a:p>
-          <a:p>
-            <a:endParaRPr lang="en-US" dirty="0"/>
-          </a:p>
-          <a:p>
-            <a:r>
-              <a:rPr lang="en-US" dirty="0"/>
-              <a:t>Login to Portal to access by inserting:</a:t>
-            </a:r>
-          </a:p>
-          <a:p>
-            <a:r>
-              <a:rPr lang="en-US" b="1" dirty="0"/>
-              <a:t>Email Address</a:t>
-            </a:r>
-          </a:p>
-          <a:p>
-            <a:r>
-              <a:rPr lang="en-US" b="1" dirty="0"/>
-              <a:t>Password</a:t>
-            </a:r>
-          </a:p>
-          <a:p>
-            <a:endParaRPr lang="en-US" dirty="0"/>
-          </a:p>
-          <a:p>
-            <a:r>
-              <a:rPr lang="en-US" dirty="0">
-                <a:solidFill>
-                  <a:srgbClr val="FF0000"/>
-                </a:solidFill>
-              </a:rPr>
-              <a:t>Click Sign In with new password to get access</a:t>
-            </a:r>
-          </a:p>
-          <a:p>
-            <a:endParaRPr lang="en-PK" dirty="0"/>
-          </a:p>
-        </p:txBody>
-      </p:sp>
-      <p:sp>
-        <p:nvSpPr>
-          <p:cNvPr id="5" name="Content Placeholder 4">
-            <a:extLst>
-              <a:ext uri="{FF2B5EF4-FFF2-40B4-BE49-F238E27FC236}">
-                <a16:creationId xmlns:a16="http://schemas.microsoft.com/office/drawing/2014/main" id="{6D9EA833-0F89-FF68-B36D-3B8D94EAE140}"/>
-              </a:ext>
-            </a:extLst>
-          </p:cNvPr>
-          <p:cNvSpPr>
-            <a:spLocks noGrp="1"/>
-          </p:cNvSpPr>
-          <p:nvPr>
-            <p:ph idx="1"/>
-          </p:nvPr>
-        </p:nvSpPr>
-        <p:spPr/>
-        <p:txBody>
-          <a:bodyPr/>
-          <a:lstStyle/>
-          <a:p>
-            <a:endParaRPr lang="en-PK"/>
-          </a:p>
-        </p:txBody>
-      </p:sp>
-      <p:sp>
-        <p:nvSpPr>
-          <p:cNvPr id="3" name="TextBox 2">
-            <a:extLst>
-              <a:ext uri="{FF2B5EF4-FFF2-40B4-BE49-F238E27FC236}">
-                <a16:creationId xmlns:a16="http://schemas.microsoft.com/office/drawing/2014/main" id="{B1473922-33A9-0A3D-E74B-E4871C19B035}"/>
-              </a:ext>
-            </a:extLst>
-          </p:cNvPr>
-          <p:cNvSpPr txBox="1"/>
-          <p:nvPr/>
-        </p:nvSpPr>
-        <p:spPr>
-          <a:xfrm>
-            <a:off x="152400" y="6488668"/>
-            <a:ext cx="11887200" cy="369332"/>
-          </a:xfrm>
-          <a:prstGeom prst="rect">
-            <a:avLst/>
-          </a:prstGeom>
-          <a:noFill/>
-        </p:spPr>
-        <p:txBody>
-          <a:bodyPr wrap="square" rtlCol="0">
-            <a:spAutoFit/>
-          </a:bodyPr>
-          <a:lstStyle/>
-          <a:p>
-            <a:r>
-              <a:rPr lang="en-US" b="1" dirty="0">
-                <a:solidFill>
-                  <a:srgbClr val="0070C0"/>
-                </a:solidFill>
-              </a:rPr>
-              <a:t>FACULTY OF PHARMACY AND PHARMACEUTICAL SCIENCES                                                                               </a:t>
-            </a:r>
-            <a:r>
-              <a:rPr lang="en-US" b="1" dirty="0">
-                <a:solidFill>
-                  <a:schemeClr val="accent2"/>
-                </a:solidFill>
-              </a:rPr>
-              <a:t>SOFTSOLS PAKISTAN</a:t>
-            </a:r>
-            <a:endParaRPr lang="en-PK" b="1" dirty="0">
-              <a:solidFill>
-                <a:schemeClr val="accent2"/>
-              </a:solidFill>
-            </a:endParaRPr>
-          </a:p>
-        </p:txBody>
-      </p:sp>
-    </p:spTree>
-    <p:extLst>
-      <p:ext uri="{BB962C8B-B14F-4D97-AF65-F5344CB8AC3E}">
-        <p14:creationId xmlns:p14="http://schemas.microsoft.com/office/powerpoint/2010/main" val="4213975496"/>
-      </p:ext>
-    </p:extLst>
-  </p:cSld>
-  <p:clrMapOvr>
-    <a:masterClrMapping/>
-  </p:clrMapOvr>
-</p:sld>
-</file>
-
-<file path=ppt/slides/slide16.xml><?xml version="1.0" encoding="utf-8"?>
-<p:sld xmlns:a="http://schemas.openxmlformats.org/drawingml/2006/main" xmlns:r="http://schemas.openxmlformats.org/officeDocument/2006/relationships" xmlns:p="http://schemas.openxmlformats.org/presentationml/2006/main">
-  <p:cSld>
-    <p:spTree>
-      <p:nvGrpSpPr>
-        <p:cNvPr id="1" name="">
-          <a:extLst>
-            <a:ext uri="{FF2B5EF4-FFF2-40B4-BE49-F238E27FC236}">
               <a16:creationId xmlns:a16="http://schemas.microsoft.com/office/drawing/2014/main" id="{29E78392-D9D5-CDE8-7220-EAC66C296214}"/>
             </a:ext>
           </a:extLst>
@@ -5574,6 +5451,884 @@
     <p:extLst>
       <p:ext uri="{BB962C8B-B14F-4D97-AF65-F5344CB8AC3E}">
         <p14:creationId xmlns:p14="http://schemas.microsoft.com/office/powerpoint/2010/main" val="793866217"/>
+      </p:ext>
+    </p:extLst>
+  </p:cSld>
+  <p:clrMapOvr>
+    <a:masterClrMapping/>
+  </p:clrMapOvr>
+</p:sld>
+</file>
+
+<file path=ppt/slides/slide16.xml><?xml version="1.0" encoding="utf-8"?>
+<p:sld xmlns:a="http://schemas.openxmlformats.org/drawingml/2006/main" xmlns:r="http://schemas.openxmlformats.org/officeDocument/2006/relationships" xmlns:p="http://schemas.openxmlformats.org/presentationml/2006/main">
+  <p:cSld>
+    <p:spTree>
+      <p:nvGrpSpPr>
+        <p:cNvPr id="1" name="">
+          <a:extLst>
+            <a:ext uri="{FF2B5EF4-FFF2-40B4-BE49-F238E27FC236}">
+              <a16:creationId xmlns:a16="http://schemas.microsoft.com/office/drawing/2014/main" id="{D6188D29-524E-9030-DDF9-2FFBFB948A03}"/>
+            </a:ext>
+          </a:extLst>
+        </p:cNvPr>
+        <p:cNvGrpSpPr/>
+        <p:nvPr/>
+      </p:nvGrpSpPr>
+      <p:grpSpPr>
+        <a:xfrm>
+          <a:off x="0" y="0"/>
+          <a:ext cx="0" cy="0"/>
+          <a:chOff x="0" y="0"/>
+          <a:chExt cx="0" cy="0"/>
+        </a:xfrm>
+      </p:grpSpPr>
+      <p:sp>
+        <p:nvSpPr>
+          <p:cNvPr id="2" name="Title 1">
+            <a:extLst>
+              <a:ext uri="{FF2B5EF4-FFF2-40B4-BE49-F238E27FC236}">
+                <a16:creationId xmlns:a16="http://schemas.microsoft.com/office/drawing/2014/main" id="{2745430A-9B0F-D826-8B17-198B41B9B6E3}"/>
+              </a:ext>
+            </a:extLst>
+          </p:cNvPr>
+          <p:cNvSpPr>
+            <a:spLocks noGrp="1"/>
+          </p:cNvSpPr>
+          <p:nvPr>
+            <p:ph type="title"/>
+          </p:nvPr>
+        </p:nvSpPr>
+        <p:spPr/>
+        <p:txBody>
+          <a:bodyPr/>
+          <a:lstStyle/>
+          <a:p>
+            <a:endParaRPr lang="en-PK"/>
+          </a:p>
+        </p:txBody>
+      </p:sp>
+      <p:sp>
+        <p:nvSpPr>
+          <p:cNvPr id="3" name="Content Placeholder 2">
+            <a:extLst>
+              <a:ext uri="{FF2B5EF4-FFF2-40B4-BE49-F238E27FC236}">
+                <a16:creationId xmlns:a16="http://schemas.microsoft.com/office/drawing/2014/main" id="{C686B506-1C06-0EC6-7279-1083653DB0F7}"/>
+              </a:ext>
+            </a:extLst>
+          </p:cNvPr>
+          <p:cNvSpPr>
+            <a:spLocks noGrp="1"/>
+          </p:cNvSpPr>
+          <p:nvPr>
+            <p:ph idx="1"/>
+          </p:nvPr>
+        </p:nvSpPr>
+        <p:spPr/>
+        <p:txBody>
+          <a:bodyPr/>
+          <a:lstStyle/>
+          <a:p>
+            <a:endParaRPr lang="en-PK"/>
+          </a:p>
+        </p:txBody>
+      </p:sp>
+      <p:sp>
+        <p:nvSpPr>
+          <p:cNvPr id="4" name="TextBox 3">
+            <a:extLst>
+              <a:ext uri="{FF2B5EF4-FFF2-40B4-BE49-F238E27FC236}">
+                <a16:creationId xmlns:a16="http://schemas.microsoft.com/office/drawing/2014/main" id="{B389A75D-8D27-03FF-9B3B-4F371BF90BCE}"/>
+              </a:ext>
+            </a:extLst>
+          </p:cNvPr>
+          <p:cNvSpPr txBox="1"/>
+          <p:nvPr/>
+        </p:nvSpPr>
+        <p:spPr>
+          <a:xfrm>
+            <a:off x="152400" y="6488668"/>
+            <a:ext cx="11887200" cy="369332"/>
+          </a:xfrm>
+          <a:prstGeom prst="rect">
+            <a:avLst/>
+          </a:prstGeom>
+          <a:noFill/>
+        </p:spPr>
+        <p:txBody>
+          <a:bodyPr wrap="square" rtlCol="0">
+            <a:spAutoFit/>
+          </a:bodyPr>
+          <a:lstStyle/>
+          <a:p>
+            <a:r>
+              <a:rPr lang="en-US" b="1" dirty="0">
+                <a:solidFill>
+                  <a:srgbClr val="0070C0"/>
+                </a:solidFill>
+              </a:rPr>
+              <a:t>FACULTY OF PHARMACY AND PHARMACEUTICAL SCIENCES                                                                               </a:t>
+            </a:r>
+            <a:r>
+              <a:rPr lang="en-US" b="1" dirty="0">
+                <a:solidFill>
+                  <a:schemeClr val="accent2"/>
+                </a:solidFill>
+              </a:rPr>
+              <a:t>SOFTSOLS PAKISTAN</a:t>
+            </a:r>
+            <a:endParaRPr lang="en-PK" b="1" dirty="0">
+              <a:solidFill>
+                <a:schemeClr val="accent2"/>
+              </a:solidFill>
+            </a:endParaRPr>
+          </a:p>
+        </p:txBody>
+      </p:sp>
+      <p:pic>
+        <p:nvPicPr>
+          <p:cNvPr id="6" name="Picture 5">
+            <a:extLst>
+              <a:ext uri="{FF2B5EF4-FFF2-40B4-BE49-F238E27FC236}">
+                <a16:creationId xmlns:a16="http://schemas.microsoft.com/office/drawing/2014/main" id="{1BFCBF52-5753-10B4-5522-7C642C9474BE}"/>
+              </a:ext>
+            </a:extLst>
+          </p:cNvPr>
+          <p:cNvPicPr>
+            <a:picLocks noChangeAspect="1"/>
+          </p:cNvPicPr>
+          <p:nvPr/>
+        </p:nvPicPr>
+        <p:blipFill>
+          <a:blip r:embed="rId2"/>
+          <a:stretch>
+            <a:fillRect/>
+          </a:stretch>
+        </p:blipFill>
+        <p:spPr>
+          <a:xfrm>
+            <a:off x="0" y="-1"/>
+            <a:ext cx="12192000" cy="6310489"/>
+          </a:xfrm>
+          <a:prstGeom prst="rect">
+            <a:avLst/>
+          </a:prstGeom>
+        </p:spPr>
+      </p:pic>
+      <p:sp>
+        <p:nvSpPr>
+          <p:cNvPr id="7" name="TextBox 6">
+            <a:extLst>
+              <a:ext uri="{FF2B5EF4-FFF2-40B4-BE49-F238E27FC236}">
+                <a16:creationId xmlns:a16="http://schemas.microsoft.com/office/drawing/2014/main" id="{08704BFE-ED11-DC85-CF4F-7A1E80A7DC7A}"/>
+              </a:ext>
+            </a:extLst>
+          </p:cNvPr>
+          <p:cNvSpPr txBox="1"/>
+          <p:nvPr/>
+        </p:nvSpPr>
+        <p:spPr>
+          <a:xfrm>
+            <a:off x="4752622" y="2585156"/>
+            <a:ext cx="5294489" cy="1754326"/>
+          </a:xfrm>
+          <a:prstGeom prst="rect">
+            <a:avLst/>
+          </a:prstGeom>
+          <a:noFill/>
+        </p:spPr>
+        <p:txBody>
+          <a:bodyPr wrap="square" rtlCol="0">
+            <a:spAutoFit/>
+          </a:bodyPr>
+          <a:lstStyle/>
+          <a:p>
+            <a:r>
+              <a:rPr lang="en-US" dirty="0">
+                <a:solidFill>
+                  <a:srgbClr val="FF0000"/>
+                </a:solidFill>
+              </a:rPr>
+              <a:t>1:1 CHAT / MESSENGER between Faculty Members (Teachers), HODs, Dean Office and Dean </a:t>
+            </a:r>
+          </a:p>
+          <a:p>
+            <a:endParaRPr lang="en-US" dirty="0">
+              <a:solidFill>
+                <a:srgbClr val="FF0000"/>
+              </a:solidFill>
+            </a:endParaRPr>
+          </a:p>
+          <a:p>
+            <a:r>
+              <a:rPr lang="en-US" dirty="0">
+                <a:solidFill>
+                  <a:srgbClr val="FF0000"/>
+                </a:solidFill>
+              </a:rPr>
+              <a:t>Any Member will send message to other.</a:t>
+            </a:r>
+          </a:p>
+          <a:p>
+            <a:endParaRPr lang="en-US" dirty="0">
+              <a:solidFill>
+                <a:srgbClr val="FF0000"/>
+              </a:solidFill>
+            </a:endParaRPr>
+          </a:p>
+          <a:p>
+            <a:r>
+              <a:rPr lang="en-US" dirty="0">
+                <a:solidFill>
+                  <a:srgbClr val="FF0000"/>
+                </a:solidFill>
+              </a:rPr>
+              <a:t>100% Encrypted chat</a:t>
+            </a:r>
+            <a:endParaRPr lang="en-PK" dirty="0">
+              <a:solidFill>
+                <a:srgbClr val="FF0000"/>
+              </a:solidFill>
+            </a:endParaRPr>
+          </a:p>
+        </p:txBody>
+      </p:sp>
+    </p:spTree>
+    <p:extLst>
+      <p:ext uri="{BB962C8B-B14F-4D97-AF65-F5344CB8AC3E}">
+        <p14:creationId xmlns:p14="http://schemas.microsoft.com/office/powerpoint/2010/main" val="3053948027"/>
+      </p:ext>
+    </p:extLst>
+  </p:cSld>
+  <p:clrMapOvr>
+    <a:masterClrMapping/>
+  </p:clrMapOvr>
+</p:sld>
+</file>
+
+<file path=ppt/slides/slide17.xml><?xml version="1.0" encoding="utf-8"?>
+<p:sld xmlns:a="http://schemas.openxmlformats.org/drawingml/2006/main" xmlns:r="http://schemas.openxmlformats.org/officeDocument/2006/relationships" xmlns:p="http://schemas.openxmlformats.org/presentationml/2006/main">
+  <p:cSld>
+    <p:spTree>
+      <p:nvGrpSpPr>
+        <p:cNvPr id="1" name="">
+          <a:extLst>
+            <a:ext uri="{FF2B5EF4-FFF2-40B4-BE49-F238E27FC236}">
+              <a16:creationId xmlns:a16="http://schemas.microsoft.com/office/drawing/2014/main" id="{417AA6B0-EA62-B8D9-8F4B-172F4765AA7A}"/>
+            </a:ext>
+          </a:extLst>
+        </p:cNvPr>
+        <p:cNvGrpSpPr/>
+        <p:nvPr/>
+      </p:nvGrpSpPr>
+      <p:grpSpPr>
+        <a:xfrm>
+          <a:off x="0" y="0"/>
+          <a:ext cx="0" cy="0"/>
+          <a:chOff x="0" y="0"/>
+          <a:chExt cx="0" cy="0"/>
+        </a:xfrm>
+      </p:grpSpPr>
+      <p:sp>
+        <p:nvSpPr>
+          <p:cNvPr id="2" name="Title 1">
+            <a:extLst>
+              <a:ext uri="{FF2B5EF4-FFF2-40B4-BE49-F238E27FC236}">
+                <a16:creationId xmlns:a16="http://schemas.microsoft.com/office/drawing/2014/main" id="{CCCE2A8D-D636-1277-EDFA-23D14389CD33}"/>
+              </a:ext>
+            </a:extLst>
+          </p:cNvPr>
+          <p:cNvSpPr>
+            <a:spLocks noGrp="1"/>
+          </p:cNvSpPr>
+          <p:nvPr>
+            <p:ph type="title"/>
+          </p:nvPr>
+        </p:nvSpPr>
+        <p:spPr/>
+        <p:txBody>
+          <a:bodyPr/>
+          <a:lstStyle/>
+          <a:p>
+            <a:endParaRPr lang="en-PK"/>
+          </a:p>
+        </p:txBody>
+      </p:sp>
+      <p:sp>
+        <p:nvSpPr>
+          <p:cNvPr id="3" name="Content Placeholder 2">
+            <a:extLst>
+              <a:ext uri="{FF2B5EF4-FFF2-40B4-BE49-F238E27FC236}">
+                <a16:creationId xmlns:a16="http://schemas.microsoft.com/office/drawing/2014/main" id="{8AFE47A1-F6C3-36E9-C876-936D3582C19B}"/>
+              </a:ext>
+            </a:extLst>
+          </p:cNvPr>
+          <p:cNvSpPr>
+            <a:spLocks noGrp="1"/>
+          </p:cNvSpPr>
+          <p:nvPr>
+            <p:ph idx="1"/>
+          </p:nvPr>
+        </p:nvSpPr>
+        <p:spPr/>
+        <p:txBody>
+          <a:bodyPr/>
+          <a:lstStyle/>
+          <a:p>
+            <a:endParaRPr lang="en-PK"/>
+          </a:p>
+        </p:txBody>
+      </p:sp>
+      <p:sp>
+        <p:nvSpPr>
+          <p:cNvPr id="4" name="TextBox 3">
+            <a:extLst>
+              <a:ext uri="{FF2B5EF4-FFF2-40B4-BE49-F238E27FC236}">
+                <a16:creationId xmlns:a16="http://schemas.microsoft.com/office/drawing/2014/main" id="{02C7E35E-6DD7-E97D-C057-8FC8E3849A14}"/>
+              </a:ext>
+            </a:extLst>
+          </p:cNvPr>
+          <p:cNvSpPr txBox="1"/>
+          <p:nvPr/>
+        </p:nvSpPr>
+        <p:spPr>
+          <a:xfrm>
+            <a:off x="152400" y="6488668"/>
+            <a:ext cx="11887200" cy="369332"/>
+          </a:xfrm>
+          <a:prstGeom prst="rect">
+            <a:avLst/>
+          </a:prstGeom>
+          <a:noFill/>
+        </p:spPr>
+        <p:txBody>
+          <a:bodyPr wrap="square" rtlCol="0">
+            <a:spAutoFit/>
+          </a:bodyPr>
+          <a:lstStyle/>
+          <a:p>
+            <a:r>
+              <a:rPr lang="en-US" b="1" dirty="0">
+                <a:solidFill>
+                  <a:srgbClr val="0070C0"/>
+                </a:solidFill>
+              </a:rPr>
+              <a:t>FACULTY OF PHARMACY AND PHARMACEUTICAL SCIENCES                                                                               </a:t>
+            </a:r>
+            <a:r>
+              <a:rPr lang="en-US" b="1" dirty="0">
+                <a:solidFill>
+                  <a:schemeClr val="accent2"/>
+                </a:solidFill>
+              </a:rPr>
+              <a:t>SOFTSOLS PAKISTAN</a:t>
+            </a:r>
+            <a:endParaRPr lang="en-PK" b="1" dirty="0">
+              <a:solidFill>
+                <a:schemeClr val="accent2"/>
+              </a:solidFill>
+            </a:endParaRPr>
+          </a:p>
+        </p:txBody>
+      </p:sp>
+      <p:pic>
+        <p:nvPicPr>
+          <p:cNvPr id="6" name="Picture 5">
+            <a:extLst>
+              <a:ext uri="{FF2B5EF4-FFF2-40B4-BE49-F238E27FC236}">
+                <a16:creationId xmlns:a16="http://schemas.microsoft.com/office/drawing/2014/main" id="{14E0B199-697B-C23C-2F09-AC7CF64CC9F4}"/>
+              </a:ext>
+            </a:extLst>
+          </p:cNvPr>
+          <p:cNvPicPr>
+            <a:picLocks noChangeAspect="1"/>
+          </p:cNvPicPr>
+          <p:nvPr/>
+        </p:nvPicPr>
+        <p:blipFill>
+          <a:blip r:embed="rId2"/>
+          <a:stretch>
+            <a:fillRect/>
+          </a:stretch>
+        </p:blipFill>
+        <p:spPr>
+          <a:xfrm>
+            <a:off x="0" y="113780"/>
+            <a:ext cx="12192000" cy="6241864"/>
+          </a:xfrm>
+          <a:prstGeom prst="rect">
+            <a:avLst/>
+          </a:prstGeom>
+        </p:spPr>
+      </p:pic>
+      <p:sp>
+        <p:nvSpPr>
+          <p:cNvPr id="5" name="TextBox 4">
+            <a:extLst>
+              <a:ext uri="{FF2B5EF4-FFF2-40B4-BE49-F238E27FC236}">
+                <a16:creationId xmlns:a16="http://schemas.microsoft.com/office/drawing/2014/main" id="{FE380240-E81A-BE02-3418-E6B78A0E0B59}"/>
+              </a:ext>
+            </a:extLst>
+          </p:cNvPr>
+          <p:cNvSpPr txBox="1"/>
+          <p:nvPr/>
+        </p:nvSpPr>
+        <p:spPr>
+          <a:xfrm>
+            <a:off x="7382933" y="3429000"/>
+            <a:ext cx="4346223" cy="2246769"/>
+          </a:xfrm>
+          <a:prstGeom prst="rect">
+            <a:avLst/>
+          </a:prstGeom>
+          <a:noFill/>
+        </p:spPr>
+        <p:txBody>
+          <a:bodyPr wrap="square" rtlCol="0">
+            <a:spAutoFit/>
+          </a:bodyPr>
+          <a:lstStyle/>
+          <a:p>
+            <a:r>
+              <a:rPr lang="en-US" sz="2800" b="1" dirty="0">
+                <a:solidFill>
+                  <a:srgbClr val="FF0000"/>
+                </a:solidFill>
+              </a:rPr>
+              <a:t>Live Classes Page showing Schedule Lectured within any Course by Admin / Teacher and also Live Session created in this Page.</a:t>
+            </a:r>
+            <a:endParaRPr lang="en-PK" sz="2800" b="1" dirty="0">
+              <a:solidFill>
+                <a:srgbClr val="FF0000"/>
+              </a:solidFill>
+            </a:endParaRPr>
+          </a:p>
+        </p:txBody>
+      </p:sp>
+    </p:spTree>
+    <p:extLst>
+      <p:ext uri="{BB962C8B-B14F-4D97-AF65-F5344CB8AC3E}">
+        <p14:creationId xmlns:p14="http://schemas.microsoft.com/office/powerpoint/2010/main" val="1272446270"/>
+      </p:ext>
+    </p:extLst>
+  </p:cSld>
+  <p:clrMapOvr>
+    <a:masterClrMapping/>
+  </p:clrMapOvr>
+</p:sld>
+</file>
+
+<file path=ppt/slides/slide18.xml><?xml version="1.0" encoding="utf-8"?>
+<p:sld xmlns:a="http://schemas.openxmlformats.org/drawingml/2006/main" xmlns:r="http://schemas.openxmlformats.org/officeDocument/2006/relationships" xmlns:p="http://schemas.openxmlformats.org/presentationml/2006/main">
+  <p:cSld>
+    <p:spTree>
+      <p:nvGrpSpPr>
+        <p:cNvPr id="1" name="">
+          <a:extLst>
+            <a:ext uri="{FF2B5EF4-FFF2-40B4-BE49-F238E27FC236}">
+              <a16:creationId xmlns:a16="http://schemas.microsoft.com/office/drawing/2014/main" id="{1F246CC1-3EEE-232A-97DB-FDE4C5C155DF}"/>
+            </a:ext>
+          </a:extLst>
+        </p:cNvPr>
+        <p:cNvGrpSpPr/>
+        <p:nvPr/>
+      </p:nvGrpSpPr>
+      <p:grpSpPr>
+        <a:xfrm>
+          <a:off x="0" y="0"/>
+          <a:ext cx="0" cy="0"/>
+          <a:chOff x="0" y="0"/>
+          <a:chExt cx="0" cy="0"/>
+        </a:xfrm>
+      </p:grpSpPr>
+      <p:sp>
+        <p:nvSpPr>
+          <p:cNvPr id="2" name="Title 1">
+            <a:extLst>
+              <a:ext uri="{FF2B5EF4-FFF2-40B4-BE49-F238E27FC236}">
+                <a16:creationId xmlns:a16="http://schemas.microsoft.com/office/drawing/2014/main" id="{69104813-3D9C-C967-DC29-4AD960165950}"/>
+              </a:ext>
+            </a:extLst>
+          </p:cNvPr>
+          <p:cNvSpPr>
+            <a:spLocks noGrp="1"/>
+          </p:cNvSpPr>
+          <p:nvPr>
+            <p:ph type="title"/>
+          </p:nvPr>
+        </p:nvSpPr>
+        <p:spPr/>
+        <p:txBody>
+          <a:bodyPr/>
+          <a:lstStyle/>
+          <a:p>
+            <a:endParaRPr lang="en-PK"/>
+          </a:p>
+        </p:txBody>
+      </p:sp>
+      <p:sp>
+        <p:nvSpPr>
+          <p:cNvPr id="3" name="Content Placeholder 2">
+            <a:extLst>
+              <a:ext uri="{FF2B5EF4-FFF2-40B4-BE49-F238E27FC236}">
+                <a16:creationId xmlns:a16="http://schemas.microsoft.com/office/drawing/2014/main" id="{4706C792-BEAC-10DB-D9C5-1A1AF109E246}"/>
+              </a:ext>
+            </a:extLst>
+          </p:cNvPr>
+          <p:cNvSpPr>
+            <a:spLocks noGrp="1"/>
+          </p:cNvSpPr>
+          <p:nvPr>
+            <p:ph idx="1"/>
+          </p:nvPr>
+        </p:nvSpPr>
+        <p:spPr/>
+        <p:txBody>
+          <a:bodyPr/>
+          <a:lstStyle/>
+          <a:p>
+            <a:endParaRPr lang="en-PK"/>
+          </a:p>
+        </p:txBody>
+      </p:sp>
+      <p:sp>
+        <p:nvSpPr>
+          <p:cNvPr id="4" name="TextBox 3">
+            <a:extLst>
+              <a:ext uri="{FF2B5EF4-FFF2-40B4-BE49-F238E27FC236}">
+                <a16:creationId xmlns:a16="http://schemas.microsoft.com/office/drawing/2014/main" id="{DD38232D-3758-F081-79C7-76848A9D49C7}"/>
+              </a:ext>
+            </a:extLst>
+          </p:cNvPr>
+          <p:cNvSpPr txBox="1"/>
+          <p:nvPr/>
+        </p:nvSpPr>
+        <p:spPr>
+          <a:xfrm>
+            <a:off x="152400" y="6488668"/>
+            <a:ext cx="11887200" cy="369332"/>
+          </a:xfrm>
+          <a:prstGeom prst="rect">
+            <a:avLst/>
+          </a:prstGeom>
+          <a:noFill/>
+        </p:spPr>
+        <p:txBody>
+          <a:bodyPr wrap="square" rtlCol="0">
+            <a:spAutoFit/>
+          </a:bodyPr>
+          <a:lstStyle/>
+          <a:p>
+            <a:r>
+              <a:rPr lang="en-US" b="1" dirty="0">
+                <a:solidFill>
+                  <a:srgbClr val="0070C0"/>
+                </a:solidFill>
+              </a:rPr>
+              <a:t>FACULTY OF PHARMACY AND PHARMACEUTICAL SCIENCES                                                                               </a:t>
+            </a:r>
+            <a:r>
+              <a:rPr lang="en-US" b="1" dirty="0">
+                <a:solidFill>
+                  <a:schemeClr val="accent2"/>
+                </a:solidFill>
+              </a:rPr>
+              <a:t>SOFTSOLS PAKISTAN</a:t>
+            </a:r>
+            <a:endParaRPr lang="en-PK" b="1" dirty="0">
+              <a:solidFill>
+                <a:schemeClr val="accent2"/>
+              </a:solidFill>
+            </a:endParaRPr>
+          </a:p>
+        </p:txBody>
+      </p:sp>
+      <p:pic>
+        <p:nvPicPr>
+          <p:cNvPr id="6" name="Picture 5">
+            <a:extLst>
+              <a:ext uri="{FF2B5EF4-FFF2-40B4-BE49-F238E27FC236}">
+                <a16:creationId xmlns:a16="http://schemas.microsoft.com/office/drawing/2014/main" id="{1A1BE073-F22C-1ECE-0574-592AB46044CC}"/>
+              </a:ext>
+            </a:extLst>
+          </p:cNvPr>
+          <p:cNvPicPr>
+            <a:picLocks noChangeAspect="1"/>
+          </p:cNvPicPr>
+          <p:nvPr/>
+        </p:nvPicPr>
+        <p:blipFill>
+          <a:blip r:embed="rId3"/>
+          <a:stretch>
+            <a:fillRect/>
+          </a:stretch>
+        </p:blipFill>
+        <p:spPr>
+          <a:xfrm>
+            <a:off x="0" y="0"/>
+            <a:ext cx="12192000" cy="6311900"/>
+          </a:xfrm>
+          <a:prstGeom prst="rect">
+            <a:avLst/>
+          </a:prstGeom>
+        </p:spPr>
+      </p:pic>
+    </p:spTree>
+    <p:extLst>
+      <p:ext uri="{BB962C8B-B14F-4D97-AF65-F5344CB8AC3E}">
+        <p14:creationId xmlns:p14="http://schemas.microsoft.com/office/powerpoint/2010/main" val="2792856011"/>
+      </p:ext>
+    </p:extLst>
+  </p:cSld>
+  <p:clrMapOvr>
+    <a:masterClrMapping/>
+  </p:clrMapOvr>
+</p:sld>
+</file>
+
+<file path=ppt/slides/slide19.xml><?xml version="1.0" encoding="utf-8"?>
+<p:sld xmlns:a="http://schemas.openxmlformats.org/drawingml/2006/main" xmlns:r="http://schemas.openxmlformats.org/officeDocument/2006/relationships" xmlns:p="http://schemas.openxmlformats.org/presentationml/2006/main">
+  <p:cSld>
+    <p:spTree>
+      <p:nvGrpSpPr>
+        <p:cNvPr id="1" name="">
+          <a:extLst>
+            <a:ext uri="{FF2B5EF4-FFF2-40B4-BE49-F238E27FC236}">
+              <a16:creationId xmlns:a16="http://schemas.microsoft.com/office/drawing/2014/main" id="{9B5254DB-ADA3-B7BE-4C31-7D082AB7B2AE}"/>
+            </a:ext>
+          </a:extLst>
+        </p:cNvPr>
+        <p:cNvGrpSpPr/>
+        <p:nvPr/>
+      </p:nvGrpSpPr>
+      <p:grpSpPr>
+        <a:xfrm>
+          <a:off x="0" y="0"/>
+          <a:ext cx="0" cy="0"/>
+          <a:chOff x="0" y="0"/>
+          <a:chExt cx="0" cy="0"/>
+        </a:xfrm>
+      </p:grpSpPr>
+      <p:sp>
+        <p:nvSpPr>
+          <p:cNvPr id="2" name="Title 1">
+            <a:extLst>
+              <a:ext uri="{FF2B5EF4-FFF2-40B4-BE49-F238E27FC236}">
+                <a16:creationId xmlns:a16="http://schemas.microsoft.com/office/drawing/2014/main" id="{20176479-9A84-D6EA-14FD-C38201841E16}"/>
+              </a:ext>
+            </a:extLst>
+          </p:cNvPr>
+          <p:cNvSpPr>
+            <a:spLocks noGrp="1"/>
+          </p:cNvSpPr>
+          <p:nvPr>
+            <p:ph type="title"/>
+          </p:nvPr>
+        </p:nvSpPr>
+        <p:spPr/>
+        <p:txBody>
+          <a:bodyPr/>
+          <a:lstStyle/>
+          <a:p>
+            <a:endParaRPr lang="en-PK"/>
+          </a:p>
+        </p:txBody>
+      </p:sp>
+      <p:sp>
+        <p:nvSpPr>
+          <p:cNvPr id="3" name="Content Placeholder 2">
+            <a:extLst>
+              <a:ext uri="{FF2B5EF4-FFF2-40B4-BE49-F238E27FC236}">
+                <a16:creationId xmlns:a16="http://schemas.microsoft.com/office/drawing/2014/main" id="{2DB52420-4189-3275-0B03-096F7A5600B2}"/>
+              </a:ext>
+            </a:extLst>
+          </p:cNvPr>
+          <p:cNvSpPr>
+            <a:spLocks noGrp="1"/>
+          </p:cNvSpPr>
+          <p:nvPr>
+            <p:ph idx="1"/>
+          </p:nvPr>
+        </p:nvSpPr>
+        <p:spPr/>
+        <p:txBody>
+          <a:bodyPr/>
+          <a:lstStyle/>
+          <a:p>
+            <a:endParaRPr lang="en-PK" dirty="0"/>
+          </a:p>
+        </p:txBody>
+      </p:sp>
+      <p:sp>
+        <p:nvSpPr>
+          <p:cNvPr id="4" name="TextBox 3">
+            <a:extLst>
+              <a:ext uri="{FF2B5EF4-FFF2-40B4-BE49-F238E27FC236}">
+                <a16:creationId xmlns:a16="http://schemas.microsoft.com/office/drawing/2014/main" id="{0A7E4356-78CB-9D4C-4101-1CD06109856B}"/>
+              </a:ext>
+            </a:extLst>
+          </p:cNvPr>
+          <p:cNvSpPr txBox="1"/>
+          <p:nvPr/>
+        </p:nvSpPr>
+        <p:spPr>
+          <a:xfrm>
+            <a:off x="152400" y="6488668"/>
+            <a:ext cx="11887200" cy="369332"/>
+          </a:xfrm>
+          <a:prstGeom prst="rect">
+            <a:avLst/>
+          </a:prstGeom>
+          <a:noFill/>
+        </p:spPr>
+        <p:txBody>
+          <a:bodyPr wrap="square" rtlCol="0">
+            <a:spAutoFit/>
+          </a:bodyPr>
+          <a:lstStyle/>
+          <a:p>
+            <a:r>
+              <a:rPr lang="en-US" b="1" dirty="0">
+                <a:solidFill>
+                  <a:srgbClr val="0070C0"/>
+                </a:solidFill>
+              </a:rPr>
+              <a:t>FACULTY OF PHARMACY AND PHARMACEUTICAL SCIENCES                                                                               </a:t>
+            </a:r>
+            <a:r>
+              <a:rPr lang="en-US" b="1" dirty="0">
+                <a:solidFill>
+                  <a:schemeClr val="accent2"/>
+                </a:solidFill>
+              </a:rPr>
+              <a:t>SOFTSOLS PAKISTAN</a:t>
+            </a:r>
+            <a:endParaRPr lang="en-PK" b="1" dirty="0">
+              <a:solidFill>
+                <a:schemeClr val="accent2"/>
+              </a:solidFill>
+            </a:endParaRPr>
+          </a:p>
+        </p:txBody>
+      </p:sp>
+      <p:pic>
+        <p:nvPicPr>
+          <p:cNvPr id="6" name="Picture 5">
+            <a:extLst>
+              <a:ext uri="{FF2B5EF4-FFF2-40B4-BE49-F238E27FC236}">
+                <a16:creationId xmlns:a16="http://schemas.microsoft.com/office/drawing/2014/main" id="{BD6016C9-7696-20EC-D719-AE9FE34C5231}"/>
+              </a:ext>
+            </a:extLst>
+          </p:cNvPr>
+          <p:cNvPicPr>
+            <a:picLocks noChangeAspect="1"/>
+          </p:cNvPicPr>
+          <p:nvPr/>
+        </p:nvPicPr>
+        <p:blipFill>
+          <a:blip r:embed="rId2"/>
+          <a:stretch>
+            <a:fillRect/>
+          </a:stretch>
+        </p:blipFill>
+        <p:spPr>
+          <a:xfrm>
+            <a:off x="0" y="0"/>
+            <a:ext cx="7493530" cy="6176963"/>
+          </a:xfrm>
+          <a:prstGeom prst="rect">
+            <a:avLst/>
+          </a:prstGeom>
+        </p:spPr>
+      </p:pic>
+      <p:pic>
+        <p:nvPicPr>
+          <p:cNvPr id="8" name="Picture 7">
+            <a:extLst>
+              <a:ext uri="{FF2B5EF4-FFF2-40B4-BE49-F238E27FC236}">
+                <a16:creationId xmlns:a16="http://schemas.microsoft.com/office/drawing/2014/main" id="{244936C1-A9CF-9D0A-1E8E-2B2C9E926040}"/>
+              </a:ext>
+            </a:extLst>
+          </p:cNvPr>
+          <p:cNvPicPr>
+            <a:picLocks noChangeAspect="1"/>
+          </p:cNvPicPr>
+          <p:nvPr/>
+        </p:nvPicPr>
+        <p:blipFill>
+          <a:blip r:embed="rId3"/>
+          <a:stretch>
+            <a:fillRect/>
+          </a:stretch>
+        </p:blipFill>
+        <p:spPr>
+          <a:xfrm>
+            <a:off x="7493530" y="0"/>
+            <a:ext cx="4698470" cy="6176963"/>
+          </a:xfrm>
+          <a:prstGeom prst="rect">
+            <a:avLst/>
+          </a:prstGeom>
+        </p:spPr>
+      </p:pic>
+      <p:sp>
+        <p:nvSpPr>
+          <p:cNvPr id="9" name="TextBox 8">
+            <a:extLst>
+              <a:ext uri="{FF2B5EF4-FFF2-40B4-BE49-F238E27FC236}">
+                <a16:creationId xmlns:a16="http://schemas.microsoft.com/office/drawing/2014/main" id="{87977849-CE9E-AE25-2E72-0ED334499FBE}"/>
+              </a:ext>
+            </a:extLst>
+          </p:cNvPr>
+          <p:cNvSpPr txBox="1"/>
+          <p:nvPr/>
+        </p:nvSpPr>
+        <p:spPr>
+          <a:xfrm>
+            <a:off x="688622" y="5159022"/>
+            <a:ext cx="5966708" cy="1323439"/>
+          </a:xfrm>
+          <a:prstGeom prst="rect">
+            <a:avLst/>
+          </a:prstGeom>
+          <a:noFill/>
+        </p:spPr>
+        <p:txBody>
+          <a:bodyPr wrap="square" rtlCol="0">
+            <a:spAutoFit/>
+          </a:bodyPr>
+          <a:lstStyle/>
+          <a:p>
+            <a:r>
+              <a:rPr lang="en-US" sz="2000" b="1" dirty="0">
+                <a:solidFill>
+                  <a:srgbClr val="FF0000"/>
+                </a:solidFill>
+              </a:rPr>
+              <a:t>Dean (Admin) and Sub-Admin (Dean Office) will send any kind of notification to Faculty Members and Students.</a:t>
+            </a:r>
+          </a:p>
+          <a:p>
+            <a:r>
+              <a:rPr lang="en-US" sz="2000" b="1" dirty="0">
+                <a:solidFill>
+                  <a:srgbClr val="FF0000"/>
+                </a:solidFill>
+              </a:rPr>
+              <a:t>Also send selected message.</a:t>
+            </a:r>
+            <a:endParaRPr lang="en-PK" sz="2000" b="1" dirty="0">
+              <a:solidFill>
+                <a:srgbClr val="FF0000"/>
+              </a:solidFill>
+            </a:endParaRPr>
+          </a:p>
+        </p:txBody>
+      </p:sp>
+    </p:spTree>
+    <p:extLst>
+      <p:ext uri="{BB962C8B-B14F-4D97-AF65-F5344CB8AC3E}">
+        <p14:creationId xmlns:p14="http://schemas.microsoft.com/office/powerpoint/2010/main" val="1084159943"/>
       </p:ext>
     </p:extLst>
   </p:cSld>
@@ -5725,6 +6480,1634 @@
     <p:extLst>
       <p:ext uri="{BB962C8B-B14F-4D97-AF65-F5344CB8AC3E}">
         <p14:creationId xmlns:p14="http://schemas.microsoft.com/office/powerpoint/2010/main" val="1532115029"/>
+      </p:ext>
+    </p:extLst>
+  </p:cSld>
+  <p:clrMapOvr>
+    <a:masterClrMapping/>
+  </p:clrMapOvr>
+</p:sld>
+</file>
+
+<file path=ppt/slides/slide20.xml><?xml version="1.0" encoding="utf-8"?>
+<p:sld xmlns:a="http://schemas.openxmlformats.org/drawingml/2006/main" xmlns:r="http://schemas.openxmlformats.org/officeDocument/2006/relationships" xmlns:p="http://schemas.openxmlformats.org/presentationml/2006/main">
+  <p:cSld>
+    <p:spTree>
+      <p:nvGrpSpPr>
+        <p:cNvPr id="1" name="">
+          <a:extLst>
+            <a:ext uri="{FF2B5EF4-FFF2-40B4-BE49-F238E27FC236}">
+              <a16:creationId xmlns:a16="http://schemas.microsoft.com/office/drawing/2014/main" id="{C5058DD3-5E18-AA42-0926-509EBDC3EC61}"/>
+            </a:ext>
+          </a:extLst>
+        </p:cNvPr>
+        <p:cNvGrpSpPr/>
+        <p:nvPr/>
+      </p:nvGrpSpPr>
+      <p:grpSpPr>
+        <a:xfrm>
+          <a:off x="0" y="0"/>
+          <a:ext cx="0" cy="0"/>
+          <a:chOff x="0" y="0"/>
+          <a:chExt cx="0" cy="0"/>
+        </a:xfrm>
+      </p:grpSpPr>
+      <p:sp>
+        <p:nvSpPr>
+          <p:cNvPr id="2" name="Title 1">
+            <a:extLst>
+              <a:ext uri="{FF2B5EF4-FFF2-40B4-BE49-F238E27FC236}">
+                <a16:creationId xmlns:a16="http://schemas.microsoft.com/office/drawing/2014/main" id="{45685ADD-97A9-323B-38E9-EB0F2A2B1334}"/>
+              </a:ext>
+            </a:extLst>
+          </p:cNvPr>
+          <p:cNvSpPr>
+            <a:spLocks noGrp="1"/>
+          </p:cNvSpPr>
+          <p:nvPr>
+            <p:ph type="title"/>
+          </p:nvPr>
+        </p:nvSpPr>
+        <p:spPr/>
+        <p:txBody>
+          <a:bodyPr/>
+          <a:lstStyle/>
+          <a:p>
+            <a:endParaRPr lang="en-PK"/>
+          </a:p>
+        </p:txBody>
+      </p:sp>
+      <p:sp>
+        <p:nvSpPr>
+          <p:cNvPr id="3" name="Content Placeholder 2">
+            <a:extLst>
+              <a:ext uri="{FF2B5EF4-FFF2-40B4-BE49-F238E27FC236}">
+                <a16:creationId xmlns:a16="http://schemas.microsoft.com/office/drawing/2014/main" id="{E1F00411-5327-01CA-9759-C503554DBA4B}"/>
+              </a:ext>
+            </a:extLst>
+          </p:cNvPr>
+          <p:cNvSpPr>
+            <a:spLocks noGrp="1"/>
+          </p:cNvSpPr>
+          <p:nvPr>
+            <p:ph idx="1"/>
+          </p:nvPr>
+        </p:nvSpPr>
+        <p:spPr/>
+        <p:txBody>
+          <a:bodyPr/>
+          <a:lstStyle/>
+          <a:p>
+            <a:endParaRPr lang="en-PK"/>
+          </a:p>
+        </p:txBody>
+      </p:sp>
+      <p:sp>
+        <p:nvSpPr>
+          <p:cNvPr id="4" name="TextBox 3">
+            <a:extLst>
+              <a:ext uri="{FF2B5EF4-FFF2-40B4-BE49-F238E27FC236}">
+                <a16:creationId xmlns:a16="http://schemas.microsoft.com/office/drawing/2014/main" id="{C10DBB94-A7F1-0908-C6CA-812FCAA1CB1E}"/>
+              </a:ext>
+            </a:extLst>
+          </p:cNvPr>
+          <p:cNvSpPr txBox="1"/>
+          <p:nvPr/>
+        </p:nvSpPr>
+        <p:spPr>
+          <a:xfrm>
+            <a:off x="152400" y="6488668"/>
+            <a:ext cx="11887200" cy="369332"/>
+          </a:xfrm>
+          <a:prstGeom prst="rect">
+            <a:avLst/>
+          </a:prstGeom>
+          <a:noFill/>
+        </p:spPr>
+        <p:txBody>
+          <a:bodyPr wrap="square" rtlCol="0">
+            <a:spAutoFit/>
+          </a:bodyPr>
+          <a:lstStyle/>
+          <a:p>
+            <a:r>
+              <a:rPr lang="en-US" b="1" dirty="0">
+                <a:solidFill>
+                  <a:srgbClr val="0070C0"/>
+                </a:solidFill>
+              </a:rPr>
+              <a:t>FACULTY OF PHARMACY AND PHARMACEUTICAL SCIENCES                                                                               </a:t>
+            </a:r>
+            <a:r>
+              <a:rPr lang="en-US" b="1" dirty="0">
+                <a:solidFill>
+                  <a:schemeClr val="accent2"/>
+                </a:solidFill>
+              </a:rPr>
+              <a:t>SOFTSOLS PAKISTAN</a:t>
+            </a:r>
+            <a:endParaRPr lang="en-PK" b="1" dirty="0">
+              <a:solidFill>
+                <a:schemeClr val="accent2"/>
+              </a:solidFill>
+            </a:endParaRPr>
+          </a:p>
+        </p:txBody>
+      </p:sp>
+      <p:pic>
+        <p:nvPicPr>
+          <p:cNvPr id="6" name="Picture 5">
+            <a:extLst>
+              <a:ext uri="{FF2B5EF4-FFF2-40B4-BE49-F238E27FC236}">
+                <a16:creationId xmlns:a16="http://schemas.microsoft.com/office/drawing/2014/main" id="{347AD79F-F674-6999-8751-67C8E8CEA824}"/>
+              </a:ext>
+            </a:extLst>
+          </p:cNvPr>
+          <p:cNvPicPr>
+            <a:picLocks noChangeAspect="1"/>
+          </p:cNvPicPr>
+          <p:nvPr/>
+        </p:nvPicPr>
+        <p:blipFill>
+          <a:blip r:embed="rId2"/>
+          <a:stretch>
+            <a:fillRect/>
+          </a:stretch>
+        </p:blipFill>
+        <p:spPr>
+          <a:xfrm>
+            <a:off x="0" y="-1"/>
+            <a:ext cx="12192000" cy="6176963"/>
+          </a:xfrm>
+          <a:prstGeom prst="rect">
+            <a:avLst/>
+          </a:prstGeom>
+        </p:spPr>
+      </p:pic>
+      <p:sp>
+        <p:nvSpPr>
+          <p:cNvPr id="7" name="TextBox 6">
+            <a:extLst>
+              <a:ext uri="{FF2B5EF4-FFF2-40B4-BE49-F238E27FC236}">
+                <a16:creationId xmlns:a16="http://schemas.microsoft.com/office/drawing/2014/main" id="{2ADBF171-DAFA-60D2-ACD8-119BDE2819BD}"/>
+              </a:ext>
+            </a:extLst>
+          </p:cNvPr>
+          <p:cNvSpPr txBox="1"/>
+          <p:nvPr/>
+        </p:nvSpPr>
+        <p:spPr>
+          <a:xfrm>
+            <a:off x="3183467" y="3905956"/>
+            <a:ext cx="6310489" cy="1477328"/>
+          </a:xfrm>
+          <a:prstGeom prst="rect">
+            <a:avLst/>
+          </a:prstGeom>
+          <a:noFill/>
+        </p:spPr>
+        <p:txBody>
+          <a:bodyPr wrap="square" rtlCol="0">
+            <a:spAutoFit/>
+          </a:bodyPr>
+          <a:lstStyle/>
+          <a:p>
+            <a:r>
+              <a:rPr lang="en-US" b="1" dirty="0">
+                <a:solidFill>
+                  <a:srgbClr val="FF0000"/>
+                </a:solidFill>
+              </a:rPr>
+              <a:t>In Result Page, Teacher, HOD and Admin will be able to Post and Access Result of any Subject which will be viewable to higher </a:t>
+            </a:r>
+            <a:r>
+              <a:rPr lang="en-US" b="1" dirty="0" err="1">
+                <a:solidFill>
+                  <a:srgbClr val="FF0000"/>
+                </a:solidFill>
+              </a:rPr>
+              <a:t>hirerchy</a:t>
+            </a:r>
+            <a:r>
+              <a:rPr lang="en-US" b="1" dirty="0">
+                <a:solidFill>
+                  <a:srgbClr val="FF0000"/>
+                </a:solidFill>
+              </a:rPr>
+              <a:t>.</a:t>
+            </a:r>
+          </a:p>
+          <a:p>
+            <a:r>
+              <a:rPr lang="en-US" b="1" dirty="0">
+                <a:solidFill>
+                  <a:srgbClr val="FF0000"/>
+                </a:solidFill>
+              </a:rPr>
+              <a:t>Like any Teacher post Result then it will be viewable to respective HOD and Dean.</a:t>
+            </a:r>
+            <a:endParaRPr lang="en-PK" b="1" dirty="0">
+              <a:solidFill>
+                <a:srgbClr val="FF0000"/>
+              </a:solidFill>
+            </a:endParaRPr>
+          </a:p>
+        </p:txBody>
+      </p:sp>
+    </p:spTree>
+    <p:extLst>
+      <p:ext uri="{BB962C8B-B14F-4D97-AF65-F5344CB8AC3E}">
+        <p14:creationId xmlns:p14="http://schemas.microsoft.com/office/powerpoint/2010/main" val="4239079601"/>
+      </p:ext>
+    </p:extLst>
+  </p:cSld>
+  <p:clrMapOvr>
+    <a:masterClrMapping/>
+  </p:clrMapOvr>
+</p:sld>
+</file>
+
+<file path=ppt/slides/slide21.xml><?xml version="1.0" encoding="utf-8"?>
+<p:sld xmlns:a="http://schemas.openxmlformats.org/drawingml/2006/main" xmlns:r="http://schemas.openxmlformats.org/officeDocument/2006/relationships" xmlns:p="http://schemas.openxmlformats.org/presentationml/2006/main">
+  <p:cSld>
+    <p:spTree>
+      <p:nvGrpSpPr>
+        <p:cNvPr id="1" name="">
+          <a:extLst>
+            <a:ext uri="{FF2B5EF4-FFF2-40B4-BE49-F238E27FC236}">
+              <a16:creationId xmlns:a16="http://schemas.microsoft.com/office/drawing/2014/main" id="{BBBA152D-5B34-3F9A-AF64-72CEFEF066FA}"/>
+            </a:ext>
+          </a:extLst>
+        </p:cNvPr>
+        <p:cNvGrpSpPr/>
+        <p:nvPr/>
+      </p:nvGrpSpPr>
+      <p:grpSpPr>
+        <a:xfrm>
+          <a:off x="0" y="0"/>
+          <a:ext cx="0" cy="0"/>
+          <a:chOff x="0" y="0"/>
+          <a:chExt cx="0" cy="0"/>
+        </a:xfrm>
+      </p:grpSpPr>
+      <p:sp>
+        <p:nvSpPr>
+          <p:cNvPr id="2" name="Title 1">
+            <a:extLst>
+              <a:ext uri="{FF2B5EF4-FFF2-40B4-BE49-F238E27FC236}">
+                <a16:creationId xmlns:a16="http://schemas.microsoft.com/office/drawing/2014/main" id="{A27154D9-37A3-1FFB-D4F0-070CC3271F29}"/>
+              </a:ext>
+            </a:extLst>
+          </p:cNvPr>
+          <p:cNvSpPr>
+            <a:spLocks noGrp="1"/>
+          </p:cNvSpPr>
+          <p:nvPr>
+            <p:ph type="title"/>
+          </p:nvPr>
+        </p:nvSpPr>
+        <p:spPr/>
+        <p:txBody>
+          <a:bodyPr/>
+          <a:lstStyle/>
+          <a:p>
+            <a:endParaRPr lang="en-PK"/>
+          </a:p>
+        </p:txBody>
+      </p:sp>
+      <p:sp>
+        <p:nvSpPr>
+          <p:cNvPr id="3" name="Content Placeholder 2">
+            <a:extLst>
+              <a:ext uri="{FF2B5EF4-FFF2-40B4-BE49-F238E27FC236}">
+                <a16:creationId xmlns:a16="http://schemas.microsoft.com/office/drawing/2014/main" id="{09B29319-F0A7-21BA-41BE-BEB40DA226CC}"/>
+              </a:ext>
+            </a:extLst>
+          </p:cNvPr>
+          <p:cNvSpPr>
+            <a:spLocks noGrp="1"/>
+          </p:cNvSpPr>
+          <p:nvPr>
+            <p:ph idx="1"/>
+          </p:nvPr>
+        </p:nvSpPr>
+        <p:spPr/>
+        <p:txBody>
+          <a:bodyPr/>
+          <a:lstStyle/>
+          <a:p>
+            <a:endParaRPr lang="en-PK"/>
+          </a:p>
+        </p:txBody>
+      </p:sp>
+      <p:sp>
+        <p:nvSpPr>
+          <p:cNvPr id="4" name="TextBox 3">
+            <a:extLst>
+              <a:ext uri="{FF2B5EF4-FFF2-40B4-BE49-F238E27FC236}">
+                <a16:creationId xmlns:a16="http://schemas.microsoft.com/office/drawing/2014/main" id="{CE565390-5C24-CAE4-E92E-9F3FCE8366A5}"/>
+              </a:ext>
+            </a:extLst>
+          </p:cNvPr>
+          <p:cNvSpPr txBox="1"/>
+          <p:nvPr/>
+        </p:nvSpPr>
+        <p:spPr>
+          <a:xfrm>
+            <a:off x="152400" y="6488668"/>
+            <a:ext cx="11887200" cy="369332"/>
+          </a:xfrm>
+          <a:prstGeom prst="rect">
+            <a:avLst/>
+          </a:prstGeom>
+          <a:noFill/>
+        </p:spPr>
+        <p:txBody>
+          <a:bodyPr wrap="square" rtlCol="0">
+            <a:spAutoFit/>
+          </a:bodyPr>
+          <a:lstStyle/>
+          <a:p>
+            <a:r>
+              <a:rPr lang="en-US" b="1" dirty="0">
+                <a:solidFill>
+                  <a:srgbClr val="0070C0"/>
+                </a:solidFill>
+              </a:rPr>
+              <a:t>FACULTY OF PHARMACY AND PHARMACEUTICAL SCIENCES                                                                               </a:t>
+            </a:r>
+            <a:r>
+              <a:rPr lang="en-US" b="1" dirty="0">
+                <a:solidFill>
+                  <a:schemeClr val="accent2"/>
+                </a:solidFill>
+              </a:rPr>
+              <a:t>SOFTSOLS PAKISTAN</a:t>
+            </a:r>
+            <a:endParaRPr lang="en-PK" b="1" dirty="0">
+              <a:solidFill>
+                <a:schemeClr val="accent2"/>
+              </a:solidFill>
+            </a:endParaRPr>
+          </a:p>
+        </p:txBody>
+      </p:sp>
+      <p:pic>
+        <p:nvPicPr>
+          <p:cNvPr id="6" name="Picture 5">
+            <a:extLst>
+              <a:ext uri="{FF2B5EF4-FFF2-40B4-BE49-F238E27FC236}">
+                <a16:creationId xmlns:a16="http://schemas.microsoft.com/office/drawing/2014/main" id="{9CE91497-74AB-C859-CAC4-609EBB3D3166}"/>
+              </a:ext>
+            </a:extLst>
+          </p:cNvPr>
+          <p:cNvPicPr>
+            <a:picLocks noChangeAspect="1"/>
+          </p:cNvPicPr>
+          <p:nvPr/>
+        </p:nvPicPr>
+        <p:blipFill>
+          <a:blip r:embed="rId2"/>
+          <a:stretch>
+            <a:fillRect/>
+          </a:stretch>
+        </p:blipFill>
+        <p:spPr>
+          <a:xfrm>
+            <a:off x="0" y="0"/>
+            <a:ext cx="12192000" cy="6276622"/>
+          </a:xfrm>
+          <a:prstGeom prst="rect">
+            <a:avLst/>
+          </a:prstGeom>
+        </p:spPr>
+      </p:pic>
+      <p:sp>
+        <p:nvSpPr>
+          <p:cNvPr id="7" name="TextBox 6">
+            <a:extLst>
+              <a:ext uri="{FF2B5EF4-FFF2-40B4-BE49-F238E27FC236}">
+                <a16:creationId xmlns:a16="http://schemas.microsoft.com/office/drawing/2014/main" id="{3A857F7E-8077-3723-8DB7-240ADF0280AA}"/>
+              </a:ext>
+            </a:extLst>
+          </p:cNvPr>
+          <p:cNvSpPr txBox="1"/>
+          <p:nvPr/>
+        </p:nvSpPr>
+        <p:spPr>
+          <a:xfrm>
+            <a:off x="3149600" y="4301067"/>
+            <a:ext cx="6739467" cy="646331"/>
+          </a:xfrm>
+          <a:prstGeom prst="rect">
+            <a:avLst/>
+          </a:prstGeom>
+          <a:noFill/>
+        </p:spPr>
+        <p:txBody>
+          <a:bodyPr wrap="square" rtlCol="0">
+            <a:spAutoFit/>
+          </a:bodyPr>
+          <a:lstStyle/>
+          <a:p>
+            <a:r>
+              <a:rPr lang="en-US" b="1" dirty="0">
+                <a:solidFill>
+                  <a:srgbClr val="FF0000"/>
+                </a:solidFill>
+              </a:rPr>
+              <a:t>Dean Office (Sub-Admin) and Dean (Admin) able to add Examination Date Sheet and Exam Results will be added by respective Teacher</a:t>
+            </a:r>
+            <a:endParaRPr lang="en-PK" b="1" dirty="0">
+              <a:solidFill>
+                <a:srgbClr val="FF0000"/>
+              </a:solidFill>
+            </a:endParaRPr>
+          </a:p>
+        </p:txBody>
+      </p:sp>
+    </p:spTree>
+    <p:extLst>
+      <p:ext uri="{BB962C8B-B14F-4D97-AF65-F5344CB8AC3E}">
+        <p14:creationId xmlns:p14="http://schemas.microsoft.com/office/powerpoint/2010/main" val="2145863767"/>
+      </p:ext>
+    </p:extLst>
+  </p:cSld>
+  <p:clrMapOvr>
+    <a:masterClrMapping/>
+  </p:clrMapOvr>
+</p:sld>
+</file>
+
+<file path=ppt/slides/slide22.xml><?xml version="1.0" encoding="utf-8"?>
+<p:sld xmlns:a="http://schemas.openxmlformats.org/drawingml/2006/main" xmlns:r="http://schemas.openxmlformats.org/officeDocument/2006/relationships" xmlns:p="http://schemas.openxmlformats.org/presentationml/2006/main">
+  <p:cSld>
+    <p:spTree>
+      <p:nvGrpSpPr>
+        <p:cNvPr id="1" name="">
+          <a:extLst>
+            <a:ext uri="{FF2B5EF4-FFF2-40B4-BE49-F238E27FC236}">
+              <a16:creationId xmlns:a16="http://schemas.microsoft.com/office/drawing/2014/main" id="{82528CEC-B39E-5887-06DF-A3A7BC89B011}"/>
+            </a:ext>
+          </a:extLst>
+        </p:cNvPr>
+        <p:cNvGrpSpPr/>
+        <p:nvPr/>
+      </p:nvGrpSpPr>
+      <p:grpSpPr>
+        <a:xfrm>
+          <a:off x="0" y="0"/>
+          <a:ext cx="0" cy="0"/>
+          <a:chOff x="0" y="0"/>
+          <a:chExt cx="0" cy="0"/>
+        </a:xfrm>
+      </p:grpSpPr>
+      <p:sp>
+        <p:nvSpPr>
+          <p:cNvPr id="2" name="Title 1">
+            <a:extLst>
+              <a:ext uri="{FF2B5EF4-FFF2-40B4-BE49-F238E27FC236}">
+                <a16:creationId xmlns:a16="http://schemas.microsoft.com/office/drawing/2014/main" id="{53BD4E10-CF2E-EBA3-5BFD-411E6D14B8C8}"/>
+              </a:ext>
+            </a:extLst>
+          </p:cNvPr>
+          <p:cNvSpPr>
+            <a:spLocks noGrp="1"/>
+          </p:cNvSpPr>
+          <p:nvPr>
+            <p:ph type="title"/>
+          </p:nvPr>
+        </p:nvSpPr>
+        <p:spPr/>
+        <p:txBody>
+          <a:bodyPr/>
+          <a:lstStyle/>
+          <a:p>
+            <a:endParaRPr lang="en-PK"/>
+          </a:p>
+        </p:txBody>
+      </p:sp>
+      <p:sp>
+        <p:nvSpPr>
+          <p:cNvPr id="3" name="Content Placeholder 2">
+            <a:extLst>
+              <a:ext uri="{FF2B5EF4-FFF2-40B4-BE49-F238E27FC236}">
+                <a16:creationId xmlns:a16="http://schemas.microsoft.com/office/drawing/2014/main" id="{53A0FBDC-596F-56E7-2BC8-9F070F7B0F8B}"/>
+              </a:ext>
+            </a:extLst>
+          </p:cNvPr>
+          <p:cNvSpPr>
+            <a:spLocks noGrp="1"/>
+          </p:cNvSpPr>
+          <p:nvPr>
+            <p:ph idx="1"/>
+          </p:nvPr>
+        </p:nvSpPr>
+        <p:spPr/>
+        <p:txBody>
+          <a:bodyPr/>
+          <a:lstStyle/>
+          <a:p>
+            <a:endParaRPr lang="en-PK"/>
+          </a:p>
+        </p:txBody>
+      </p:sp>
+      <p:sp>
+        <p:nvSpPr>
+          <p:cNvPr id="4" name="TextBox 3">
+            <a:extLst>
+              <a:ext uri="{FF2B5EF4-FFF2-40B4-BE49-F238E27FC236}">
+                <a16:creationId xmlns:a16="http://schemas.microsoft.com/office/drawing/2014/main" id="{74CD3557-C7DC-0B07-9832-ECC114F81296}"/>
+              </a:ext>
+            </a:extLst>
+          </p:cNvPr>
+          <p:cNvSpPr txBox="1"/>
+          <p:nvPr/>
+        </p:nvSpPr>
+        <p:spPr>
+          <a:xfrm>
+            <a:off x="152400" y="6488668"/>
+            <a:ext cx="11887200" cy="369332"/>
+          </a:xfrm>
+          <a:prstGeom prst="rect">
+            <a:avLst/>
+          </a:prstGeom>
+          <a:noFill/>
+        </p:spPr>
+        <p:txBody>
+          <a:bodyPr wrap="square" rtlCol="0">
+            <a:spAutoFit/>
+          </a:bodyPr>
+          <a:lstStyle/>
+          <a:p>
+            <a:r>
+              <a:rPr lang="en-US" b="1" dirty="0">
+                <a:solidFill>
+                  <a:srgbClr val="0070C0"/>
+                </a:solidFill>
+              </a:rPr>
+              <a:t>FACULTY OF PHARMACY AND PHARMACEUTICAL SCIENCES                                                                               </a:t>
+            </a:r>
+            <a:r>
+              <a:rPr lang="en-US" b="1" dirty="0">
+                <a:solidFill>
+                  <a:schemeClr val="accent2"/>
+                </a:solidFill>
+              </a:rPr>
+              <a:t>SOFTSOLS PAKISTAN</a:t>
+            </a:r>
+            <a:endParaRPr lang="en-PK" b="1" dirty="0">
+              <a:solidFill>
+                <a:schemeClr val="accent2"/>
+              </a:solidFill>
+            </a:endParaRPr>
+          </a:p>
+        </p:txBody>
+      </p:sp>
+      <p:pic>
+        <p:nvPicPr>
+          <p:cNvPr id="6" name="Picture 5">
+            <a:extLst>
+              <a:ext uri="{FF2B5EF4-FFF2-40B4-BE49-F238E27FC236}">
+                <a16:creationId xmlns:a16="http://schemas.microsoft.com/office/drawing/2014/main" id="{28DD3AEE-CD37-6ADB-B5E2-EC399E20E73D}"/>
+              </a:ext>
+            </a:extLst>
+          </p:cNvPr>
+          <p:cNvPicPr>
+            <a:picLocks noChangeAspect="1"/>
+          </p:cNvPicPr>
+          <p:nvPr/>
+        </p:nvPicPr>
+        <p:blipFill>
+          <a:blip r:embed="rId2"/>
+          <a:stretch>
+            <a:fillRect/>
+          </a:stretch>
+        </p:blipFill>
+        <p:spPr>
+          <a:xfrm>
+            <a:off x="0" y="155985"/>
+            <a:ext cx="12192000" cy="6020978"/>
+          </a:xfrm>
+          <a:prstGeom prst="rect">
+            <a:avLst/>
+          </a:prstGeom>
+        </p:spPr>
+      </p:pic>
+      <p:sp>
+        <p:nvSpPr>
+          <p:cNvPr id="7" name="TextBox 6">
+            <a:extLst>
+              <a:ext uri="{FF2B5EF4-FFF2-40B4-BE49-F238E27FC236}">
+                <a16:creationId xmlns:a16="http://schemas.microsoft.com/office/drawing/2014/main" id="{BF9B2BDA-1DB4-4C9C-D1FD-C995DBB7DACA}"/>
+              </a:ext>
+            </a:extLst>
+          </p:cNvPr>
+          <p:cNvSpPr txBox="1"/>
+          <p:nvPr/>
+        </p:nvSpPr>
+        <p:spPr>
+          <a:xfrm>
+            <a:off x="8669867" y="2585156"/>
+            <a:ext cx="2946400" cy="1200329"/>
+          </a:xfrm>
+          <a:prstGeom prst="rect">
+            <a:avLst/>
+          </a:prstGeom>
+          <a:noFill/>
+        </p:spPr>
+        <p:txBody>
+          <a:bodyPr wrap="square" rtlCol="0">
+            <a:spAutoFit/>
+          </a:bodyPr>
+          <a:lstStyle/>
+          <a:p>
+            <a:r>
+              <a:rPr lang="en-US" b="1" dirty="0">
+                <a:solidFill>
+                  <a:srgbClr val="FF0000"/>
+                </a:solidFill>
+              </a:rPr>
+              <a:t>Semester Wise Time Table will be added by Dean Office and Department Head and also by Dean (Admin)</a:t>
+            </a:r>
+            <a:endParaRPr lang="en-PK" b="1" dirty="0">
+              <a:solidFill>
+                <a:srgbClr val="FF0000"/>
+              </a:solidFill>
+            </a:endParaRPr>
+          </a:p>
+        </p:txBody>
+      </p:sp>
+    </p:spTree>
+    <p:extLst>
+      <p:ext uri="{BB962C8B-B14F-4D97-AF65-F5344CB8AC3E}">
+        <p14:creationId xmlns:p14="http://schemas.microsoft.com/office/powerpoint/2010/main" val="3616657786"/>
+      </p:ext>
+    </p:extLst>
+  </p:cSld>
+  <p:clrMapOvr>
+    <a:masterClrMapping/>
+  </p:clrMapOvr>
+</p:sld>
+</file>
+
+<file path=ppt/slides/slide23.xml><?xml version="1.0" encoding="utf-8"?>
+<p:sld xmlns:a="http://schemas.openxmlformats.org/drawingml/2006/main" xmlns:r="http://schemas.openxmlformats.org/officeDocument/2006/relationships" xmlns:p="http://schemas.openxmlformats.org/presentationml/2006/main">
+  <p:cSld>
+    <p:spTree>
+      <p:nvGrpSpPr>
+        <p:cNvPr id="1" name="">
+          <a:extLst>
+            <a:ext uri="{FF2B5EF4-FFF2-40B4-BE49-F238E27FC236}">
+              <a16:creationId xmlns:a16="http://schemas.microsoft.com/office/drawing/2014/main" id="{50E06EE6-8F80-90D0-A71C-813E0F783751}"/>
+            </a:ext>
+          </a:extLst>
+        </p:cNvPr>
+        <p:cNvGrpSpPr/>
+        <p:nvPr/>
+      </p:nvGrpSpPr>
+      <p:grpSpPr>
+        <a:xfrm>
+          <a:off x="0" y="0"/>
+          <a:ext cx="0" cy="0"/>
+          <a:chOff x="0" y="0"/>
+          <a:chExt cx="0" cy="0"/>
+        </a:xfrm>
+      </p:grpSpPr>
+      <p:sp>
+        <p:nvSpPr>
+          <p:cNvPr id="2" name="Title 1">
+            <a:extLst>
+              <a:ext uri="{FF2B5EF4-FFF2-40B4-BE49-F238E27FC236}">
+                <a16:creationId xmlns:a16="http://schemas.microsoft.com/office/drawing/2014/main" id="{69ED4873-4B1F-2597-CC48-B88363BDF272}"/>
+              </a:ext>
+            </a:extLst>
+          </p:cNvPr>
+          <p:cNvSpPr>
+            <a:spLocks noGrp="1"/>
+          </p:cNvSpPr>
+          <p:nvPr>
+            <p:ph type="title"/>
+          </p:nvPr>
+        </p:nvSpPr>
+        <p:spPr/>
+        <p:txBody>
+          <a:bodyPr/>
+          <a:lstStyle/>
+          <a:p>
+            <a:endParaRPr lang="en-PK"/>
+          </a:p>
+        </p:txBody>
+      </p:sp>
+      <p:sp>
+        <p:nvSpPr>
+          <p:cNvPr id="3" name="Content Placeholder 2">
+            <a:extLst>
+              <a:ext uri="{FF2B5EF4-FFF2-40B4-BE49-F238E27FC236}">
+                <a16:creationId xmlns:a16="http://schemas.microsoft.com/office/drawing/2014/main" id="{270141CE-794C-294B-994E-DD9F78C43443}"/>
+              </a:ext>
+            </a:extLst>
+          </p:cNvPr>
+          <p:cNvSpPr>
+            <a:spLocks noGrp="1"/>
+          </p:cNvSpPr>
+          <p:nvPr>
+            <p:ph idx="1"/>
+          </p:nvPr>
+        </p:nvSpPr>
+        <p:spPr/>
+        <p:txBody>
+          <a:bodyPr/>
+          <a:lstStyle/>
+          <a:p>
+            <a:endParaRPr lang="en-PK"/>
+          </a:p>
+        </p:txBody>
+      </p:sp>
+      <p:sp>
+        <p:nvSpPr>
+          <p:cNvPr id="4" name="TextBox 3">
+            <a:extLst>
+              <a:ext uri="{FF2B5EF4-FFF2-40B4-BE49-F238E27FC236}">
+                <a16:creationId xmlns:a16="http://schemas.microsoft.com/office/drawing/2014/main" id="{A3B80B46-BE65-315D-1644-32F1C7A92892}"/>
+              </a:ext>
+            </a:extLst>
+          </p:cNvPr>
+          <p:cNvSpPr txBox="1"/>
+          <p:nvPr/>
+        </p:nvSpPr>
+        <p:spPr>
+          <a:xfrm>
+            <a:off x="152400" y="6488668"/>
+            <a:ext cx="11887200" cy="369332"/>
+          </a:xfrm>
+          <a:prstGeom prst="rect">
+            <a:avLst/>
+          </a:prstGeom>
+          <a:noFill/>
+        </p:spPr>
+        <p:txBody>
+          <a:bodyPr wrap="square" rtlCol="0">
+            <a:spAutoFit/>
+          </a:bodyPr>
+          <a:lstStyle/>
+          <a:p>
+            <a:r>
+              <a:rPr lang="en-US" b="1" dirty="0">
+                <a:solidFill>
+                  <a:srgbClr val="0070C0"/>
+                </a:solidFill>
+              </a:rPr>
+              <a:t>FACULTY OF PHARMACY AND PHARMACEUTICAL SCIENCES                                                                               </a:t>
+            </a:r>
+            <a:r>
+              <a:rPr lang="en-US" b="1" dirty="0">
+                <a:solidFill>
+                  <a:schemeClr val="accent2"/>
+                </a:solidFill>
+              </a:rPr>
+              <a:t>SOFTSOLS PAKISTAN</a:t>
+            </a:r>
+            <a:endParaRPr lang="en-PK" b="1" dirty="0">
+              <a:solidFill>
+                <a:schemeClr val="accent2"/>
+              </a:solidFill>
+            </a:endParaRPr>
+          </a:p>
+        </p:txBody>
+      </p:sp>
+    </p:spTree>
+    <p:extLst>
+      <p:ext uri="{BB962C8B-B14F-4D97-AF65-F5344CB8AC3E}">
+        <p14:creationId xmlns:p14="http://schemas.microsoft.com/office/powerpoint/2010/main" val="3752304277"/>
+      </p:ext>
+    </p:extLst>
+  </p:cSld>
+  <p:clrMapOvr>
+    <a:masterClrMapping/>
+  </p:clrMapOvr>
+</p:sld>
+</file>
+
+<file path=ppt/slides/slide24.xml><?xml version="1.0" encoding="utf-8"?>
+<p:sld xmlns:a="http://schemas.openxmlformats.org/drawingml/2006/main" xmlns:r="http://schemas.openxmlformats.org/officeDocument/2006/relationships" xmlns:p="http://schemas.openxmlformats.org/presentationml/2006/main">
+  <p:cSld>
+    <p:spTree>
+      <p:nvGrpSpPr>
+        <p:cNvPr id="1" name="">
+          <a:extLst>
+            <a:ext uri="{FF2B5EF4-FFF2-40B4-BE49-F238E27FC236}">
+              <a16:creationId xmlns:a16="http://schemas.microsoft.com/office/drawing/2014/main" id="{B78E689E-B663-6FF1-F322-BD2B82E53920}"/>
+            </a:ext>
+          </a:extLst>
+        </p:cNvPr>
+        <p:cNvGrpSpPr/>
+        <p:nvPr/>
+      </p:nvGrpSpPr>
+      <p:grpSpPr>
+        <a:xfrm>
+          <a:off x="0" y="0"/>
+          <a:ext cx="0" cy="0"/>
+          <a:chOff x="0" y="0"/>
+          <a:chExt cx="0" cy="0"/>
+        </a:xfrm>
+      </p:grpSpPr>
+      <p:sp>
+        <p:nvSpPr>
+          <p:cNvPr id="2" name="Title 1">
+            <a:extLst>
+              <a:ext uri="{FF2B5EF4-FFF2-40B4-BE49-F238E27FC236}">
+                <a16:creationId xmlns:a16="http://schemas.microsoft.com/office/drawing/2014/main" id="{1E039784-20F1-C71D-3B74-3F5FEE2AD7D7}"/>
+              </a:ext>
+            </a:extLst>
+          </p:cNvPr>
+          <p:cNvSpPr>
+            <a:spLocks noGrp="1"/>
+          </p:cNvSpPr>
+          <p:nvPr>
+            <p:ph type="title"/>
+          </p:nvPr>
+        </p:nvSpPr>
+        <p:spPr/>
+        <p:txBody>
+          <a:bodyPr/>
+          <a:lstStyle/>
+          <a:p>
+            <a:endParaRPr lang="en-PK"/>
+          </a:p>
+        </p:txBody>
+      </p:sp>
+      <p:sp>
+        <p:nvSpPr>
+          <p:cNvPr id="3" name="Content Placeholder 2">
+            <a:extLst>
+              <a:ext uri="{FF2B5EF4-FFF2-40B4-BE49-F238E27FC236}">
+                <a16:creationId xmlns:a16="http://schemas.microsoft.com/office/drawing/2014/main" id="{B393DFDC-DB58-91F3-1027-17572604DC4D}"/>
+              </a:ext>
+            </a:extLst>
+          </p:cNvPr>
+          <p:cNvSpPr>
+            <a:spLocks noGrp="1"/>
+          </p:cNvSpPr>
+          <p:nvPr>
+            <p:ph idx="1"/>
+          </p:nvPr>
+        </p:nvSpPr>
+        <p:spPr/>
+        <p:txBody>
+          <a:bodyPr/>
+          <a:lstStyle/>
+          <a:p>
+            <a:endParaRPr lang="en-PK"/>
+          </a:p>
+        </p:txBody>
+      </p:sp>
+      <p:sp>
+        <p:nvSpPr>
+          <p:cNvPr id="4" name="TextBox 3">
+            <a:extLst>
+              <a:ext uri="{FF2B5EF4-FFF2-40B4-BE49-F238E27FC236}">
+                <a16:creationId xmlns:a16="http://schemas.microsoft.com/office/drawing/2014/main" id="{882798EF-2731-7C06-87CD-E17F5E6EEF1B}"/>
+              </a:ext>
+            </a:extLst>
+          </p:cNvPr>
+          <p:cNvSpPr txBox="1"/>
+          <p:nvPr/>
+        </p:nvSpPr>
+        <p:spPr>
+          <a:xfrm>
+            <a:off x="152400" y="6488668"/>
+            <a:ext cx="11887200" cy="369332"/>
+          </a:xfrm>
+          <a:prstGeom prst="rect">
+            <a:avLst/>
+          </a:prstGeom>
+          <a:noFill/>
+        </p:spPr>
+        <p:txBody>
+          <a:bodyPr wrap="square" rtlCol="0">
+            <a:spAutoFit/>
+          </a:bodyPr>
+          <a:lstStyle/>
+          <a:p>
+            <a:r>
+              <a:rPr lang="en-US" b="1" dirty="0">
+                <a:solidFill>
+                  <a:srgbClr val="0070C0"/>
+                </a:solidFill>
+              </a:rPr>
+              <a:t>FACULTY OF PHARMACY AND PHARMACEUTICAL SCIENCES                                                                               </a:t>
+            </a:r>
+            <a:r>
+              <a:rPr lang="en-US" b="1" dirty="0">
+                <a:solidFill>
+                  <a:schemeClr val="accent2"/>
+                </a:solidFill>
+              </a:rPr>
+              <a:t>SOFTSOLS PAKISTAN</a:t>
+            </a:r>
+            <a:endParaRPr lang="en-PK" b="1" dirty="0">
+              <a:solidFill>
+                <a:schemeClr val="accent2"/>
+              </a:solidFill>
+            </a:endParaRPr>
+          </a:p>
+        </p:txBody>
+      </p:sp>
+    </p:spTree>
+    <p:extLst>
+      <p:ext uri="{BB962C8B-B14F-4D97-AF65-F5344CB8AC3E}">
+        <p14:creationId xmlns:p14="http://schemas.microsoft.com/office/powerpoint/2010/main" val="421240484"/>
+      </p:ext>
+    </p:extLst>
+  </p:cSld>
+  <p:clrMapOvr>
+    <a:masterClrMapping/>
+  </p:clrMapOvr>
+</p:sld>
+</file>
+
+<file path=ppt/slides/slide25.xml><?xml version="1.0" encoding="utf-8"?>
+<p:sld xmlns:a="http://schemas.openxmlformats.org/drawingml/2006/main" xmlns:r="http://schemas.openxmlformats.org/officeDocument/2006/relationships" xmlns:p="http://schemas.openxmlformats.org/presentationml/2006/main">
+  <p:cSld>
+    <p:spTree>
+      <p:nvGrpSpPr>
+        <p:cNvPr id="1" name="">
+          <a:extLst>
+            <a:ext uri="{FF2B5EF4-FFF2-40B4-BE49-F238E27FC236}">
+              <a16:creationId xmlns:a16="http://schemas.microsoft.com/office/drawing/2014/main" id="{DAB10E7A-800C-0637-6C1E-1CF9EBD9CC7F}"/>
+            </a:ext>
+          </a:extLst>
+        </p:cNvPr>
+        <p:cNvGrpSpPr/>
+        <p:nvPr/>
+      </p:nvGrpSpPr>
+      <p:grpSpPr>
+        <a:xfrm>
+          <a:off x="0" y="0"/>
+          <a:ext cx="0" cy="0"/>
+          <a:chOff x="0" y="0"/>
+          <a:chExt cx="0" cy="0"/>
+        </a:xfrm>
+      </p:grpSpPr>
+      <p:sp>
+        <p:nvSpPr>
+          <p:cNvPr id="2" name="Title 1">
+            <a:extLst>
+              <a:ext uri="{FF2B5EF4-FFF2-40B4-BE49-F238E27FC236}">
+                <a16:creationId xmlns:a16="http://schemas.microsoft.com/office/drawing/2014/main" id="{64A9EA67-62AB-45D8-4D3D-F0778D4221F8}"/>
+              </a:ext>
+            </a:extLst>
+          </p:cNvPr>
+          <p:cNvSpPr>
+            <a:spLocks noGrp="1"/>
+          </p:cNvSpPr>
+          <p:nvPr>
+            <p:ph type="title"/>
+          </p:nvPr>
+        </p:nvSpPr>
+        <p:spPr/>
+        <p:txBody>
+          <a:bodyPr/>
+          <a:lstStyle/>
+          <a:p>
+            <a:endParaRPr lang="en-PK"/>
+          </a:p>
+        </p:txBody>
+      </p:sp>
+      <p:sp>
+        <p:nvSpPr>
+          <p:cNvPr id="3" name="Content Placeholder 2">
+            <a:extLst>
+              <a:ext uri="{FF2B5EF4-FFF2-40B4-BE49-F238E27FC236}">
+                <a16:creationId xmlns:a16="http://schemas.microsoft.com/office/drawing/2014/main" id="{DC55F787-AC9E-D0C4-FEFB-6E92A42F30B2}"/>
+              </a:ext>
+            </a:extLst>
+          </p:cNvPr>
+          <p:cNvSpPr>
+            <a:spLocks noGrp="1"/>
+          </p:cNvSpPr>
+          <p:nvPr>
+            <p:ph idx="1"/>
+          </p:nvPr>
+        </p:nvSpPr>
+        <p:spPr/>
+        <p:txBody>
+          <a:bodyPr/>
+          <a:lstStyle/>
+          <a:p>
+            <a:endParaRPr lang="en-PK"/>
+          </a:p>
+        </p:txBody>
+      </p:sp>
+      <p:sp>
+        <p:nvSpPr>
+          <p:cNvPr id="4" name="TextBox 3">
+            <a:extLst>
+              <a:ext uri="{FF2B5EF4-FFF2-40B4-BE49-F238E27FC236}">
+                <a16:creationId xmlns:a16="http://schemas.microsoft.com/office/drawing/2014/main" id="{5D15C527-6EE0-8885-6A2A-EDFE1867EF60}"/>
+              </a:ext>
+            </a:extLst>
+          </p:cNvPr>
+          <p:cNvSpPr txBox="1"/>
+          <p:nvPr/>
+        </p:nvSpPr>
+        <p:spPr>
+          <a:xfrm>
+            <a:off x="152400" y="6488668"/>
+            <a:ext cx="11887200" cy="369332"/>
+          </a:xfrm>
+          <a:prstGeom prst="rect">
+            <a:avLst/>
+          </a:prstGeom>
+          <a:noFill/>
+        </p:spPr>
+        <p:txBody>
+          <a:bodyPr wrap="square" rtlCol="0">
+            <a:spAutoFit/>
+          </a:bodyPr>
+          <a:lstStyle/>
+          <a:p>
+            <a:r>
+              <a:rPr lang="en-US" b="1" dirty="0">
+                <a:solidFill>
+                  <a:srgbClr val="0070C0"/>
+                </a:solidFill>
+              </a:rPr>
+              <a:t>FACULTY OF PHARMACY AND PHARMACEUTICAL SCIENCES                                                                               </a:t>
+            </a:r>
+            <a:r>
+              <a:rPr lang="en-US" b="1" dirty="0">
+                <a:solidFill>
+                  <a:schemeClr val="accent2"/>
+                </a:solidFill>
+              </a:rPr>
+              <a:t>SOFTSOLS PAKISTAN</a:t>
+            </a:r>
+            <a:endParaRPr lang="en-PK" b="1" dirty="0">
+              <a:solidFill>
+                <a:schemeClr val="accent2"/>
+              </a:solidFill>
+            </a:endParaRPr>
+          </a:p>
+        </p:txBody>
+      </p:sp>
+    </p:spTree>
+    <p:extLst>
+      <p:ext uri="{BB962C8B-B14F-4D97-AF65-F5344CB8AC3E}">
+        <p14:creationId xmlns:p14="http://schemas.microsoft.com/office/powerpoint/2010/main" val="4079400989"/>
+      </p:ext>
+    </p:extLst>
+  </p:cSld>
+  <p:clrMapOvr>
+    <a:masterClrMapping/>
+  </p:clrMapOvr>
+</p:sld>
+</file>
+
+<file path=ppt/slides/slide26.xml><?xml version="1.0" encoding="utf-8"?>
+<p:sld xmlns:a="http://schemas.openxmlformats.org/drawingml/2006/main" xmlns:r="http://schemas.openxmlformats.org/officeDocument/2006/relationships" xmlns:p="http://schemas.openxmlformats.org/presentationml/2006/main">
+  <p:cSld>
+    <p:spTree>
+      <p:nvGrpSpPr>
+        <p:cNvPr id="1" name="">
+          <a:extLst>
+            <a:ext uri="{FF2B5EF4-FFF2-40B4-BE49-F238E27FC236}">
+              <a16:creationId xmlns:a16="http://schemas.microsoft.com/office/drawing/2014/main" id="{5AC60F1C-5A46-1C47-DFA8-F75A6F5BA6D8}"/>
+            </a:ext>
+          </a:extLst>
+        </p:cNvPr>
+        <p:cNvGrpSpPr/>
+        <p:nvPr/>
+      </p:nvGrpSpPr>
+      <p:grpSpPr>
+        <a:xfrm>
+          <a:off x="0" y="0"/>
+          <a:ext cx="0" cy="0"/>
+          <a:chOff x="0" y="0"/>
+          <a:chExt cx="0" cy="0"/>
+        </a:xfrm>
+      </p:grpSpPr>
+      <p:sp>
+        <p:nvSpPr>
+          <p:cNvPr id="2" name="Title 1">
+            <a:extLst>
+              <a:ext uri="{FF2B5EF4-FFF2-40B4-BE49-F238E27FC236}">
+                <a16:creationId xmlns:a16="http://schemas.microsoft.com/office/drawing/2014/main" id="{F38EB5F9-1CBA-BCDD-E20D-2B4EB5164BD0}"/>
+              </a:ext>
+            </a:extLst>
+          </p:cNvPr>
+          <p:cNvSpPr>
+            <a:spLocks noGrp="1"/>
+          </p:cNvSpPr>
+          <p:nvPr>
+            <p:ph type="title"/>
+          </p:nvPr>
+        </p:nvSpPr>
+        <p:spPr/>
+        <p:txBody>
+          <a:bodyPr/>
+          <a:lstStyle/>
+          <a:p>
+            <a:endParaRPr lang="en-PK"/>
+          </a:p>
+        </p:txBody>
+      </p:sp>
+      <p:sp>
+        <p:nvSpPr>
+          <p:cNvPr id="3" name="Content Placeholder 2">
+            <a:extLst>
+              <a:ext uri="{FF2B5EF4-FFF2-40B4-BE49-F238E27FC236}">
+                <a16:creationId xmlns:a16="http://schemas.microsoft.com/office/drawing/2014/main" id="{904223A0-C882-E190-FC04-3B4669DE5AF2}"/>
+              </a:ext>
+            </a:extLst>
+          </p:cNvPr>
+          <p:cNvSpPr>
+            <a:spLocks noGrp="1"/>
+          </p:cNvSpPr>
+          <p:nvPr>
+            <p:ph idx="1"/>
+          </p:nvPr>
+        </p:nvSpPr>
+        <p:spPr/>
+        <p:txBody>
+          <a:bodyPr/>
+          <a:lstStyle/>
+          <a:p>
+            <a:endParaRPr lang="en-PK"/>
+          </a:p>
+        </p:txBody>
+      </p:sp>
+      <p:sp>
+        <p:nvSpPr>
+          <p:cNvPr id="4" name="TextBox 3">
+            <a:extLst>
+              <a:ext uri="{FF2B5EF4-FFF2-40B4-BE49-F238E27FC236}">
+                <a16:creationId xmlns:a16="http://schemas.microsoft.com/office/drawing/2014/main" id="{70F841AD-58DF-60B1-7769-88531D3094D0}"/>
+              </a:ext>
+            </a:extLst>
+          </p:cNvPr>
+          <p:cNvSpPr txBox="1"/>
+          <p:nvPr/>
+        </p:nvSpPr>
+        <p:spPr>
+          <a:xfrm>
+            <a:off x="152400" y="6488668"/>
+            <a:ext cx="11887200" cy="369332"/>
+          </a:xfrm>
+          <a:prstGeom prst="rect">
+            <a:avLst/>
+          </a:prstGeom>
+          <a:noFill/>
+        </p:spPr>
+        <p:txBody>
+          <a:bodyPr wrap="square" rtlCol="0">
+            <a:spAutoFit/>
+          </a:bodyPr>
+          <a:lstStyle/>
+          <a:p>
+            <a:r>
+              <a:rPr lang="en-US" b="1" dirty="0">
+                <a:solidFill>
+                  <a:srgbClr val="0070C0"/>
+                </a:solidFill>
+              </a:rPr>
+              <a:t>FACULTY OF PHARMACY AND PHARMACEUTICAL SCIENCES                                                                               </a:t>
+            </a:r>
+            <a:r>
+              <a:rPr lang="en-US" b="1" dirty="0">
+                <a:solidFill>
+                  <a:schemeClr val="accent2"/>
+                </a:solidFill>
+              </a:rPr>
+              <a:t>SOFTSOLS PAKISTAN</a:t>
+            </a:r>
+            <a:endParaRPr lang="en-PK" b="1" dirty="0">
+              <a:solidFill>
+                <a:schemeClr val="accent2"/>
+              </a:solidFill>
+            </a:endParaRPr>
+          </a:p>
+        </p:txBody>
+      </p:sp>
+    </p:spTree>
+    <p:extLst>
+      <p:ext uri="{BB962C8B-B14F-4D97-AF65-F5344CB8AC3E}">
+        <p14:creationId xmlns:p14="http://schemas.microsoft.com/office/powerpoint/2010/main" val="751017168"/>
+      </p:ext>
+    </p:extLst>
+  </p:cSld>
+  <p:clrMapOvr>
+    <a:masterClrMapping/>
+  </p:clrMapOvr>
+</p:sld>
+</file>
+
+<file path=ppt/slides/slide27.xml><?xml version="1.0" encoding="utf-8"?>
+<p:sld xmlns:a="http://schemas.openxmlformats.org/drawingml/2006/main" xmlns:r="http://schemas.openxmlformats.org/officeDocument/2006/relationships" xmlns:p="http://schemas.openxmlformats.org/presentationml/2006/main">
+  <p:cSld>
+    <p:spTree>
+      <p:nvGrpSpPr>
+        <p:cNvPr id="1" name="">
+          <a:extLst>
+            <a:ext uri="{FF2B5EF4-FFF2-40B4-BE49-F238E27FC236}">
+              <a16:creationId xmlns:a16="http://schemas.microsoft.com/office/drawing/2014/main" id="{D002EE3B-F4FB-2E10-2AA3-E80A913BB964}"/>
+            </a:ext>
+          </a:extLst>
+        </p:cNvPr>
+        <p:cNvGrpSpPr/>
+        <p:nvPr/>
+      </p:nvGrpSpPr>
+      <p:grpSpPr>
+        <a:xfrm>
+          <a:off x="0" y="0"/>
+          <a:ext cx="0" cy="0"/>
+          <a:chOff x="0" y="0"/>
+          <a:chExt cx="0" cy="0"/>
+        </a:xfrm>
+      </p:grpSpPr>
+      <p:sp>
+        <p:nvSpPr>
+          <p:cNvPr id="2" name="Title 1">
+            <a:extLst>
+              <a:ext uri="{FF2B5EF4-FFF2-40B4-BE49-F238E27FC236}">
+                <a16:creationId xmlns:a16="http://schemas.microsoft.com/office/drawing/2014/main" id="{0A030AB6-BC94-BA02-84D5-2CED395B05AD}"/>
+              </a:ext>
+            </a:extLst>
+          </p:cNvPr>
+          <p:cNvSpPr>
+            <a:spLocks noGrp="1"/>
+          </p:cNvSpPr>
+          <p:nvPr>
+            <p:ph type="title"/>
+          </p:nvPr>
+        </p:nvSpPr>
+        <p:spPr/>
+        <p:txBody>
+          <a:bodyPr/>
+          <a:lstStyle/>
+          <a:p>
+            <a:endParaRPr lang="en-PK"/>
+          </a:p>
+        </p:txBody>
+      </p:sp>
+      <p:sp>
+        <p:nvSpPr>
+          <p:cNvPr id="3" name="Content Placeholder 2">
+            <a:extLst>
+              <a:ext uri="{FF2B5EF4-FFF2-40B4-BE49-F238E27FC236}">
+                <a16:creationId xmlns:a16="http://schemas.microsoft.com/office/drawing/2014/main" id="{1863503B-1A5F-E5D1-8222-FB6975B5A920}"/>
+              </a:ext>
+            </a:extLst>
+          </p:cNvPr>
+          <p:cNvSpPr>
+            <a:spLocks noGrp="1"/>
+          </p:cNvSpPr>
+          <p:nvPr>
+            <p:ph idx="1"/>
+          </p:nvPr>
+        </p:nvSpPr>
+        <p:spPr/>
+        <p:txBody>
+          <a:bodyPr/>
+          <a:lstStyle/>
+          <a:p>
+            <a:endParaRPr lang="en-PK"/>
+          </a:p>
+        </p:txBody>
+      </p:sp>
+      <p:sp>
+        <p:nvSpPr>
+          <p:cNvPr id="4" name="TextBox 3">
+            <a:extLst>
+              <a:ext uri="{FF2B5EF4-FFF2-40B4-BE49-F238E27FC236}">
+                <a16:creationId xmlns:a16="http://schemas.microsoft.com/office/drawing/2014/main" id="{04CDEE3D-B3B3-480D-53EB-5C40A0B0197C}"/>
+              </a:ext>
+            </a:extLst>
+          </p:cNvPr>
+          <p:cNvSpPr txBox="1"/>
+          <p:nvPr/>
+        </p:nvSpPr>
+        <p:spPr>
+          <a:xfrm>
+            <a:off x="152400" y="6488668"/>
+            <a:ext cx="11887200" cy="369332"/>
+          </a:xfrm>
+          <a:prstGeom prst="rect">
+            <a:avLst/>
+          </a:prstGeom>
+          <a:noFill/>
+        </p:spPr>
+        <p:txBody>
+          <a:bodyPr wrap="square" rtlCol="0">
+            <a:spAutoFit/>
+          </a:bodyPr>
+          <a:lstStyle/>
+          <a:p>
+            <a:r>
+              <a:rPr lang="en-US" b="1" dirty="0">
+                <a:solidFill>
+                  <a:srgbClr val="0070C0"/>
+                </a:solidFill>
+              </a:rPr>
+              <a:t>FACULTY OF PHARMACY AND PHARMACEUTICAL SCIENCES                                                                               </a:t>
+            </a:r>
+            <a:r>
+              <a:rPr lang="en-US" b="1" dirty="0">
+                <a:solidFill>
+                  <a:schemeClr val="accent2"/>
+                </a:solidFill>
+              </a:rPr>
+              <a:t>SOFTSOLS PAKISTAN</a:t>
+            </a:r>
+            <a:endParaRPr lang="en-PK" b="1" dirty="0">
+              <a:solidFill>
+                <a:schemeClr val="accent2"/>
+              </a:solidFill>
+            </a:endParaRPr>
+          </a:p>
+        </p:txBody>
+      </p:sp>
+    </p:spTree>
+    <p:extLst>
+      <p:ext uri="{BB962C8B-B14F-4D97-AF65-F5344CB8AC3E}">
+        <p14:creationId xmlns:p14="http://schemas.microsoft.com/office/powerpoint/2010/main" val="3048673276"/>
+      </p:ext>
+    </p:extLst>
+  </p:cSld>
+  <p:clrMapOvr>
+    <a:masterClrMapping/>
+  </p:clrMapOvr>
+</p:sld>
+</file>
+
+<file path=ppt/slides/slide28.xml><?xml version="1.0" encoding="utf-8"?>
+<p:sld xmlns:a="http://schemas.openxmlformats.org/drawingml/2006/main" xmlns:r="http://schemas.openxmlformats.org/officeDocument/2006/relationships" xmlns:p="http://schemas.openxmlformats.org/presentationml/2006/main">
+  <p:cSld>
+    <p:spTree>
+      <p:nvGrpSpPr>
+        <p:cNvPr id="1" name="">
+          <a:extLst>
+            <a:ext uri="{FF2B5EF4-FFF2-40B4-BE49-F238E27FC236}">
+              <a16:creationId xmlns:a16="http://schemas.microsoft.com/office/drawing/2014/main" id="{A76C9143-941C-458E-6559-70E33C495D66}"/>
+            </a:ext>
+          </a:extLst>
+        </p:cNvPr>
+        <p:cNvGrpSpPr/>
+        <p:nvPr/>
+      </p:nvGrpSpPr>
+      <p:grpSpPr>
+        <a:xfrm>
+          <a:off x="0" y="0"/>
+          <a:ext cx="0" cy="0"/>
+          <a:chOff x="0" y="0"/>
+          <a:chExt cx="0" cy="0"/>
+        </a:xfrm>
+      </p:grpSpPr>
+      <p:sp>
+        <p:nvSpPr>
+          <p:cNvPr id="2" name="Title 1">
+            <a:extLst>
+              <a:ext uri="{FF2B5EF4-FFF2-40B4-BE49-F238E27FC236}">
+                <a16:creationId xmlns:a16="http://schemas.microsoft.com/office/drawing/2014/main" id="{27890E13-F7EF-1456-83A1-F2CE5A06739C}"/>
+              </a:ext>
+            </a:extLst>
+          </p:cNvPr>
+          <p:cNvSpPr>
+            <a:spLocks noGrp="1"/>
+          </p:cNvSpPr>
+          <p:nvPr>
+            <p:ph type="title"/>
+          </p:nvPr>
+        </p:nvSpPr>
+        <p:spPr/>
+        <p:txBody>
+          <a:bodyPr/>
+          <a:lstStyle/>
+          <a:p>
+            <a:endParaRPr lang="en-PK"/>
+          </a:p>
+        </p:txBody>
+      </p:sp>
+      <p:sp>
+        <p:nvSpPr>
+          <p:cNvPr id="3" name="Content Placeholder 2">
+            <a:extLst>
+              <a:ext uri="{FF2B5EF4-FFF2-40B4-BE49-F238E27FC236}">
+                <a16:creationId xmlns:a16="http://schemas.microsoft.com/office/drawing/2014/main" id="{9D9AC81C-17BD-D1B7-14F7-827361DB619B}"/>
+              </a:ext>
+            </a:extLst>
+          </p:cNvPr>
+          <p:cNvSpPr>
+            <a:spLocks noGrp="1"/>
+          </p:cNvSpPr>
+          <p:nvPr>
+            <p:ph idx="1"/>
+          </p:nvPr>
+        </p:nvSpPr>
+        <p:spPr/>
+        <p:txBody>
+          <a:bodyPr/>
+          <a:lstStyle/>
+          <a:p>
+            <a:endParaRPr lang="en-PK"/>
+          </a:p>
+        </p:txBody>
+      </p:sp>
+      <p:sp>
+        <p:nvSpPr>
+          <p:cNvPr id="4" name="TextBox 3">
+            <a:extLst>
+              <a:ext uri="{FF2B5EF4-FFF2-40B4-BE49-F238E27FC236}">
+                <a16:creationId xmlns:a16="http://schemas.microsoft.com/office/drawing/2014/main" id="{62F3FC56-3FEF-5549-7834-568024F63D5F}"/>
+              </a:ext>
+            </a:extLst>
+          </p:cNvPr>
+          <p:cNvSpPr txBox="1"/>
+          <p:nvPr/>
+        </p:nvSpPr>
+        <p:spPr>
+          <a:xfrm>
+            <a:off x="152400" y="6488668"/>
+            <a:ext cx="11887200" cy="369332"/>
+          </a:xfrm>
+          <a:prstGeom prst="rect">
+            <a:avLst/>
+          </a:prstGeom>
+          <a:noFill/>
+        </p:spPr>
+        <p:txBody>
+          <a:bodyPr wrap="square" rtlCol="0">
+            <a:spAutoFit/>
+          </a:bodyPr>
+          <a:lstStyle/>
+          <a:p>
+            <a:r>
+              <a:rPr lang="en-US" b="1" dirty="0">
+                <a:solidFill>
+                  <a:srgbClr val="0070C0"/>
+                </a:solidFill>
+              </a:rPr>
+              <a:t>FACULTY OF PHARMACY AND PHARMACEUTICAL SCIENCES                                                                               </a:t>
+            </a:r>
+            <a:r>
+              <a:rPr lang="en-US" b="1" dirty="0">
+                <a:solidFill>
+                  <a:schemeClr val="accent2"/>
+                </a:solidFill>
+              </a:rPr>
+              <a:t>SOFTSOLS PAKISTAN</a:t>
+            </a:r>
+            <a:endParaRPr lang="en-PK" b="1" dirty="0">
+              <a:solidFill>
+                <a:schemeClr val="accent2"/>
+              </a:solidFill>
+            </a:endParaRPr>
+          </a:p>
+        </p:txBody>
+      </p:sp>
+    </p:spTree>
+    <p:extLst>
+      <p:ext uri="{BB962C8B-B14F-4D97-AF65-F5344CB8AC3E}">
+        <p14:creationId xmlns:p14="http://schemas.microsoft.com/office/powerpoint/2010/main" val="188962397"/>
+      </p:ext>
+    </p:extLst>
+  </p:cSld>
+  <p:clrMapOvr>
+    <a:masterClrMapping/>
+  </p:clrMapOvr>
+</p:sld>
+</file>
+
+<file path=ppt/slides/slide29.xml><?xml version="1.0" encoding="utf-8"?>
+<p:sld xmlns:a="http://schemas.openxmlformats.org/drawingml/2006/main" xmlns:r="http://schemas.openxmlformats.org/officeDocument/2006/relationships" xmlns:p="http://schemas.openxmlformats.org/presentationml/2006/main">
+  <p:cSld>
+    <p:spTree>
+      <p:nvGrpSpPr>
+        <p:cNvPr id="1" name="">
+          <a:extLst>
+            <a:ext uri="{FF2B5EF4-FFF2-40B4-BE49-F238E27FC236}">
+              <a16:creationId xmlns:a16="http://schemas.microsoft.com/office/drawing/2014/main" id="{187AD216-50C4-3BB1-105A-39608BD9CBDF}"/>
+            </a:ext>
+          </a:extLst>
+        </p:cNvPr>
+        <p:cNvGrpSpPr/>
+        <p:nvPr/>
+      </p:nvGrpSpPr>
+      <p:grpSpPr>
+        <a:xfrm>
+          <a:off x="0" y="0"/>
+          <a:ext cx="0" cy="0"/>
+          <a:chOff x="0" y="0"/>
+          <a:chExt cx="0" cy="0"/>
+        </a:xfrm>
+      </p:grpSpPr>
+      <p:sp>
+        <p:nvSpPr>
+          <p:cNvPr id="2" name="Title 1">
+            <a:extLst>
+              <a:ext uri="{FF2B5EF4-FFF2-40B4-BE49-F238E27FC236}">
+                <a16:creationId xmlns:a16="http://schemas.microsoft.com/office/drawing/2014/main" id="{2192CA1D-39B5-8B4A-9EB7-C8093BB6D5D7}"/>
+              </a:ext>
+            </a:extLst>
+          </p:cNvPr>
+          <p:cNvSpPr>
+            <a:spLocks noGrp="1"/>
+          </p:cNvSpPr>
+          <p:nvPr>
+            <p:ph type="title"/>
+          </p:nvPr>
+        </p:nvSpPr>
+        <p:spPr/>
+        <p:txBody>
+          <a:bodyPr/>
+          <a:lstStyle/>
+          <a:p>
+            <a:endParaRPr lang="en-PK"/>
+          </a:p>
+        </p:txBody>
+      </p:sp>
+      <p:sp>
+        <p:nvSpPr>
+          <p:cNvPr id="3" name="Content Placeholder 2">
+            <a:extLst>
+              <a:ext uri="{FF2B5EF4-FFF2-40B4-BE49-F238E27FC236}">
+                <a16:creationId xmlns:a16="http://schemas.microsoft.com/office/drawing/2014/main" id="{1D8030FF-1C9B-3015-D68B-28D9224E888C}"/>
+              </a:ext>
+            </a:extLst>
+          </p:cNvPr>
+          <p:cNvSpPr>
+            <a:spLocks noGrp="1"/>
+          </p:cNvSpPr>
+          <p:nvPr>
+            <p:ph idx="1"/>
+          </p:nvPr>
+        </p:nvSpPr>
+        <p:spPr/>
+        <p:txBody>
+          <a:bodyPr/>
+          <a:lstStyle/>
+          <a:p>
+            <a:endParaRPr lang="en-PK"/>
+          </a:p>
+        </p:txBody>
+      </p:sp>
+      <p:sp>
+        <p:nvSpPr>
+          <p:cNvPr id="4" name="TextBox 3">
+            <a:extLst>
+              <a:ext uri="{FF2B5EF4-FFF2-40B4-BE49-F238E27FC236}">
+                <a16:creationId xmlns:a16="http://schemas.microsoft.com/office/drawing/2014/main" id="{E9EA3CEA-E7FB-CAB9-94A3-E611D11D86FD}"/>
+              </a:ext>
+            </a:extLst>
+          </p:cNvPr>
+          <p:cNvSpPr txBox="1"/>
+          <p:nvPr/>
+        </p:nvSpPr>
+        <p:spPr>
+          <a:xfrm>
+            <a:off x="152400" y="6488668"/>
+            <a:ext cx="11887200" cy="369332"/>
+          </a:xfrm>
+          <a:prstGeom prst="rect">
+            <a:avLst/>
+          </a:prstGeom>
+          <a:noFill/>
+        </p:spPr>
+        <p:txBody>
+          <a:bodyPr wrap="square" rtlCol="0">
+            <a:spAutoFit/>
+          </a:bodyPr>
+          <a:lstStyle/>
+          <a:p>
+            <a:r>
+              <a:rPr lang="en-US" b="1" dirty="0">
+                <a:solidFill>
+                  <a:srgbClr val="0070C0"/>
+                </a:solidFill>
+              </a:rPr>
+              <a:t>FACULTY OF PHARMACY AND PHARMACEUTICAL SCIENCES                                                                               </a:t>
+            </a:r>
+            <a:r>
+              <a:rPr lang="en-US" b="1" dirty="0">
+                <a:solidFill>
+                  <a:schemeClr val="accent2"/>
+                </a:solidFill>
+              </a:rPr>
+              <a:t>SOFTSOLS PAKISTAN</a:t>
+            </a:r>
+            <a:endParaRPr lang="en-PK" b="1" dirty="0">
+              <a:solidFill>
+                <a:schemeClr val="accent2"/>
+              </a:solidFill>
+            </a:endParaRPr>
+          </a:p>
+        </p:txBody>
+      </p:sp>
+    </p:spTree>
+    <p:extLst>
+      <p:ext uri="{BB962C8B-B14F-4D97-AF65-F5344CB8AC3E}">
+        <p14:creationId xmlns:p14="http://schemas.microsoft.com/office/powerpoint/2010/main" val="2644100893"/>
       </p:ext>
     </p:extLst>
   </p:cSld>

--- a/SUPER ADMIN ROLE - DEAN ROLE.pptx
+++ b/SUPER ADMIN ROLE - DEAN ROLE.pptx
@@ -7195,7 +7195,19 @@
           <a:bodyPr/>
           <a:lstStyle/>
           <a:p>
-            <a:endParaRPr lang="en-PK"/>
+            <a:r>
+              <a:rPr lang="en-US" b="1" dirty="0">
+                <a:solidFill>
+                  <a:srgbClr val="FF0000"/>
+                </a:solidFill>
+              </a:rPr>
+              <a:t>DEAN OFFICE (SUB-ADMIN) ACCESS</a:t>
+            </a:r>
+            <a:endParaRPr lang="en-PK" b="1" dirty="0">
+              <a:solidFill>
+                <a:srgbClr val="FF0000"/>
+              </a:solidFill>
+            </a:endParaRPr>
           </a:p>
         </p:txBody>
       </p:sp>
@@ -7220,7 +7232,56 @@
           <a:bodyPr/>
           <a:lstStyle/>
           <a:p>
-            <a:endParaRPr lang="en-PK"/>
+            <a:r>
+              <a:rPr lang="en-US" dirty="0"/>
+              <a:t>Dean Office Access Credentials are as follows:</a:t>
+            </a:r>
+          </a:p>
+          <a:p>
+            <a:pPr marL="0" indent="0">
+              <a:buNone/>
+            </a:pPr>
+            <a:r>
+              <a:rPr lang="en-US" dirty="0"/>
+              <a:t>Email: office@uok.edu.pk </a:t>
+            </a:r>
+          </a:p>
+          <a:p>
+            <a:pPr marL="0" indent="0">
+              <a:buNone/>
+            </a:pPr>
+            <a:r>
+              <a:rPr lang="en-US" dirty="0"/>
+              <a:t>Password: 123456</a:t>
+            </a:r>
+          </a:p>
+          <a:p>
+            <a:pPr marL="0" indent="0">
+              <a:buNone/>
+            </a:pPr>
+            <a:endParaRPr lang="en-US" dirty="0"/>
+          </a:p>
+          <a:p>
+            <a:pPr marL="0" indent="0">
+              <a:buNone/>
+            </a:pPr>
+            <a:r>
+              <a:rPr lang="en-US" dirty="0"/>
+              <a:t>Dean Office able to:</a:t>
+            </a:r>
+          </a:p>
+          <a:p>
+            <a:r>
+              <a:rPr lang="en-US" dirty="0"/>
+              <a:t>APPROVE Student’s Account.</a:t>
+            </a:r>
+          </a:p>
+          <a:p>
+            <a:r>
+              <a:rPr lang="en-US" dirty="0"/>
+              <a:t>Add Time Table, Exams Sheet, Results and also send notification</a:t>
+            </a:r>
+            <a:endParaRPr lang="en-PK" dirty="0"/>
           </a:p>
         </p:txBody>
       </p:sp>

--- a/SUPER ADMIN ROLE - DEAN ROLE.pptx
+++ b/SUPER ADMIN ROLE - DEAN ROLE.pptx
@@ -7394,7 +7394,11 @@
           <a:bodyPr/>
           <a:lstStyle/>
           <a:p>
-            <a:endParaRPr lang="en-PK"/>
+            <a:r>
+              <a:rPr lang="en-US" dirty="0"/>
+              <a:t>Other Accounts Access</a:t>
+            </a:r>
+            <a:endParaRPr lang="en-PK" dirty="0"/>
           </a:p>
         </p:txBody>
       </p:sp>
@@ -7419,6 +7423,30 @@
           <a:bodyPr/>
           <a:lstStyle/>
           <a:p>
+            <a:r>
+              <a:rPr lang="en-US" dirty="0"/>
+              <a:t>HODs Account</a:t>
+            </a:r>
+          </a:p>
+          <a:p>
+            <a:r>
+              <a:rPr lang="en-US" dirty="0"/>
+              <a:t>Faculty (Teachers)</a:t>
+            </a:r>
+          </a:p>
+          <a:p>
+            <a:r>
+              <a:rPr lang="en-US" dirty="0"/>
+              <a:t>Students: All 5 Years, </a:t>
+            </a:r>
+            <a:r>
+              <a:rPr lang="en-US" dirty="0" err="1"/>
+              <a:t>M.Phil</a:t>
+            </a:r>
+            <a:r>
+              <a:rPr lang="en-US"/>
+              <a:t> and PhD Students </a:t>
+            </a:r>
             <a:endParaRPr lang="en-PK"/>
           </a:p>
         </p:txBody>
